--- a/Linear_Algebra/w9_Topic Modeling.pptx
+++ b/Linear_Algebra/w9_Topic Modeling.pptx
@@ -5,10 +5,10 @@
     <p:sldMasterId id="2147483660" r:id="rId1"/>
   </p:sldMasterIdLst>
   <p:notesMasterIdLst>
-    <p:notesMasterId r:id="rId18"/>
+    <p:notesMasterId r:id="rId22"/>
   </p:notesMasterIdLst>
   <p:handoutMasterIdLst>
-    <p:handoutMasterId r:id="rId19"/>
+    <p:handoutMasterId r:id="rId23"/>
   </p:handoutMasterIdLst>
   <p:sldIdLst>
     <p:sldId id="256" r:id="rId2"/>
@@ -27,6 +27,10 @@
     <p:sldId id="1101" r:id="rId15"/>
     <p:sldId id="1102" r:id="rId16"/>
     <p:sldId id="1107" r:id="rId17"/>
+    <p:sldId id="1108" r:id="rId18"/>
+    <p:sldId id="1109" r:id="rId19"/>
+    <p:sldId id="1110" r:id="rId20"/>
+    <p:sldId id="1111" r:id="rId21"/>
   </p:sldIdLst>
   <p:sldSz cx="12192000" cy="6858000"/>
   <p:notesSz cx="6858000" cy="9144000"/>
@@ -150,6 +154,10 @@
             <p14:sldId id="1101"/>
             <p14:sldId id="1102"/>
             <p14:sldId id="1107"/>
+            <p14:sldId id="1108"/>
+            <p14:sldId id="1109"/>
+            <p14:sldId id="1110"/>
+            <p14:sldId id="1111"/>
           </p14:sldIdLst>
         </p14:section>
         <p14:section name="자세한 정보" id="{2CC34DB2-6590-42C0-AD4B-A04C6060184E}">
@@ -274,7 +282,7 @@
                 <a:latin typeface="맑은 고딕" panose="020B0503020000020004" pitchFamily="50" charset="-127"/>
                 <a:ea typeface="맑은 고딕" panose="020B0503020000020004" pitchFamily="50" charset="-127"/>
               </a:rPr>
-              <a:t>2026-06-01</a:t>
+              <a:t>2026-06-02</a:t>
             </a:fld>
             <a:endParaRPr lang="ko-KR" altLang="en-US">
               <a:latin typeface="맑은 고딕" panose="020B0503020000020004" pitchFamily="50" charset="-127"/>
@@ -460,7 +468,7 @@
           <a:p>
             <a:fld id="{43E1C3DD-4A19-441D-907C-380838DB51C4}" type="datetime1">
               <a:rPr lang="ko-KR" altLang="en-US" noProof="0" smtClean="0"/>
-              <a:t>2026-06-01</a:t>
+              <a:t>2026-06-02</a:t>
             </a:fld>
             <a:endParaRPr lang="ko-KR" altLang="en-US" noProof="0"/>
           </a:p>
@@ -1666,6 +1674,360 @@
 </p:notes>
 </file>
 
+<file path=ppt/notesSlides/notesSlide17.xml><?xml version="1.0" encoding="utf-8"?>
+<p:notes xmlns:a="http://schemas.openxmlformats.org/drawingml/2006/main" xmlns:r="http://schemas.openxmlformats.org/officeDocument/2006/relationships" xmlns:p="http://schemas.openxmlformats.org/presentationml/2006/main">
+  <p:cSld>
+    <p:spTree>
+      <p:nvGrpSpPr>
+        <p:cNvPr id="1" name="">
+          <a:extLst>
+            <a:ext uri="{FF2B5EF4-FFF2-40B4-BE49-F238E27FC236}">
+              <a16:creationId xmlns:a16="http://schemas.microsoft.com/office/drawing/2014/main" id="{554ED744-5815-3EA4-A0DC-88B79604405E}"/>
+            </a:ext>
+          </a:extLst>
+        </p:cNvPr>
+        <p:cNvGrpSpPr/>
+        <p:nvPr/>
+      </p:nvGrpSpPr>
+      <p:grpSpPr>
+        <a:xfrm>
+          <a:off x="0" y="0"/>
+          <a:ext cx="0" cy="0"/>
+          <a:chOff x="0" y="0"/>
+          <a:chExt cx="0" cy="0"/>
+        </a:xfrm>
+      </p:grpSpPr>
+      <p:sp>
+        <p:nvSpPr>
+          <p:cNvPr id="2" name="슬라이드 이미지 개체 틀 1">
+            <a:extLst>
+              <a:ext uri="{FF2B5EF4-FFF2-40B4-BE49-F238E27FC236}">
+                <a16:creationId xmlns:a16="http://schemas.microsoft.com/office/drawing/2014/main" id="{948AD6CB-5E79-E410-F9C0-4E4DD79716FB}"/>
+              </a:ext>
+            </a:extLst>
+          </p:cNvPr>
+          <p:cNvSpPr>
+            <a:spLocks noGrp="1" noRot="1" noChangeAspect="1"/>
+          </p:cNvSpPr>
+          <p:nvPr>
+            <p:ph type="sldImg"/>
+          </p:nvPr>
+        </p:nvSpPr>
+        <p:spPr/>
+      </p:sp>
+      <p:sp>
+        <p:nvSpPr>
+          <p:cNvPr id="3" name="슬라이드 노트 개체 틀 2">
+            <a:extLst>
+              <a:ext uri="{FF2B5EF4-FFF2-40B4-BE49-F238E27FC236}">
+                <a16:creationId xmlns:a16="http://schemas.microsoft.com/office/drawing/2014/main" id="{B770B165-5FCB-0C3F-7D74-774A24F539E6}"/>
+              </a:ext>
+            </a:extLst>
+          </p:cNvPr>
+          <p:cNvSpPr>
+            <a:spLocks noGrp="1"/>
+          </p:cNvSpPr>
+          <p:nvPr>
+            <p:ph type="body" idx="1"/>
+          </p:nvPr>
+        </p:nvSpPr>
+        <p:spPr/>
+        <p:txBody>
+          <a:bodyPr/>
+          <a:lstStyle/>
+          <a:p>
+            <a:endParaRPr lang="ko-KR" altLang="en-US">
+              <a:latin typeface="맑은 고딕" panose="020B0503020000020004" pitchFamily="50" charset="-127"/>
+              <a:ea typeface="맑은 고딕" panose="020B0503020000020004" pitchFamily="50" charset="-127"/>
+            </a:endParaRPr>
+          </a:p>
+        </p:txBody>
+      </p:sp>
+      <p:sp>
+        <p:nvSpPr>
+          <p:cNvPr id="4" name="슬라이드 번호 개체 틀 3">
+            <a:extLst>
+              <a:ext uri="{FF2B5EF4-FFF2-40B4-BE49-F238E27FC236}">
+                <a16:creationId xmlns:a16="http://schemas.microsoft.com/office/drawing/2014/main" id="{82C3C31A-77D5-441F-96A0-54D658D6DEB1}"/>
+              </a:ext>
+            </a:extLst>
+          </p:cNvPr>
+          <p:cNvSpPr>
+            <a:spLocks noGrp="1"/>
+          </p:cNvSpPr>
+          <p:nvPr>
+            <p:ph type="sldNum" sz="quarter" idx="5"/>
+          </p:nvPr>
+        </p:nvSpPr>
+        <p:spPr/>
+        <p:txBody>
+          <a:bodyPr/>
+          <a:lstStyle/>
+          <a:p>
+            <a:pPr rtl="0"/>
+            <a:fld id="{DF61EA0F-A667-4B49-8422-0062BC55E249}" type="slidenum">
+              <a:rPr lang="en-US" altLang="ko-KR" smtClean="0">
+                <a:latin typeface="맑은 고딕" panose="020B0503020000020004" pitchFamily="50" charset="-127"/>
+                <a:ea typeface="맑은 고딕" panose="020B0503020000020004" pitchFamily="50" charset="-127"/>
+              </a:rPr>
+              <a:t>17</a:t>
+            </a:fld>
+            <a:endParaRPr lang="ko-KR" altLang="en-US">
+              <a:latin typeface="맑은 고딕" panose="020B0503020000020004" pitchFamily="50" charset="-127"/>
+              <a:ea typeface="맑은 고딕" panose="020B0503020000020004" pitchFamily="50" charset="-127"/>
+            </a:endParaRPr>
+          </a:p>
+        </p:txBody>
+      </p:sp>
+    </p:spTree>
+    <p:extLst>
+      <p:ext uri="{BB962C8B-B14F-4D97-AF65-F5344CB8AC3E}">
+        <p14:creationId xmlns:p14="http://schemas.microsoft.com/office/powerpoint/2010/main" val="1539241148"/>
+      </p:ext>
+    </p:extLst>
+  </p:cSld>
+  <p:clrMapOvr>
+    <a:masterClrMapping/>
+  </p:clrMapOvr>
+</p:notes>
+</file>
+
+<file path=ppt/notesSlides/notesSlide18.xml><?xml version="1.0" encoding="utf-8"?>
+<p:notes xmlns:a="http://schemas.openxmlformats.org/drawingml/2006/main" xmlns:r="http://schemas.openxmlformats.org/officeDocument/2006/relationships" xmlns:p="http://schemas.openxmlformats.org/presentationml/2006/main">
+  <p:cSld>
+    <p:spTree>
+      <p:nvGrpSpPr>
+        <p:cNvPr id="1" name="">
+          <a:extLst>
+            <a:ext uri="{FF2B5EF4-FFF2-40B4-BE49-F238E27FC236}">
+              <a16:creationId xmlns:a16="http://schemas.microsoft.com/office/drawing/2014/main" id="{AA10DB04-7960-C9FD-D3F1-98E698048BB2}"/>
+            </a:ext>
+          </a:extLst>
+        </p:cNvPr>
+        <p:cNvGrpSpPr/>
+        <p:nvPr/>
+      </p:nvGrpSpPr>
+      <p:grpSpPr>
+        <a:xfrm>
+          <a:off x="0" y="0"/>
+          <a:ext cx="0" cy="0"/>
+          <a:chOff x="0" y="0"/>
+          <a:chExt cx="0" cy="0"/>
+        </a:xfrm>
+      </p:grpSpPr>
+      <p:sp>
+        <p:nvSpPr>
+          <p:cNvPr id="2" name="슬라이드 이미지 개체 틀 1">
+            <a:extLst>
+              <a:ext uri="{FF2B5EF4-FFF2-40B4-BE49-F238E27FC236}">
+                <a16:creationId xmlns:a16="http://schemas.microsoft.com/office/drawing/2014/main" id="{0DB65EF1-D553-C38B-7D40-401FD68FCE73}"/>
+              </a:ext>
+            </a:extLst>
+          </p:cNvPr>
+          <p:cNvSpPr>
+            <a:spLocks noGrp="1" noRot="1" noChangeAspect="1"/>
+          </p:cNvSpPr>
+          <p:nvPr>
+            <p:ph type="sldImg"/>
+          </p:nvPr>
+        </p:nvSpPr>
+        <p:spPr/>
+      </p:sp>
+      <p:sp>
+        <p:nvSpPr>
+          <p:cNvPr id="3" name="슬라이드 노트 개체 틀 2">
+            <a:extLst>
+              <a:ext uri="{FF2B5EF4-FFF2-40B4-BE49-F238E27FC236}">
+                <a16:creationId xmlns:a16="http://schemas.microsoft.com/office/drawing/2014/main" id="{5BF8C331-FC81-5D7A-F8E6-CCE98E5579F3}"/>
+              </a:ext>
+            </a:extLst>
+          </p:cNvPr>
+          <p:cNvSpPr>
+            <a:spLocks noGrp="1"/>
+          </p:cNvSpPr>
+          <p:nvPr>
+            <p:ph type="body" idx="1"/>
+          </p:nvPr>
+        </p:nvSpPr>
+        <p:spPr/>
+        <p:txBody>
+          <a:bodyPr/>
+          <a:lstStyle/>
+          <a:p>
+            <a:endParaRPr lang="ko-KR" altLang="en-US">
+              <a:latin typeface="맑은 고딕" panose="020B0503020000020004" pitchFamily="50" charset="-127"/>
+              <a:ea typeface="맑은 고딕" panose="020B0503020000020004" pitchFamily="50" charset="-127"/>
+            </a:endParaRPr>
+          </a:p>
+        </p:txBody>
+      </p:sp>
+      <p:sp>
+        <p:nvSpPr>
+          <p:cNvPr id="4" name="슬라이드 번호 개체 틀 3">
+            <a:extLst>
+              <a:ext uri="{FF2B5EF4-FFF2-40B4-BE49-F238E27FC236}">
+                <a16:creationId xmlns:a16="http://schemas.microsoft.com/office/drawing/2014/main" id="{34DB9DDF-E257-CB49-ACC6-2FB746F5B708}"/>
+              </a:ext>
+            </a:extLst>
+          </p:cNvPr>
+          <p:cNvSpPr>
+            <a:spLocks noGrp="1"/>
+          </p:cNvSpPr>
+          <p:nvPr>
+            <p:ph type="sldNum" sz="quarter" idx="5"/>
+          </p:nvPr>
+        </p:nvSpPr>
+        <p:spPr/>
+        <p:txBody>
+          <a:bodyPr/>
+          <a:lstStyle/>
+          <a:p>
+            <a:pPr rtl="0"/>
+            <a:fld id="{DF61EA0F-A667-4B49-8422-0062BC55E249}" type="slidenum">
+              <a:rPr lang="en-US" altLang="ko-KR" smtClean="0">
+                <a:latin typeface="맑은 고딕" panose="020B0503020000020004" pitchFamily="50" charset="-127"/>
+                <a:ea typeface="맑은 고딕" panose="020B0503020000020004" pitchFamily="50" charset="-127"/>
+              </a:rPr>
+              <a:t>18</a:t>
+            </a:fld>
+            <a:endParaRPr lang="ko-KR" altLang="en-US">
+              <a:latin typeface="맑은 고딕" panose="020B0503020000020004" pitchFamily="50" charset="-127"/>
+              <a:ea typeface="맑은 고딕" panose="020B0503020000020004" pitchFamily="50" charset="-127"/>
+            </a:endParaRPr>
+          </a:p>
+        </p:txBody>
+      </p:sp>
+    </p:spTree>
+    <p:extLst>
+      <p:ext uri="{BB962C8B-B14F-4D97-AF65-F5344CB8AC3E}">
+        <p14:creationId xmlns:p14="http://schemas.microsoft.com/office/powerpoint/2010/main" val="2626581105"/>
+      </p:ext>
+    </p:extLst>
+  </p:cSld>
+  <p:clrMapOvr>
+    <a:masterClrMapping/>
+  </p:clrMapOvr>
+</p:notes>
+</file>
+
+<file path=ppt/notesSlides/notesSlide19.xml><?xml version="1.0" encoding="utf-8"?>
+<p:notes xmlns:a="http://schemas.openxmlformats.org/drawingml/2006/main" xmlns:r="http://schemas.openxmlformats.org/officeDocument/2006/relationships" xmlns:p="http://schemas.openxmlformats.org/presentationml/2006/main">
+  <p:cSld>
+    <p:spTree>
+      <p:nvGrpSpPr>
+        <p:cNvPr id="1" name="">
+          <a:extLst>
+            <a:ext uri="{FF2B5EF4-FFF2-40B4-BE49-F238E27FC236}">
+              <a16:creationId xmlns:a16="http://schemas.microsoft.com/office/drawing/2014/main" id="{5FFFB6D3-8FBF-6E36-9534-8A9A3299EA25}"/>
+            </a:ext>
+          </a:extLst>
+        </p:cNvPr>
+        <p:cNvGrpSpPr/>
+        <p:nvPr/>
+      </p:nvGrpSpPr>
+      <p:grpSpPr>
+        <a:xfrm>
+          <a:off x="0" y="0"/>
+          <a:ext cx="0" cy="0"/>
+          <a:chOff x="0" y="0"/>
+          <a:chExt cx="0" cy="0"/>
+        </a:xfrm>
+      </p:grpSpPr>
+      <p:sp>
+        <p:nvSpPr>
+          <p:cNvPr id="2" name="슬라이드 이미지 개체 틀 1">
+            <a:extLst>
+              <a:ext uri="{FF2B5EF4-FFF2-40B4-BE49-F238E27FC236}">
+                <a16:creationId xmlns:a16="http://schemas.microsoft.com/office/drawing/2014/main" id="{23EE699E-E95D-2211-7EDA-8E66CA15A621}"/>
+              </a:ext>
+            </a:extLst>
+          </p:cNvPr>
+          <p:cNvSpPr>
+            <a:spLocks noGrp="1" noRot="1" noChangeAspect="1"/>
+          </p:cNvSpPr>
+          <p:nvPr>
+            <p:ph type="sldImg"/>
+          </p:nvPr>
+        </p:nvSpPr>
+        <p:spPr/>
+      </p:sp>
+      <p:sp>
+        <p:nvSpPr>
+          <p:cNvPr id="3" name="슬라이드 노트 개체 틀 2">
+            <a:extLst>
+              <a:ext uri="{FF2B5EF4-FFF2-40B4-BE49-F238E27FC236}">
+                <a16:creationId xmlns:a16="http://schemas.microsoft.com/office/drawing/2014/main" id="{CF92301E-C0D6-E380-B1EF-CDE4F1674FC2}"/>
+              </a:ext>
+            </a:extLst>
+          </p:cNvPr>
+          <p:cNvSpPr>
+            <a:spLocks noGrp="1"/>
+          </p:cNvSpPr>
+          <p:nvPr>
+            <p:ph type="body" idx="1"/>
+          </p:nvPr>
+        </p:nvSpPr>
+        <p:spPr/>
+        <p:txBody>
+          <a:bodyPr/>
+          <a:lstStyle/>
+          <a:p>
+            <a:endParaRPr lang="ko-KR" altLang="en-US">
+              <a:latin typeface="맑은 고딕" panose="020B0503020000020004" pitchFamily="50" charset="-127"/>
+              <a:ea typeface="맑은 고딕" panose="020B0503020000020004" pitchFamily="50" charset="-127"/>
+            </a:endParaRPr>
+          </a:p>
+        </p:txBody>
+      </p:sp>
+      <p:sp>
+        <p:nvSpPr>
+          <p:cNvPr id="4" name="슬라이드 번호 개체 틀 3">
+            <a:extLst>
+              <a:ext uri="{FF2B5EF4-FFF2-40B4-BE49-F238E27FC236}">
+                <a16:creationId xmlns:a16="http://schemas.microsoft.com/office/drawing/2014/main" id="{827DB122-A626-AC01-D84B-8DE47CC8BE4F}"/>
+              </a:ext>
+            </a:extLst>
+          </p:cNvPr>
+          <p:cNvSpPr>
+            <a:spLocks noGrp="1"/>
+          </p:cNvSpPr>
+          <p:nvPr>
+            <p:ph type="sldNum" sz="quarter" idx="5"/>
+          </p:nvPr>
+        </p:nvSpPr>
+        <p:spPr/>
+        <p:txBody>
+          <a:bodyPr/>
+          <a:lstStyle/>
+          <a:p>
+            <a:pPr rtl="0"/>
+            <a:fld id="{DF61EA0F-A667-4B49-8422-0062BC55E249}" type="slidenum">
+              <a:rPr lang="en-US" altLang="ko-KR" smtClean="0">
+                <a:latin typeface="맑은 고딕" panose="020B0503020000020004" pitchFamily="50" charset="-127"/>
+                <a:ea typeface="맑은 고딕" panose="020B0503020000020004" pitchFamily="50" charset="-127"/>
+              </a:rPr>
+              <a:t>19</a:t>
+            </a:fld>
+            <a:endParaRPr lang="ko-KR" altLang="en-US">
+              <a:latin typeface="맑은 고딕" panose="020B0503020000020004" pitchFamily="50" charset="-127"/>
+              <a:ea typeface="맑은 고딕" panose="020B0503020000020004" pitchFamily="50" charset="-127"/>
+            </a:endParaRPr>
+          </a:p>
+        </p:txBody>
+      </p:sp>
+    </p:spTree>
+    <p:extLst>
+      <p:ext uri="{BB962C8B-B14F-4D97-AF65-F5344CB8AC3E}">
+        <p14:creationId xmlns:p14="http://schemas.microsoft.com/office/powerpoint/2010/main" val="654579087"/>
+      </p:ext>
+    </p:extLst>
+  </p:cSld>
+  <p:clrMapOvr>
+    <a:masterClrMapping/>
+  </p:clrMapOvr>
+</p:notes>
+</file>
+
 <file path=ppt/notesSlides/notesSlide2.xml><?xml version="1.0" encoding="utf-8"?>
 <p:notes xmlns:a="http://schemas.openxmlformats.org/drawingml/2006/main" xmlns:r="http://schemas.openxmlformats.org/officeDocument/2006/relationships" xmlns:p="http://schemas.openxmlformats.org/presentationml/2006/main">
   <p:cSld>
@@ -1775,6 +2137,124 @@
     <p:extLst>
       <p:ext uri="{BB962C8B-B14F-4D97-AF65-F5344CB8AC3E}">
         <p14:creationId xmlns:p14="http://schemas.microsoft.com/office/powerpoint/2010/main" val="2728697898"/>
+      </p:ext>
+    </p:extLst>
+  </p:cSld>
+  <p:clrMapOvr>
+    <a:masterClrMapping/>
+  </p:clrMapOvr>
+</p:notes>
+</file>
+
+<file path=ppt/notesSlides/notesSlide20.xml><?xml version="1.0" encoding="utf-8"?>
+<p:notes xmlns:a="http://schemas.openxmlformats.org/drawingml/2006/main" xmlns:r="http://schemas.openxmlformats.org/officeDocument/2006/relationships" xmlns:p="http://schemas.openxmlformats.org/presentationml/2006/main">
+  <p:cSld>
+    <p:spTree>
+      <p:nvGrpSpPr>
+        <p:cNvPr id="1" name="">
+          <a:extLst>
+            <a:ext uri="{FF2B5EF4-FFF2-40B4-BE49-F238E27FC236}">
+              <a16:creationId xmlns:a16="http://schemas.microsoft.com/office/drawing/2014/main" id="{BEC12C9F-3AC2-7D9F-3D63-36D41E261319}"/>
+            </a:ext>
+          </a:extLst>
+        </p:cNvPr>
+        <p:cNvGrpSpPr/>
+        <p:nvPr/>
+      </p:nvGrpSpPr>
+      <p:grpSpPr>
+        <a:xfrm>
+          <a:off x="0" y="0"/>
+          <a:ext cx="0" cy="0"/>
+          <a:chOff x="0" y="0"/>
+          <a:chExt cx="0" cy="0"/>
+        </a:xfrm>
+      </p:grpSpPr>
+      <p:sp>
+        <p:nvSpPr>
+          <p:cNvPr id="2" name="슬라이드 이미지 개체 틀 1">
+            <a:extLst>
+              <a:ext uri="{FF2B5EF4-FFF2-40B4-BE49-F238E27FC236}">
+                <a16:creationId xmlns:a16="http://schemas.microsoft.com/office/drawing/2014/main" id="{04117D29-12FF-D621-C4DC-C83B2D3907E3}"/>
+              </a:ext>
+            </a:extLst>
+          </p:cNvPr>
+          <p:cNvSpPr>
+            <a:spLocks noGrp="1" noRot="1" noChangeAspect="1"/>
+          </p:cNvSpPr>
+          <p:nvPr>
+            <p:ph type="sldImg"/>
+          </p:nvPr>
+        </p:nvSpPr>
+        <p:spPr/>
+      </p:sp>
+      <p:sp>
+        <p:nvSpPr>
+          <p:cNvPr id="3" name="슬라이드 노트 개체 틀 2">
+            <a:extLst>
+              <a:ext uri="{FF2B5EF4-FFF2-40B4-BE49-F238E27FC236}">
+                <a16:creationId xmlns:a16="http://schemas.microsoft.com/office/drawing/2014/main" id="{82046C0C-39F5-AC91-967A-0B5875E0538B}"/>
+              </a:ext>
+            </a:extLst>
+          </p:cNvPr>
+          <p:cNvSpPr>
+            <a:spLocks noGrp="1"/>
+          </p:cNvSpPr>
+          <p:nvPr>
+            <p:ph type="body" idx="1"/>
+          </p:nvPr>
+        </p:nvSpPr>
+        <p:spPr/>
+        <p:txBody>
+          <a:bodyPr/>
+          <a:lstStyle/>
+          <a:p>
+            <a:endParaRPr lang="ko-KR" altLang="en-US">
+              <a:latin typeface="맑은 고딕" panose="020B0503020000020004" pitchFamily="50" charset="-127"/>
+              <a:ea typeface="맑은 고딕" panose="020B0503020000020004" pitchFamily="50" charset="-127"/>
+            </a:endParaRPr>
+          </a:p>
+        </p:txBody>
+      </p:sp>
+      <p:sp>
+        <p:nvSpPr>
+          <p:cNvPr id="4" name="슬라이드 번호 개체 틀 3">
+            <a:extLst>
+              <a:ext uri="{FF2B5EF4-FFF2-40B4-BE49-F238E27FC236}">
+                <a16:creationId xmlns:a16="http://schemas.microsoft.com/office/drawing/2014/main" id="{CAA1261C-F34C-E007-0FD2-CF42FA67728D}"/>
+              </a:ext>
+            </a:extLst>
+          </p:cNvPr>
+          <p:cNvSpPr>
+            <a:spLocks noGrp="1"/>
+          </p:cNvSpPr>
+          <p:nvPr>
+            <p:ph type="sldNum" sz="quarter" idx="5"/>
+          </p:nvPr>
+        </p:nvSpPr>
+        <p:spPr/>
+        <p:txBody>
+          <a:bodyPr/>
+          <a:lstStyle/>
+          <a:p>
+            <a:pPr rtl="0"/>
+            <a:fld id="{DF61EA0F-A667-4B49-8422-0062BC55E249}" type="slidenum">
+              <a:rPr lang="en-US" altLang="ko-KR" smtClean="0">
+                <a:latin typeface="맑은 고딕" panose="020B0503020000020004" pitchFamily="50" charset="-127"/>
+                <a:ea typeface="맑은 고딕" panose="020B0503020000020004" pitchFamily="50" charset="-127"/>
+              </a:rPr>
+              <a:t>20</a:t>
+            </a:fld>
+            <a:endParaRPr lang="ko-KR" altLang="en-US">
+              <a:latin typeface="맑은 고딕" panose="020B0503020000020004" pitchFamily="50" charset="-127"/>
+              <a:ea typeface="맑은 고딕" panose="020B0503020000020004" pitchFamily="50" charset="-127"/>
+            </a:endParaRPr>
+          </a:p>
+        </p:txBody>
+      </p:sp>
+    </p:spTree>
+    <p:extLst>
+      <p:ext uri="{BB962C8B-B14F-4D97-AF65-F5344CB8AC3E}">
+        <p14:creationId xmlns:p14="http://schemas.microsoft.com/office/powerpoint/2010/main" val="2125840847"/>
       </p:ext>
     </p:extLst>
   </p:cSld>
@@ -3078,7 +3558,7 @@
           <a:p>
             <a:fld id="{990475B5-67CA-4281-BDCA-DA943C3C8EB3}" type="datetime1">
               <a:rPr lang="ko-KR" altLang="en-US" noProof="0" smtClean="0"/>
-              <a:t>2026-06-01</a:t>
+              <a:t>2026-06-02</a:t>
             </a:fld>
             <a:endParaRPr lang="ko-KR" altLang="en-US" noProof="0"/>
           </a:p>
@@ -3735,7 +4215,7 @@
           <a:p>
             <a:fld id="{C655C81E-72E7-4D05-94B5-F45B321A525D}" type="datetime1">
               <a:rPr lang="ko-KR" altLang="en-US" noProof="0" smtClean="0"/>
-              <a:t>2026-06-01</a:t>
+              <a:t>2026-06-02</a:t>
             </a:fld>
             <a:endParaRPr lang="ko-KR" altLang="en-US" noProof="0" dirty="0">
               <a:latin typeface="맑은 고딕" panose="020B0503020000020004" pitchFamily="50" charset="-127"/>
@@ -6281,8 +6761,8 @@
           </a:p>
         </p:txBody>
       </p:sp>
-      <mc:AlternateContent xmlns:mc="http://schemas.openxmlformats.org/markup-compatibility/2006">
-        <mc:Choice xmlns:a14="http://schemas.microsoft.com/office/drawing/2010/main" Requires="a14">
+      <mc:AlternateContent xmlns:mc="http://schemas.openxmlformats.org/markup-compatibility/2006" xmlns:a14="http://schemas.microsoft.com/office/drawing/2010/main">
+        <mc:Choice Requires="a14">
           <p:sp>
             <p:nvSpPr>
               <p:cNvPr id="5" name="TextBox 4">
@@ -6311,6 +6791,7 @@
               </a:bodyPr>
               <a:lstStyle/>
               <a:p>
+                <a:pPr/>
                 <a14:m>
                   <m:oMathPara xmlns:m="http://schemas.openxmlformats.org/officeDocument/2006/math">
                     <m:oMathParaPr>
@@ -6350,7 +6831,7 @@
             </p:txBody>
           </p:sp>
         </mc:Choice>
-        <mc:Fallback>
+        <mc:Fallback xmlns="">
           <p:sp>
             <p:nvSpPr>
               <p:cNvPr id="5" name="TextBox 4">
@@ -7645,10 +8126,2987 @@
           </a:p>
         </p:txBody>
       </p:sp>
+      <p:sp>
+        <p:nvSpPr>
+          <p:cNvPr id="5" name="TextBox 4">
+            <a:extLst>
+              <a:ext uri="{FF2B5EF4-FFF2-40B4-BE49-F238E27FC236}">
+                <a16:creationId xmlns:a16="http://schemas.microsoft.com/office/drawing/2014/main" id="{5BF5AA36-BE24-850D-BDE8-8366688D5470}"/>
+              </a:ext>
+            </a:extLst>
+          </p:cNvPr>
+          <p:cNvSpPr txBox="1"/>
+          <p:nvPr/>
+        </p:nvSpPr>
+        <p:spPr>
+          <a:xfrm>
+            <a:off x="794326" y="2224183"/>
+            <a:ext cx="8312727" cy="4185761"/>
+          </a:xfrm>
+          <a:prstGeom prst="rect">
+            <a:avLst/>
+          </a:prstGeom>
+          <a:solidFill>
+            <a:srgbClr val="00B0F0"/>
+          </a:solidFill>
+        </p:spPr>
+        <p:txBody>
+          <a:bodyPr wrap="square">
+            <a:spAutoFit/>
+          </a:bodyPr>
+          <a:lstStyle/>
+          <a:p>
+            <a:pPr>
+              <a:buNone/>
+            </a:pPr>
+            <a:r>
+              <a:rPr lang="en-US" altLang="ko-KR" sz="1400" b="0" dirty="0">
+                <a:effectLst/>
+                <a:latin typeface="D2Coding" panose="020B0609020101020101" pitchFamily="49" charset="-127"/>
+                <a:ea typeface="D2Coding" panose="020B0609020101020101" pitchFamily="49" charset="-127"/>
+              </a:rPr>
+              <a:t>import random</a:t>
+            </a:r>
+          </a:p>
+          <a:p>
+            <a:pPr>
+              <a:buNone/>
+            </a:pPr>
+            <a:r>
+              <a:rPr lang="en-US" altLang="ko-KR" sz="1400" b="0" dirty="0">
+                <a:effectLst/>
+                <a:latin typeface="D2Coding" panose="020B0609020101020101" pitchFamily="49" charset="-127"/>
+                <a:ea typeface="D2Coding" panose="020B0609020101020101" pitchFamily="49" charset="-127"/>
+              </a:rPr>
+              <a:t>import warnings</a:t>
+            </a:r>
+          </a:p>
+          <a:p>
+            <a:pPr>
+              <a:buNone/>
+            </a:pPr>
+            <a:r>
+              <a:rPr lang="en-US" altLang="ko-KR" sz="1400" b="0" dirty="0">
+                <a:effectLst/>
+                <a:latin typeface="D2Coding" panose="020B0609020101020101" pitchFamily="49" charset="-127"/>
+                <a:ea typeface="D2Coding" panose="020B0609020101020101" pitchFamily="49" charset="-127"/>
+              </a:rPr>
+              <a:t>from </a:t>
+            </a:r>
+            <a:r>
+              <a:rPr lang="en-US" altLang="ko-KR" sz="1400" b="0" dirty="0" err="1">
+                <a:effectLst/>
+                <a:latin typeface="D2Coding" panose="020B0609020101020101" pitchFamily="49" charset="-127"/>
+                <a:ea typeface="D2Coding" panose="020B0609020101020101" pitchFamily="49" charset="-127"/>
+              </a:rPr>
+              <a:t>sklearn.datasets</a:t>
+            </a:r>
+            <a:r>
+              <a:rPr lang="en-US" altLang="ko-KR" sz="1400" b="0" dirty="0">
+                <a:effectLst/>
+                <a:latin typeface="D2Coding" panose="020B0609020101020101" pitchFamily="49" charset="-127"/>
+                <a:ea typeface="D2Coding" panose="020B0609020101020101" pitchFamily="49" charset="-127"/>
+              </a:rPr>
+              <a:t> import fetch_20newsgroups</a:t>
+            </a:r>
+          </a:p>
+          <a:p>
+            <a:pPr>
+              <a:buNone/>
+            </a:pPr>
+            <a:r>
+              <a:rPr lang="en-US" altLang="ko-KR" sz="1400" b="0" dirty="0">
+                <a:effectLst/>
+                <a:latin typeface="D2Coding" panose="020B0609020101020101" pitchFamily="49" charset="-127"/>
+                <a:ea typeface="D2Coding" panose="020B0609020101020101" pitchFamily="49" charset="-127"/>
+              </a:rPr>
+              <a:t>!pip install </a:t>
+            </a:r>
+            <a:r>
+              <a:rPr lang="en-US" altLang="ko-KR" sz="1400" b="0" dirty="0" err="1">
+                <a:effectLst/>
+                <a:latin typeface="D2Coding" panose="020B0609020101020101" pitchFamily="49" charset="-127"/>
+                <a:ea typeface="D2Coding" panose="020B0609020101020101" pitchFamily="49" charset="-127"/>
+              </a:rPr>
+              <a:t>gensim</a:t>
+            </a:r>
+            <a:endParaRPr lang="en-US" altLang="ko-KR" sz="1400" b="0" dirty="0">
+              <a:effectLst/>
+              <a:latin typeface="D2Coding" panose="020B0609020101020101" pitchFamily="49" charset="-127"/>
+              <a:ea typeface="D2Coding" panose="020B0609020101020101" pitchFamily="49" charset="-127"/>
+            </a:endParaRPr>
+          </a:p>
+          <a:p>
+            <a:pPr>
+              <a:buNone/>
+            </a:pPr>
+            <a:r>
+              <a:rPr lang="en-US" altLang="ko-KR" sz="1400" b="0" dirty="0">
+                <a:effectLst/>
+                <a:latin typeface="D2Coding" panose="020B0609020101020101" pitchFamily="49" charset="-127"/>
+                <a:ea typeface="D2Coding" panose="020B0609020101020101" pitchFamily="49" charset="-127"/>
+              </a:rPr>
+              <a:t>import </a:t>
+            </a:r>
+            <a:r>
+              <a:rPr lang="en-US" altLang="ko-KR" sz="1400" b="0" dirty="0" err="1">
+                <a:effectLst/>
+                <a:latin typeface="D2Coding" panose="020B0609020101020101" pitchFamily="49" charset="-127"/>
+                <a:ea typeface="D2Coding" panose="020B0609020101020101" pitchFamily="49" charset="-127"/>
+              </a:rPr>
+              <a:t>gensim</a:t>
+            </a:r>
+            <a:endParaRPr lang="en-US" altLang="ko-KR" sz="1400" b="0" dirty="0">
+              <a:effectLst/>
+              <a:latin typeface="D2Coding" panose="020B0609020101020101" pitchFamily="49" charset="-127"/>
+              <a:ea typeface="D2Coding" panose="020B0609020101020101" pitchFamily="49" charset="-127"/>
+            </a:endParaRPr>
+          </a:p>
+          <a:p>
+            <a:pPr>
+              <a:buNone/>
+            </a:pPr>
+            <a:r>
+              <a:rPr lang="en-US" altLang="ko-KR" sz="1400" b="0" dirty="0">
+                <a:effectLst/>
+                <a:latin typeface="D2Coding" panose="020B0609020101020101" pitchFamily="49" charset="-127"/>
+                <a:ea typeface="D2Coding" panose="020B0609020101020101" pitchFamily="49" charset="-127"/>
+              </a:rPr>
+              <a:t>from </a:t>
+            </a:r>
+            <a:r>
+              <a:rPr lang="en-US" altLang="ko-KR" sz="1400" b="0" dirty="0" err="1">
+                <a:effectLst/>
+                <a:latin typeface="D2Coding" panose="020B0609020101020101" pitchFamily="49" charset="-127"/>
+                <a:ea typeface="D2Coding" panose="020B0609020101020101" pitchFamily="49" charset="-127"/>
+              </a:rPr>
+              <a:t>gensim</a:t>
+            </a:r>
+            <a:r>
+              <a:rPr lang="en-US" altLang="ko-KR" sz="1400" b="0" dirty="0">
+                <a:effectLst/>
+                <a:latin typeface="D2Coding" panose="020B0609020101020101" pitchFamily="49" charset="-127"/>
+                <a:ea typeface="D2Coding" panose="020B0609020101020101" pitchFamily="49" charset="-127"/>
+              </a:rPr>
+              <a:t> import corpora</a:t>
+            </a:r>
+          </a:p>
+          <a:p>
+            <a:pPr>
+              <a:buNone/>
+            </a:pPr>
+            <a:r>
+              <a:rPr lang="en-US" altLang="ko-KR" sz="1400" b="0" dirty="0">
+                <a:effectLst/>
+                <a:latin typeface="D2Coding" panose="020B0609020101020101" pitchFamily="49" charset="-127"/>
+                <a:ea typeface="D2Coding" panose="020B0609020101020101" pitchFamily="49" charset="-127"/>
+              </a:rPr>
+              <a:t>from </a:t>
+            </a:r>
+            <a:r>
+              <a:rPr lang="en-US" altLang="ko-KR" sz="1400" b="0" dirty="0" err="1">
+                <a:effectLst/>
+                <a:latin typeface="D2Coding" panose="020B0609020101020101" pitchFamily="49" charset="-127"/>
+                <a:ea typeface="D2Coding" panose="020B0609020101020101" pitchFamily="49" charset="-127"/>
+              </a:rPr>
+              <a:t>gensim.models</a:t>
+            </a:r>
+            <a:r>
+              <a:rPr lang="en-US" altLang="ko-KR" sz="1400" b="0" dirty="0">
+                <a:effectLst/>
+                <a:latin typeface="D2Coding" panose="020B0609020101020101" pitchFamily="49" charset="-127"/>
+                <a:ea typeface="D2Coding" panose="020B0609020101020101" pitchFamily="49" charset="-127"/>
+              </a:rPr>
+              <a:t> import </a:t>
+            </a:r>
+            <a:r>
+              <a:rPr lang="en-US" altLang="ko-KR" sz="1400" b="0" dirty="0" err="1">
+                <a:effectLst/>
+                <a:latin typeface="D2Coding" panose="020B0609020101020101" pitchFamily="49" charset="-127"/>
+                <a:ea typeface="D2Coding" panose="020B0609020101020101" pitchFamily="49" charset="-127"/>
+              </a:rPr>
+              <a:t>LdaModel</a:t>
+            </a:r>
+            <a:endParaRPr lang="en-US" altLang="ko-KR" sz="1400" b="0" dirty="0">
+              <a:effectLst/>
+              <a:latin typeface="D2Coding" panose="020B0609020101020101" pitchFamily="49" charset="-127"/>
+              <a:ea typeface="D2Coding" panose="020B0609020101020101" pitchFamily="49" charset="-127"/>
+            </a:endParaRPr>
+          </a:p>
+          <a:p>
+            <a:pPr>
+              <a:buNone/>
+            </a:pPr>
+            <a:r>
+              <a:rPr lang="en-US" altLang="ko-KR" sz="1400" b="0" dirty="0">
+                <a:effectLst/>
+                <a:latin typeface="D2Coding" panose="020B0609020101020101" pitchFamily="49" charset="-127"/>
+                <a:ea typeface="D2Coding" panose="020B0609020101020101" pitchFamily="49" charset="-127"/>
+              </a:rPr>
+              <a:t>import </a:t>
+            </a:r>
+            <a:r>
+              <a:rPr lang="en-US" altLang="ko-KR" sz="1400" b="0" dirty="0" err="1">
+                <a:effectLst/>
+                <a:latin typeface="D2Coding" panose="020B0609020101020101" pitchFamily="49" charset="-127"/>
+                <a:ea typeface="D2Coding" panose="020B0609020101020101" pitchFamily="49" charset="-127"/>
+              </a:rPr>
+              <a:t>nltk</a:t>
+            </a:r>
+            <a:endParaRPr lang="en-US" altLang="ko-KR" sz="1400" b="0" dirty="0">
+              <a:effectLst/>
+              <a:latin typeface="D2Coding" panose="020B0609020101020101" pitchFamily="49" charset="-127"/>
+              <a:ea typeface="D2Coding" panose="020B0609020101020101" pitchFamily="49" charset="-127"/>
+            </a:endParaRPr>
+          </a:p>
+          <a:p>
+            <a:pPr>
+              <a:buNone/>
+            </a:pPr>
+            <a:r>
+              <a:rPr lang="en-US" altLang="ko-KR" sz="1400" b="0" dirty="0">
+                <a:effectLst/>
+                <a:latin typeface="D2Coding" panose="020B0609020101020101" pitchFamily="49" charset="-127"/>
+                <a:ea typeface="D2Coding" panose="020B0609020101020101" pitchFamily="49" charset="-127"/>
+              </a:rPr>
+              <a:t>from </a:t>
+            </a:r>
+            <a:r>
+              <a:rPr lang="en-US" altLang="ko-KR" sz="1400" b="0" dirty="0" err="1">
+                <a:effectLst/>
+                <a:latin typeface="D2Coding" panose="020B0609020101020101" pitchFamily="49" charset="-127"/>
+                <a:ea typeface="D2Coding" panose="020B0609020101020101" pitchFamily="49" charset="-127"/>
+              </a:rPr>
+              <a:t>nltk.corpus</a:t>
+            </a:r>
+            <a:r>
+              <a:rPr lang="en-US" altLang="ko-KR" sz="1400" b="0" dirty="0">
+                <a:effectLst/>
+                <a:latin typeface="D2Coding" panose="020B0609020101020101" pitchFamily="49" charset="-127"/>
+                <a:ea typeface="D2Coding" panose="020B0609020101020101" pitchFamily="49" charset="-127"/>
+              </a:rPr>
+              <a:t> import </a:t>
+            </a:r>
+            <a:r>
+              <a:rPr lang="en-US" altLang="ko-KR" sz="1400" b="0" dirty="0" err="1">
+                <a:effectLst/>
+                <a:latin typeface="D2Coding" panose="020B0609020101020101" pitchFamily="49" charset="-127"/>
+                <a:ea typeface="D2Coding" panose="020B0609020101020101" pitchFamily="49" charset="-127"/>
+              </a:rPr>
+              <a:t>stopwords</a:t>
+            </a:r>
+            <a:endParaRPr lang="en-US" altLang="ko-KR" sz="1400" b="0" dirty="0">
+              <a:effectLst/>
+              <a:latin typeface="D2Coding" panose="020B0609020101020101" pitchFamily="49" charset="-127"/>
+              <a:ea typeface="D2Coding" panose="020B0609020101020101" pitchFamily="49" charset="-127"/>
+            </a:endParaRPr>
+          </a:p>
+          <a:p>
+            <a:pPr>
+              <a:buNone/>
+            </a:pPr>
+            <a:r>
+              <a:rPr lang="en-US" altLang="ko-KR" sz="1400" b="0" dirty="0">
+                <a:effectLst/>
+                <a:latin typeface="D2Coding" panose="020B0609020101020101" pitchFamily="49" charset="-127"/>
+                <a:ea typeface="D2Coding" panose="020B0609020101020101" pitchFamily="49" charset="-127"/>
+              </a:rPr>
+              <a:t>from </a:t>
+            </a:r>
+            <a:r>
+              <a:rPr lang="en-US" altLang="ko-KR" sz="1400" b="0" dirty="0" err="1">
+                <a:effectLst/>
+                <a:latin typeface="D2Coding" panose="020B0609020101020101" pitchFamily="49" charset="-127"/>
+                <a:ea typeface="D2Coding" panose="020B0609020101020101" pitchFamily="49" charset="-127"/>
+              </a:rPr>
+              <a:t>nltk.tokenize</a:t>
+            </a:r>
+            <a:r>
+              <a:rPr lang="en-US" altLang="ko-KR" sz="1400" b="0" dirty="0">
+                <a:effectLst/>
+                <a:latin typeface="D2Coding" panose="020B0609020101020101" pitchFamily="49" charset="-127"/>
+                <a:ea typeface="D2Coding" panose="020B0609020101020101" pitchFamily="49" charset="-127"/>
+              </a:rPr>
+              <a:t> import </a:t>
+            </a:r>
+            <a:r>
+              <a:rPr lang="en-US" altLang="ko-KR" sz="1400" b="0" dirty="0" err="1">
+                <a:effectLst/>
+                <a:latin typeface="D2Coding" panose="020B0609020101020101" pitchFamily="49" charset="-127"/>
+                <a:ea typeface="D2Coding" panose="020B0609020101020101" pitchFamily="49" charset="-127"/>
+              </a:rPr>
+              <a:t>RegexpTokenizer</a:t>
+            </a:r>
+            <a:endParaRPr lang="en-US" altLang="ko-KR" sz="1400" b="0" dirty="0">
+              <a:effectLst/>
+              <a:latin typeface="D2Coding" panose="020B0609020101020101" pitchFamily="49" charset="-127"/>
+              <a:ea typeface="D2Coding" panose="020B0609020101020101" pitchFamily="49" charset="-127"/>
+            </a:endParaRPr>
+          </a:p>
+          <a:p>
+            <a:pPr>
+              <a:buNone/>
+            </a:pPr>
+            <a:endParaRPr lang="en-US" altLang="ko-KR" sz="1400" b="0" dirty="0">
+              <a:effectLst/>
+              <a:latin typeface="D2Coding" panose="020B0609020101020101" pitchFamily="49" charset="-127"/>
+              <a:ea typeface="D2Coding" panose="020B0609020101020101" pitchFamily="49" charset="-127"/>
+            </a:endParaRPr>
+          </a:p>
+          <a:p>
+            <a:pPr>
+              <a:buNone/>
+            </a:pPr>
+            <a:r>
+              <a:rPr lang="en-US" altLang="ko-KR" sz="1400" b="0" dirty="0">
+                <a:effectLst/>
+                <a:latin typeface="D2Coding" panose="020B0609020101020101" pitchFamily="49" charset="-127"/>
+                <a:ea typeface="D2Coding" panose="020B0609020101020101" pitchFamily="49" charset="-127"/>
+              </a:rPr>
+              <a:t># </a:t>
+            </a:r>
+            <a:r>
+              <a:rPr lang="en-US" altLang="ko-KR" sz="1400" b="0" dirty="0" err="1">
+                <a:effectLst/>
+                <a:latin typeface="D2Coding" panose="020B0609020101020101" pitchFamily="49" charset="-127"/>
+                <a:ea typeface="D2Coding" panose="020B0609020101020101" pitchFamily="49" charset="-127"/>
+              </a:rPr>
+              <a:t>pyLDAvis</a:t>
+            </a:r>
+            <a:r>
+              <a:rPr lang="en-US" altLang="ko-KR" sz="1400" b="0" dirty="0">
+                <a:effectLst/>
+                <a:latin typeface="D2Coding" panose="020B0609020101020101" pitchFamily="49" charset="-127"/>
+                <a:ea typeface="D2Coding" panose="020B0609020101020101" pitchFamily="49" charset="-127"/>
+              </a:rPr>
+              <a:t> </a:t>
+            </a:r>
+            <a:r>
+              <a:rPr lang="ko-KR" altLang="en-US" sz="1400" b="0" dirty="0">
+                <a:effectLst/>
+                <a:latin typeface="D2Coding" panose="020B0609020101020101" pitchFamily="49" charset="-127"/>
+                <a:ea typeface="D2Coding" panose="020B0609020101020101" pitchFamily="49" charset="-127"/>
+              </a:rPr>
+              <a:t>시각화 라이브러리</a:t>
+            </a:r>
+          </a:p>
+          <a:p>
+            <a:pPr>
+              <a:buNone/>
+            </a:pPr>
+            <a:r>
+              <a:rPr lang="en-US" altLang="ko-KR" sz="1400" b="0" dirty="0">
+                <a:effectLst/>
+                <a:latin typeface="D2Coding" panose="020B0609020101020101" pitchFamily="49" charset="-127"/>
+                <a:ea typeface="D2Coding" panose="020B0609020101020101" pitchFamily="49" charset="-127"/>
+              </a:rPr>
+              <a:t>!pip install </a:t>
+            </a:r>
+            <a:r>
+              <a:rPr lang="en-US" altLang="ko-KR" sz="1400" b="0" dirty="0" err="1">
+                <a:effectLst/>
+                <a:latin typeface="D2Coding" panose="020B0609020101020101" pitchFamily="49" charset="-127"/>
+                <a:ea typeface="D2Coding" panose="020B0609020101020101" pitchFamily="49" charset="-127"/>
+              </a:rPr>
+              <a:t>pyLDAvis</a:t>
+            </a:r>
+            <a:endParaRPr lang="en-US" altLang="ko-KR" sz="1400" b="0" dirty="0">
+              <a:effectLst/>
+              <a:latin typeface="D2Coding" panose="020B0609020101020101" pitchFamily="49" charset="-127"/>
+              <a:ea typeface="D2Coding" panose="020B0609020101020101" pitchFamily="49" charset="-127"/>
+            </a:endParaRPr>
+          </a:p>
+          <a:p>
+            <a:pPr>
+              <a:buNone/>
+            </a:pPr>
+            <a:r>
+              <a:rPr lang="en-US" altLang="ko-KR" sz="1400" b="0" dirty="0">
+                <a:effectLst/>
+                <a:latin typeface="D2Coding" panose="020B0609020101020101" pitchFamily="49" charset="-127"/>
+                <a:ea typeface="D2Coding" panose="020B0609020101020101" pitchFamily="49" charset="-127"/>
+              </a:rPr>
+              <a:t>import </a:t>
+            </a:r>
+            <a:r>
+              <a:rPr lang="en-US" altLang="ko-KR" sz="1400" b="0" dirty="0" err="1">
+                <a:effectLst/>
+                <a:latin typeface="D2Coding" panose="020B0609020101020101" pitchFamily="49" charset="-127"/>
+                <a:ea typeface="D2Coding" panose="020B0609020101020101" pitchFamily="49" charset="-127"/>
+              </a:rPr>
+              <a:t>pyLDAvis</a:t>
+            </a:r>
+            <a:endParaRPr lang="en-US" altLang="ko-KR" sz="1400" b="0" dirty="0">
+              <a:effectLst/>
+              <a:latin typeface="D2Coding" panose="020B0609020101020101" pitchFamily="49" charset="-127"/>
+              <a:ea typeface="D2Coding" panose="020B0609020101020101" pitchFamily="49" charset="-127"/>
+            </a:endParaRPr>
+          </a:p>
+          <a:p>
+            <a:pPr>
+              <a:buNone/>
+            </a:pPr>
+            <a:r>
+              <a:rPr lang="en-US" altLang="ko-KR" sz="1400" b="0" dirty="0">
+                <a:effectLst/>
+                <a:latin typeface="D2Coding" panose="020B0609020101020101" pitchFamily="49" charset="-127"/>
+                <a:ea typeface="D2Coding" panose="020B0609020101020101" pitchFamily="49" charset="-127"/>
+              </a:rPr>
+              <a:t>import </a:t>
+            </a:r>
+            <a:r>
+              <a:rPr lang="en-US" altLang="ko-KR" sz="1400" b="0" dirty="0" err="1">
+                <a:effectLst/>
+                <a:latin typeface="D2Coding" panose="020B0609020101020101" pitchFamily="49" charset="-127"/>
+                <a:ea typeface="D2Coding" panose="020B0609020101020101" pitchFamily="49" charset="-127"/>
+              </a:rPr>
+              <a:t>pyLDAvis.gensim_models</a:t>
+            </a:r>
+            <a:r>
+              <a:rPr lang="en-US" altLang="ko-KR" sz="1400" b="0" dirty="0">
+                <a:effectLst/>
+                <a:latin typeface="D2Coding" panose="020B0609020101020101" pitchFamily="49" charset="-127"/>
+                <a:ea typeface="D2Coding" panose="020B0609020101020101" pitchFamily="49" charset="-127"/>
+              </a:rPr>
+              <a:t> as </a:t>
+            </a:r>
+            <a:r>
+              <a:rPr lang="en-US" altLang="ko-KR" sz="1400" b="0" dirty="0" err="1">
+                <a:effectLst/>
+                <a:latin typeface="D2Coding" panose="020B0609020101020101" pitchFamily="49" charset="-127"/>
+                <a:ea typeface="D2Coding" panose="020B0609020101020101" pitchFamily="49" charset="-127"/>
+              </a:rPr>
+              <a:t>gensimvis</a:t>
+            </a:r>
+            <a:endParaRPr lang="en-US" altLang="ko-KR" sz="1400" b="0" dirty="0">
+              <a:effectLst/>
+              <a:latin typeface="D2Coding" panose="020B0609020101020101" pitchFamily="49" charset="-127"/>
+              <a:ea typeface="D2Coding" panose="020B0609020101020101" pitchFamily="49" charset="-127"/>
+            </a:endParaRPr>
+          </a:p>
+          <a:p>
+            <a:pPr>
+              <a:buNone/>
+            </a:pPr>
+            <a:endParaRPr lang="en-US" altLang="ko-KR" sz="1400" b="0" dirty="0">
+              <a:effectLst/>
+              <a:latin typeface="D2Coding" panose="020B0609020101020101" pitchFamily="49" charset="-127"/>
+              <a:ea typeface="D2Coding" panose="020B0609020101020101" pitchFamily="49" charset="-127"/>
+            </a:endParaRPr>
+          </a:p>
+          <a:p>
+            <a:pPr>
+              <a:buNone/>
+            </a:pPr>
+            <a:r>
+              <a:rPr lang="en-US" altLang="ko-KR" sz="1400" b="0" dirty="0">
+                <a:effectLst/>
+                <a:latin typeface="D2Coding" panose="020B0609020101020101" pitchFamily="49" charset="-127"/>
+                <a:ea typeface="D2Coding" panose="020B0609020101020101" pitchFamily="49" charset="-127"/>
+              </a:rPr>
+              <a:t># </a:t>
+            </a:r>
+            <a:r>
+              <a:rPr lang="ko-KR" altLang="en-US" sz="1400" b="0" dirty="0">
+                <a:effectLst/>
+                <a:latin typeface="D2Coding" panose="020B0609020101020101" pitchFamily="49" charset="-127"/>
+                <a:ea typeface="D2Coding" panose="020B0609020101020101" pitchFamily="49" charset="-127"/>
+              </a:rPr>
+              <a:t>경고 메시지 숨기기</a:t>
+            </a:r>
+          </a:p>
+          <a:p>
+            <a:pPr>
+              <a:buNone/>
+            </a:pPr>
+            <a:r>
+              <a:rPr lang="en-US" altLang="ko-KR" sz="1400" b="0" dirty="0" err="1">
+                <a:effectLst/>
+                <a:latin typeface="D2Coding" panose="020B0609020101020101" pitchFamily="49" charset="-127"/>
+                <a:ea typeface="D2Coding" panose="020B0609020101020101" pitchFamily="49" charset="-127"/>
+              </a:rPr>
+              <a:t>warnings.filterwarnings</a:t>
+            </a:r>
+            <a:r>
+              <a:rPr lang="en-US" altLang="ko-KR" sz="1400" b="0" dirty="0">
+                <a:effectLst/>
+                <a:latin typeface="D2Coding" panose="020B0609020101020101" pitchFamily="49" charset="-127"/>
+                <a:ea typeface="D2Coding" panose="020B0609020101020101" pitchFamily="49" charset="-127"/>
+              </a:rPr>
+              <a:t>('ignore', category=</a:t>
+            </a:r>
+            <a:r>
+              <a:rPr lang="en-US" altLang="ko-KR" sz="1400" b="0" dirty="0" err="1">
+                <a:effectLst/>
+                <a:latin typeface="D2Coding" panose="020B0609020101020101" pitchFamily="49" charset="-127"/>
+                <a:ea typeface="D2Coding" panose="020B0609020101020101" pitchFamily="49" charset="-127"/>
+              </a:rPr>
+              <a:t>DeprecationWarning</a:t>
+            </a:r>
+            <a:r>
+              <a:rPr lang="en-US" altLang="ko-KR" sz="1400" b="0" dirty="0">
+                <a:effectLst/>
+                <a:latin typeface="D2Coding" panose="020B0609020101020101" pitchFamily="49" charset="-127"/>
+                <a:ea typeface="D2Coding" panose="020B0609020101020101" pitchFamily="49" charset="-127"/>
+              </a:rPr>
+              <a:t>)</a:t>
+            </a:r>
+          </a:p>
+          <a:p>
+            <a:pPr>
+              <a:buNone/>
+            </a:pPr>
+            <a:r>
+              <a:rPr lang="en-US" altLang="ko-KR" sz="1400" b="0" dirty="0" err="1">
+                <a:effectLst/>
+                <a:latin typeface="D2Coding" panose="020B0609020101020101" pitchFamily="49" charset="-127"/>
+                <a:ea typeface="D2Coding" panose="020B0609020101020101" pitchFamily="49" charset="-127"/>
+              </a:rPr>
+              <a:t>nltk.download</a:t>
+            </a:r>
+            <a:r>
+              <a:rPr lang="en-US" altLang="ko-KR" sz="1400" b="0" dirty="0">
+                <a:effectLst/>
+                <a:latin typeface="D2Coding" panose="020B0609020101020101" pitchFamily="49" charset="-127"/>
+                <a:ea typeface="D2Coding" panose="020B0609020101020101" pitchFamily="49" charset="-127"/>
+              </a:rPr>
+              <a:t>('</a:t>
+            </a:r>
+            <a:r>
+              <a:rPr lang="en-US" altLang="ko-KR" sz="1400" b="0" dirty="0" err="1">
+                <a:effectLst/>
+                <a:latin typeface="D2Coding" panose="020B0609020101020101" pitchFamily="49" charset="-127"/>
+                <a:ea typeface="D2Coding" panose="020B0609020101020101" pitchFamily="49" charset="-127"/>
+              </a:rPr>
+              <a:t>stopwords</a:t>
+            </a:r>
+            <a:r>
+              <a:rPr lang="en-US" altLang="ko-KR" sz="1400" b="0" dirty="0">
+                <a:effectLst/>
+                <a:latin typeface="D2Coding" panose="020B0609020101020101" pitchFamily="49" charset="-127"/>
+                <a:ea typeface="D2Coding" panose="020B0609020101020101" pitchFamily="49" charset="-127"/>
+              </a:rPr>
+              <a:t>', quiet=True)</a:t>
+            </a:r>
+          </a:p>
+        </p:txBody>
+      </p:sp>
     </p:spTree>
     <p:extLst>
       <p:ext uri="{BB962C8B-B14F-4D97-AF65-F5344CB8AC3E}">
         <p14:creationId xmlns:p14="http://schemas.microsoft.com/office/powerpoint/2010/main" val="3785000548"/>
+      </p:ext>
+    </p:extLst>
+  </p:cSld>
+  <p:clrMapOvr>
+    <a:masterClrMapping/>
+  </p:clrMapOvr>
+  <mc:AlternateContent xmlns:mc="http://schemas.openxmlformats.org/markup-compatibility/2006" xmlns:p14="http://schemas.microsoft.com/office/powerpoint/2010/main">
+    <mc:Choice Requires="p14">
+      <p:transition p14:dur="10"/>
+    </mc:Choice>
+    <mc:Fallback xmlns="">
+      <p:transition/>
+    </mc:Fallback>
+  </mc:AlternateContent>
+</p:sld>
+</file>
+
+<file path=ppt/slides/slide17.xml><?xml version="1.0" encoding="utf-8"?>
+<p:sld xmlns:a="http://schemas.openxmlformats.org/drawingml/2006/main" xmlns:r="http://schemas.openxmlformats.org/officeDocument/2006/relationships" xmlns:p="http://schemas.openxmlformats.org/presentationml/2006/main">
+  <p:cSld>
+    <p:spTree>
+      <p:nvGrpSpPr>
+        <p:cNvPr id="1" name="">
+          <a:extLst>
+            <a:ext uri="{FF2B5EF4-FFF2-40B4-BE49-F238E27FC236}">
+              <a16:creationId xmlns:a16="http://schemas.microsoft.com/office/drawing/2014/main" id="{13E2333A-240B-A37C-30FC-C6F91348551A}"/>
+            </a:ext>
+          </a:extLst>
+        </p:cNvPr>
+        <p:cNvGrpSpPr/>
+        <p:nvPr/>
+      </p:nvGrpSpPr>
+      <p:grpSpPr>
+        <a:xfrm>
+          <a:off x="0" y="0"/>
+          <a:ext cx="0" cy="0"/>
+          <a:chOff x="0" y="0"/>
+          <a:chExt cx="0" cy="0"/>
+        </a:xfrm>
+      </p:grpSpPr>
+      <p:sp>
+        <p:nvSpPr>
+          <p:cNvPr id="8" name="제목 7">
+            <a:extLst>
+              <a:ext uri="{FF2B5EF4-FFF2-40B4-BE49-F238E27FC236}">
+                <a16:creationId xmlns:a16="http://schemas.microsoft.com/office/drawing/2014/main" id="{E546B9A0-FAEB-DCBA-3B1C-4F4F71D81C43}"/>
+              </a:ext>
+            </a:extLst>
+          </p:cNvPr>
+          <p:cNvSpPr>
+            <a:spLocks noGrp="1"/>
+          </p:cNvSpPr>
+          <p:nvPr>
+            <p:ph type="title"/>
+          </p:nvPr>
+        </p:nvSpPr>
+        <p:spPr>
+          <a:xfrm>
+            <a:off x="521207" y="448056"/>
+            <a:ext cx="9727693" cy="640080"/>
+          </a:xfrm>
+        </p:spPr>
+        <p:txBody>
+          <a:bodyPr rtlCol="0">
+            <a:noAutofit/>
+          </a:bodyPr>
+          <a:lstStyle/>
+          <a:p>
+            <a:r>
+              <a:rPr lang="ko-KR" altLang="en-US" dirty="0">
+                <a:cs typeface="Segoe UI Light" panose="020B0502040204020203" pitchFamily="34" charset="0"/>
+              </a:rPr>
+              <a:t>토픽 모델링</a:t>
+            </a:r>
+            <a:r>
+              <a:rPr lang="en-US" altLang="ko-KR" dirty="0">
+                <a:cs typeface="Segoe UI Light" panose="020B0502040204020203" pitchFamily="34" charset="0"/>
+              </a:rPr>
+              <a:t>(Topic Modeling)</a:t>
+            </a:r>
+            <a:r>
+              <a:rPr lang="ko-KR" altLang="en-US" dirty="0">
+                <a:cs typeface="Segoe UI Light" panose="020B0502040204020203" pitchFamily="34" charset="0"/>
+              </a:rPr>
+              <a:t> 응용</a:t>
+            </a:r>
+          </a:p>
+        </p:txBody>
+      </p:sp>
+      <p:sp>
+        <p:nvSpPr>
+          <p:cNvPr id="12" name="슬라이드 번호 개체 틀 11">
+            <a:extLst>
+              <a:ext uri="{FF2B5EF4-FFF2-40B4-BE49-F238E27FC236}">
+                <a16:creationId xmlns:a16="http://schemas.microsoft.com/office/drawing/2014/main" id="{0F1F21B7-5DD6-ED1E-B063-5464E317DE60}"/>
+              </a:ext>
+            </a:extLst>
+          </p:cNvPr>
+          <p:cNvSpPr>
+            <a:spLocks noGrp="1"/>
+          </p:cNvSpPr>
+          <p:nvPr>
+            <p:ph type="sldNum" sz="quarter" idx="4"/>
+          </p:nvPr>
+        </p:nvSpPr>
+        <p:spPr/>
+        <p:txBody>
+          <a:bodyPr/>
+          <a:lstStyle/>
+          <a:p>
+            <a:fld id="{9860EDB8-5305-433F-BE41-D7A86D811DB3}" type="slidenum">
+              <a:rPr lang="en-US" altLang="ko-KR" noProof="0" smtClean="0"/>
+              <a:pPr/>
+              <a:t>17</a:t>
+            </a:fld>
+            <a:endParaRPr lang="ko-KR" altLang="en-US" noProof="0"/>
+          </a:p>
+        </p:txBody>
+      </p:sp>
+      <p:pic>
+        <p:nvPicPr>
+          <p:cNvPr id="2" name="그림 1" descr="문자 메시지">
+            <a:extLst>
+              <a:ext uri="{FF2B5EF4-FFF2-40B4-BE49-F238E27FC236}">
+                <a16:creationId xmlns:a16="http://schemas.microsoft.com/office/drawing/2014/main" id="{4B1C5976-9DAD-DD77-8644-B2F0865DC493}"/>
+              </a:ext>
+            </a:extLst>
+          </p:cNvPr>
+          <p:cNvPicPr>
+            <a:picLocks noChangeAspect="1"/>
+          </p:cNvPicPr>
+          <p:nvPr/>
+        </p:nvPicPr>
+        <p:blipFill>
+          <a:blip r:embed="rId3"/>
+          <a:stretch>
+            <a:fillRect/>
+          </a:stretch>
+        </p:blipFill>
+        <p:spPr>
+          <a:xfrm>
+            <a:off x="10668000" y="109220"/>
+            <a:ext cx="1397000" cy="1047750"/>
+          </a:xfrm>
+          <a:prstGeom prst="rect">
+            <a:avLst/>
+          </a:prstGeom>
+        </p:spPr>
+      </p:pic>
+      <p:sp>
+        <p:nvSpPr>
+          <p:cNvPr id="5" name="TextBox 4">
+            <a:extLst>
+              <a:ext uri="{FF2B5EF4-FFF2-40B4-BE49-F238E27FC236}">
+                <a16:creationId xmlns:a16="http://schemas.microsoft.com/office/drawing/2014/main" id="{DEA826E6-660F-EE4F-5013-8BEBFB9EDA8C}"/>
+              </a:ext>
+            </a:extLst>
+          </p:cNvPr>
+          <p:cNvSpPr txBox="1"/>
+          <p:nvPr/>
+        </p:nvSpPr>
+        <p:spPr>
+          <a:xfrm>
+            <a:off x="590391" y="1768607"/>
+            <a:ext cx="11011218" cy="4185761"/>
+          </a:xfrm>
+          <a:prstGeom prst="rect">
+            <a:avLst/>
+          </a:prstGeom>
+          <a:solidFill>
+            <a:srgbClr val="00B0F0"/>
+          </a:solidFill>
+        </p:spPr>
+        <p:txBody>
+          <a:bodyPr wrap="square">
+            <a:spAutoFit/>
+          </a:bodyPr>
+          <a:lstStyle/>
+          <a:p>
+            <a:r>
+              <a:rPr lang="en-US" altLang="ko-KR" sz="1400" dirty="0">
+                <a:latin typeface="D2Coding" panose="020B0609020101020101" pitchFamily="49" charset="-127"/>
+                <a:ea typeface="D2Coding" panose="020B0609020101020101" pitchFamily="49" charset="-127"/>
+              </a:rPr>
+              <a:t># 1. </a:t>
+            </a:r>
+            <a:r>
+              <a:rPr lang="ko-KR" altLang="en-US" sz="1400" dirty="0">
+                <a:latin typeface="D2Coding" panose="020B0609020101020101" pitchFamily="49" charset="-127"/>
+                <a:ea typeface="D2Coding" panose="020B0609020101020101" pitchFamily="49" charset="-127"/>
+              </a:rPr>
+              <a:t>데이터 로드 및 무작위 </a:t>
+            </a:r>
+            <a:r>
+              <a:rPr lang="en-US" altLang="ko-KR" sz="1400" dirty="0">
+                <a:latin typeface="D2Coding" panose="020B0609020101020101" pitchFamily="49" charset="-127"/>
+                <a:ea typeface="D2Coding" panose="020B0609020101020101" pitchFamily="49" charset="-127"/>
+              </a:rPr>
+              <a:t>5</a:t>
+            </a:r>
+            <a:r>
+              <a:rPr lang="ko-KR" altLang="en-US" sz="1400" dirty="0">
+                <a:latin typeface="D2Coding" panose="020B0609020101020101" pitchFamily="49" charset="-127"/>
+                <a:ea typeface="D2Coding" panose="020B0609020101020101" pitchFamily="49" charset="-127"/>
+              </a:rPr>
+              <a:t>개 주제 추출</a:t>
+            </a:r>
+            <a:endParaRPr lang="en-US" altLang="ko-KR" sz="1400" dirty="0">
+              <a:latin typeface="D2Coding" panose="020B0609020101020101" pitchFamily="49" charset="-127"/>
+              <a:ea typeface="D2Coding" panose="020B0609020101020101" pitchFamily="49" charset="-127"/>
+            </a:endParaRPr>
+          </a:p>
+          <a:p>
+            <a:endParaRPr lang="en-US" altLang="ko-KR" sz="1400" dirty="0">
+              <a:latin typeface="D2Coding" panose="020B0609020101020101" pitchFamily="49" charset="-127"/>
+              <a:ea typeface="D2Coding" panose="020B0609020101020101" pitchFamily="49" charset="-127"/>
+            </a:endParaRPr>
+          </a:p>
+          <a:p>
+            <a:r>
+              <a:rPr lang="en-US" altLang="ko-KR" sz="1400" dirty="0" err="1">
+                <a:latin typeface="D2Coding" panose="020B0609020101020101" pitchFamily="49" charset="-127"/>
+                <a:ea typeface="D2Coding" panose="020B0609020101020101" pitchFamily="49" charset="-127"/>
+              </a:rPr>
+              <a:t>all_categories</a:t>
+            </a:r>
+            <a:r>
+              <a:rPr lang="en-US" altLang="ko-KR" sz="1400" dirty="0">
+                <a:latin typeface="D2Coding" panose="020B0609020101020101" pitchFamily="49" charset="-127"/>
+                <a:ea typeface="D2Coding" panose="020B0609020101020101" pitchFamily="49" charset="-127"/>
+              </a:rPr>
+              <a:t> = [</a:t>
+            </a:r>
+          </a:p>
+          <a:p>
+            <a:r>
+              <a:rPr lang="en-US" altLang="ko-KR" sz="1400" dirty="0">
+                <a:latin typeface="D2Coding" panose="020B0609020101020101" pitchFamily="49" charset="-127"/>
+                <a:ea typeface="D2Coding" panose="020B0609020101020101" pitchFamily="49" charset="-127"/>
+              </a:rPr>
+              <a:t>    '</a:t>
+            </a:r>
+            <a:r>
+              <a:rPr lang="en-US" altLang="ko-KR" sz="1400" dirty="0" err="1">
+                <a:latin typeface="D2Coding" panose="020B0609020101020101" pitchFamily="49" charset="-127"/>
+                <a:ea typeface="D2Coding" panose="020B0609020101020101" pitchFamily="49" charset="-127"/>
+              </a:rPr>
+              <a:t>alt.atheism</a:t>
+            </a:r>
+            <a:r>
+              <a:rPr lang="en-US" altLang="ko-KR" sz="1400" dirty="0">
+                <a:latin typeface="D2Coding" panose="020B0609020101020101" pitchFamily="49" charset="-127"/>
+                <a:ea typeface="D2Coding" panose="020B0609020101020101" pitchFamily="49" charset="-127"/>
+              </a:rPr>
+              <a:t>', '</a:t>
+            </a:r>
+            <a:r>
+              <a:rPr lang="en-US" altLang="ko-KR" sz="1400" dirty="0" err="1">
+                <a:latin typeface="D2Coding" panose="020B0609020101020101" pitchFamily="49" charset="-127"/>
+                <a:ea typeface="D2Coding" panose="020B0609020101020101" pitchFamily="49" charset="-127"/>
+              </a:rPr>
+              <a:t>comp.graphics</a:t>
+            </a:r>
+            <a:r>
+              <a:rPr lang="en-US" altLang="ko-KR" sz="1400" dirty="0">
+                <a:latin typeface="D2Coding" panose="020B0609020101020101" pitchFamily="49" charset="-127"/>
+                <a:ea typeface="D2Coding" panose="020B0609020101020101" pitchFamily="49" charset="-127"/>
+              </a:rPr>
+              <a:t>', 'comp.os.ms-</a:t>
+            </a:r>
+            <a:r>
+              <a:rPr lang="en-US" altLang="ko-KR" sz="1400" dirty="0" err="1">
+                <a:latin typeface="D2Coding" panose="020B0609020101020101" pitchFamily="49" charset="-127"/>
+                <a:ea typeface="D2Coding" panose="020B0609020101020101" pitchFamily="49" charset="-127"/>
+              </a:rPr>
+              <a:t>windows.misc</a:t>
+            </a:r>
+            <a:r>
+              <a:rPr lang="en-US" altLang="ko-KR" sz="1400" dirty="0">
+                <a:latin typeface="D2Coding" panose="020B0609020101020101" pitchFamily="49" charset="-127"/>
+                <a:ea typeface="D2Coding" panose="020B0609020101020101" pitchFamily="49" charset="-127"/>
+              </a:rPr>
+              <a:t>’, ‘</a:t>
+            </a:r>
+            <a:r>
+              <a:rPr lang="en-US" altLang="ko-KR" sz="1400" dirty="0" err="1">
+                <a:latin typeface="D2Coding" panose="020B0609020101020101" pitchFamily="49" charset="-127"/>
+                <a:ea typeface="D2Coding" panose="020B0609020101020101" pitchFamily="49" charset="-127"/>
+              </a:rPr>
+              <a:t>comp.sys.ibm.pc.hardware</a:t>
+            </a:r>
+            <a:r>
+              <a:rPr lang="en-US" altLang="ko-KR" sz="1400" dirty="0">
+                <a:latin typeface="D2Coding" panose="020B0609020101020101" pitchFamily="49" charset="-127"/>
+                <a:ea typeface="D2Coding" panose="020B0609020101020101" pitchFamily="49" charset="-127"/>
+              </a:rPr>
+              <a:t>', '</a:t>
+            </a:r>
+            <a:r>
+              <a:rPr lang="en-US" altLang="ko-KR" sz="1400" dirty="0" err="1">
+                <a:latin typeface="D2Coding" panose="020B0609020101020101" pitchFamily="49" charset="-127"/>
+                <a:ea typeface="D2Coding" panose="020B0609020101020101" pitchFamily="49" charset="-127"/>
+              </a:rPr>
+              <a:t>comp.sys.mac.hardware</a:t>
+            </a:r>
+            <a:r>
+              <a:rPr lang="en-US" altLang="ko-KR" sz="1400" dirty="0">
+                <a:latin typeface="D2Coding" panose="020B0609020101020101" pitchFamily="49" charset="-127"/>
+                <a:ea typeface="D2Coding" panose="020B0609020101020101" pitchFamily="49" charset="-127"/>
+              </a:rPr>
+              <a:t>', '</a:t>
+            </a:r>
+            <a:r>
+              <a:rPr lang="en-US" altLang="ko-KR" sz="1400" dirty="0" err="1">
+                <a:latin typeface="D2Coding" panose="020B0609020101020101" pitchFamily="49" charset="-127"/>
+                <a:ea typeface="D2Coding" panose="020B0609020101020101" pitchFamily="49" charset="-127"/>
+              </a:rPr>
+              <a:t>comp.windows.x</a:t>
+            </a:r>
+            <a:r>
+              <a:rPr lang="en-US" altLang="ko-KR" sz="1400" dirty="0">
+                <a:latin typeface="D2Coding" panose="020B0609020101020101" pitchFamily="49" charset="-127"/>
+                <a:ea typeface="D2Coding" panose="020B0609020101020101" pitchFamily="49" charset="-127"/>
+              </a:rPr>
+              <a:t>’, '</a:t>
+            </a:r>
+            <a:r>
+              <a:rPr lang="en-US" altLang="ko-KR" sz="1400" dirty="0" err="1">
+                <a:latin typeface="D2Coding" panose="020B0609020101020101" pitchFamily="49" charset="-127"/>
+                <a:ea typeface="D2Coding" panose="020B0609020101020101" pitchFamily="49" charset="-127"/>
+              </a:rPr>
+              <a:t>misc.forsale</a:t>
+            </a:r>
+            <a:r>
+              <a:rPr lang="en-US" altLang="ko-KR" sz="1400" dirty="0">
+                <a:latin typeface="D2Coding" panose="020B0609020101020101" pitchFamily="49" charset="-127"/>
+                <a:ea typeface="D2Coding" panose="020B0609020101020101" pitchFamily="49" charset="-127"/>
+              </a:rPr>
+              <a:t>', '</a:t>
+            </a:r>
+            <a:r>
+              <a:rPr lang="en-US" altLang="ko-KR" sz="1400" dirty="0" err="1">
+                <a:latin typeface="D2Coding" panose="020B0609020101020101" pitchFamily="49" charset="-127"/>
+                <a:ea typeface="D2Coding" panose="020B0609020101020101" pitchFamily="49" charset="-127"/>
+              </a:rPr>
+              <a:t>rec.autos</a:t>
+            </a:r>
+            <a:r>
+              <a:rPr lang="en-US" altLang="ko-KR" sz="1400" dirty="0">
+                <a:latin typeface="D2Coding" panose="020B0609020101020101" pitchFamily="49" charset="-127"/>
+                <a:ea typeface="D2Coding" panose="020B0609020101020101" pitchFamily="49" charset="-127"/>
+              </a:rPr>
+              <a:t>', '</a:t>
+            </a:r>
+            <a:r>
+              <a:rPr lang="en-US" altLang="ko-KR" sz="1400" dirty="0" err="1">
+                <a:latin typeface="D2Coding" panose="020B0609020101020101" pitchFamily="49" charset="-127"/>
+                <a:ea typeface="D2Coding" panose="020B0609020101020101" pitchFamily="49" charset="-127"/>
+              </a:rPr>
+              <a:t>rec.motorcycles</a:t>
+            </a:r>
+            <a:r>
+              <a:rPr lang="en-US" altLang="ko-KR" sz="1400" dirty="0">
+                <a:latin typeface="D2Coding" panose="020B0609020101020101" pitchFamily="49" charset="-127"/>
+                <a:ea typeface="D2Coding" panose="020B0609020101020101" pitchFamily="49" charset="-127"/>
+              </a:rPr>
+              <a:t>', '</a:t>
+            </a:r>
+            <a:r>
+              <a:rPr lang="en-US" altLang="ko-KR" sz="1400" dirty="0" err="1">
+                <a:latin typeface="D2Coding" panose="020B0609020101020101" pitchFamily="49" charset="-127"/>
+                <a:ea typeface="D2Coding" panose="020B0609020101020101" pitchFamily="49" charset="-127"/>
+              </a:rPr>
+              <a:t>rec.sport.baseball</a:t>
+            </a:r>
+            <a:r>
+              <a:rPr lang="en-US" altLang="ko-KR" sz="1400" dirty="0">
+                <a:latin typeface="D2Coding" panose="020B0609020101020101" pitchFamily="49" charset="-127"/>
+                <a:ea typeface="D2Coding" panose="020B0609020101020101" pitchFamily="49" charset="-127"/>
+              </a:rPr>
+              <a:t>’, '</a:t>
+            </a:r>
+            <a:r>
+              <a:rPr lang="en-US" altLang="ko-KR" sz="1400" dirty="0" err="1">
+                <a:latin typeface="D2Coding" panose="020B0609020101020101" pitchFamily="49" charset="-127"/>
+                <a:ea typeface="D2Coding" panose="020B0609020101020101" pitchFamily="49" charset="-127"/>
+              </a:rPr>
+              <a:t>rec.sport.hockey</a:t>
+            </a:r>
+            <a:r>
+              <a:rPr lang="en-US" altLang="ko-KR" sz="1400" dirty="0">
+                <a:latin typeface="D2Coding" panose="020B0609020101020101" pitchFamily="49" charset="-127"/>
+                <a:ea typeface="D2Coding" panose="020B0609020101020101" pitchFamily="49" charset="-127"/>
+              </a:rPr>
+              <a:t>', '</a:t>
+            </a:r>
+            <a:r>
+              <a:rPr lang="en-US" altLang="ko-KR" sz="1400" dirty="0" err="1">
+                <a:latin typeface="D2Coding" panose="020B0609020101020101" pitchFamily="49" charset="-127"/>
+                <a:ea typeface="D2Coding" panose="020B0609020101020101" pitchFamily="49" charset="-127"/>
+              </a:rPr>
+              <a:t>sci.crypt</a:t>
+            </a:r>
+            <a:r>
+              <a:rPr lang="en-US" altLang="ko-KR" sz="1400" dirty="0">
+                <a:latin typeface="D2Coding" panose="020B0609020101020101" pitchFamily="49" charset="-127"/>
+                <a:ea typeface="D2Coding" panose="020B0609020101020101" pitchFamily="49" charset="-127"/>
+              </a:rPr>
+              <a:t>', '</a:t>
+            </a:r>
+            <a:r>
+              <a:rPr lang="en-US" altLang="ko-KR" sz="1400" dirty="0" err="1">
+                <a:latin typeface="D2Coding" panose="020B0609020101020101" pitchFamily="49" charset="-127"/>
+                <a:ea typeface="D2Coding" panose="020B0609020101020101" pitchFamily="49" charset="-127"/>
+              </a:rPr>
+              <a:t>sci.electronics</a:t>
+            </a:r>
+            <a:r>
+              <a:rPr lang="en-US" altLang="ko-KR" sz="1400" dirty="0">
+                <a:latin typeface="D2Coding" panose="020B0609020101020101" pitchFamily="49" charset="-127"/>
+                <a:ea typeface="D2Coding" panose="020B0609020101020101" pitchFamily="49" charset="-127"/>
+              </a:rPr>
+              <a:t>', '</a:t>
+            </a:r>
+            <a:r>
+              <a:rPr lang="en-US" altLang="ko-KR" sz="1400" dirty="0" err="1">
+                <a:latin typeface="D2Coding" panose="020B0609020101020101" pitchFamily="49" charset="-127"/>
+                <a:ea typeface="D2Coding" panose="020B0609020101020101" pitchFamily="49" charset="-127"/>
+              </a:rPr>
+              <a:t>sci.med</a:t>
+            </a:r>
+            <a:r>
+              <a:rPr lang="en-US" altLang="ko-KR" sz="1400" dirty="0">
+                <a:latin typeface="D2Coding" panose="020B0609020101020101" pitchFamily="49" charset="-127"/>
+                <a:ea typeface="D2Coding" panose="020B0609020101020101" pitchFamily="49" charset="-127"/>
+              </a:rPr>
+              <a:t>’, '</a:t>
+            </a:r>
+            <a:r>
+              <a:rPr lang="en-US" altLang="ko-KR" sz="1400" dirty="0" err="1">
+                <a:latin typeface="D2Coding" panose="020B0609020101020101" pitchFamily="49" charset="-127"/>
+                <a:ea typeface="D2Coding" panose="020B0609020101020101" pitchFamily="49" charset="-127"/>
+              </a:rPr>
+              <a:t>sci.space</a:t>
+            </a:r>
+            <a:r>
+              <a:rPr lang="en-US" altLang="ko-KR" sz="1400" dirty="0">
+                <a:latin typeface="D2Coding" panose="020B0609020101020101" pitchFamily="49" charset="-127"/>
+                <a:ea typeface="D2Coding" panose="020B0609020101020101" pitchFamily="49" charset="-127"/>
+              </a:rPr>
+              <a:t>', '</a:t>
+            </a:r>
+            <a:r>
+              <a:rPr lang="en-US" altLang="ko-KR" sz="1400" dirty="0" err="1">
+                <a:latin typeface="D2Coding" panose="020B0609020101020101" pitchFamily="49" charset="-127"/>
+                <a:ea typeface="D2Coding" panose="020B0609020101020101" pitchFamily="49" charset="-127"/>
+              </a:rPr>
+              <a:t>soc.religion.christian</a:t>
+            </a:r>
+            <a:r>
+              <a:rPr lang="en-US" altLang="ko-KR" sz="1400" dirty="0">
+                <a:latin typeface="D2Coding" panose="020B0609020101020101" pitchFamily="49" charset="-127"/>
+                <a:ea typeface="D2Coding" panose="020B0609020101020101" pitchFamily="49" charset="-127"/>
+              </a:rPr>
+              <a:t>', '</a:t>
+            </a:r>
+            <a:r>
+              <a:rPr lang="en-US" altLang="ko-KR" sz="1400" dirty="0" err="1">
+                <a:latin typeface="D2Coding" panose="020B0609020101020101" pitchFamily="49" charset="-127"/>
+                <a:ea typeface="D2Coding" panose="020B0609020101020101" pitchFamily="49" charset="-127"/>
+              </a:rPr>
+              <a:t>talk.politics.guns</a:t>
+            </a:r>
+            <a:r>
+              <a:rPr lang="en-US" altLang="ko-KR" sz="1400" dirty="0">
+                <a:latin typeface="D2Coding" panose="020B0609020101020101" pitchFamily="49" charset="-127"/>
+                <a:ea typeface="D2Coding" panose="020B0609020101020101" pitchFamily="49" charset="-127"/>
+              </a:rPr>
+              <a:t>’, '</a:t>
+            </a:r>
+            <a:r>
+              <a:rPr lang="en-US" altLang="ko-KR" sz="1400" dirty="0" err="1">
+                <a:latin typeface="D2Coding" panose="020B0609020101020101" pitchFamily="49" charset="-127"/>
+                <a:ea typeface="D2Coding" panose="020B0609020101020101" pitchFamily="49" charset="-127"/>
+              </a:rPr>
+              <a:t>talk.politics.mideast</a:t>
+            </a:r>
+            <a:r>
+              <a:rPr lang="en-US" altLang="ko-KR" sz="1400" dirty="0">
+                <a:latin typeface="D2Coding" panose="020B0609020101020101" pitchFamily="49" charset="-127"/>
+                <a:ea typeface="D2Coding" panose="020B0609020101020101" pitchFamily="49" charset="-127"/>
+              </a:rPr>
+              <a:t>', '</a:t>
+            </a:r>
+            <a:r>
+              <a:rPr lang="en-US" altLang="ko-KR" sz="1400" dirty="0" err="1">
+                <a:latin typeface="D2Coding" panose="020B0609020101020101" pitchFamily="49" charset="-127"/>
+                <a:ea typeface="D2Coding" panose="020B0609020101020101" pitchFamily="49" charset="-127"/>
+              </a:rPr>
+              <a:t>talk.politics.misc</a:t>
+            </a:r>
+            <a:r>
+              <a:rPr lang="en-US" altLang="ko-KR" sz="1400" dirty="0">
+                <a:latin typeface="D2Coding" panose="020B0609020101020101" pitchFamily="49" charset="-127"/>
+                <a:ea typeface="D2Coding" panose="020B0609020101020101" pitchFamily="49" charset="-127"/>
+              </a:rPr>
+              <a:t>', '</a:t>
+            </a:r>
+            <a:r>
+              <a:rPr lang="en-US" altLang="ko-KR" sz="1400" dirty="0" err="1">
+                <a:latin typeface="D2Coding" panose="020B0609020101020101" pitchFamily="49" charset="-127"/>
+                <a:ea typeface="D2Coding" panose="020B0609020101020101" pitchFamily="49" charset="-127"/>
+              </a:rPr>
+              <a:t>talk.religion.misc</a:t>
+            </a:r>
+            <a:r>
+              <a:rPr lang="en-US" altLang="ko-KR" sz="1400" dirty="0">
+                <a:latin typeface="D2Coding" panose="020B0609020101020101" pitchFamily="49" charset="-127"/>
+                <a:ea typeface="D2Coding" panose="020B0609020101020101" pitchFamily="49" charset="-127"/>
+              </a:rPr>
+              <a:t>'</a:t>
+            </a:r>
+          </a:p>
+          <a:p>
+            <a:r>
+              <a:rPr lang="en-US" altLang="ko-KR" sz="1400" dirty="0">
+                <a:latin typeface="D2Coding" panose="020B0609020101020101" pitchFamily="49" charset="-127"/>
+                <a:ea typeface="D2Coding" panose="020B0609020101020101" pitchFamily="49" charset="-127"/>
+              </a:rPr>
+              <a:t>]</a:t>
+            </a:r>
+          </a:p>
+          <a:p>
+            <a:endParaRPr lang="en-US" altLang="ko-KR" sz="1400" dirty="0">
+              <a:latin typeface="D2Coding" panose="020B0609020101020101" pitchFamily="49" charset="-127"/>
+              <a:ea typeface="D2Coding" panose="020B0609020101020101" pitchFamily="49" charset="-127"/>
+            </a:endParaRPr>
+          </a:p>
+          <a:p>
+            <a:r>
+              <a:rPr lang="en-US" altLang="ko-KR" sz="1400" dirty="0">
+                <a:latin typeface="D2Coding" panose="020B0609020101020101" pitchFamily="49" charset="-127"/>
+                <a:ea typeface="D2Coding" panose="020B0609020101020101" pitchFamily="49" charset="-127"/>
+              </a:rPr>
+              <a:t># </a:t>
+            </a:r>
+            <a:r>
+              <a:rPr lang="ko-KR" altLang="en-US" sz="1400" dirty="0">
+                <a:latin typeface="D2Coding" panose="020B0609020101020101" pitchFamily="49" charset="-127"/>
+                <a:ea typeface="D2Coding" panose="020B0609020101020101" pitchFamily="49" charset="-127"/>
+              </a:rPr>
+              <a:t>무작위로 </a:t>
+            </a:r>
+            <a:r>
+              <a:rPr lang="en-US" altLang="ko-KR" sz="1400" dirty="0">
+                <a:latin typeface="D2Coding" panose="020B0609020101020101" pitchFamily="49" charset="-127"/>
+                <a:ea typeface="D2Coding" panose="020B0609020101020101" pitchFamily="49" charset="-127"/>
+              </a:rPr>
+              <a:t>5</a:t>
+            </a:r>
+            <a:r>
+              <a:rPr lang="ko-KR" altLang="en-US" sz="1400" dirty="0">
+                <a:latin typeface="D2Coding" panose="020B0609020101020101" pitchFamily="49" charset="-127"/>
+                <a:ea typeface="D2Coding" panose="020B0609020101020101" pitchFamily="49" charset="-127"/>
+              </a:rPr>
+              <a:t>개 주제 선정</a:t>
+            </a:r>
+          </a:p>
+          <a:p>
+            <a:r>
+              <a:rPr lang="en-US" altLang="ko-KR" sz="1400" dirty="0" err="1">
+                <a:latin typeface="D2Coding" panose="020B0609020101020101" pitchFamily="49" charset="-127"/>
+                <a:ea typeface="D2Coding" panose="020B0609020101020101" pitchFamily="49" charset="-127"/>
+              </a:rPr>
+              <a:t>random.seed</a:t>
+            </a:r>
+            <a:r>
+              <a:rPr lang="en-US" altLang="ko-KR" sz="1400" dirty="0">
+                <a:latin typeface="D2Coding" panose="020B0609020101020101" pitchFamily="49" charset="-127"/>
+                <a:ea typeface="D2Coding" panose="020B0609020101020101" pitchFamily="49" charset="-127"/>
+              </a:rPr>
+              <a:t>(42)  # </a:t>
+            </a:r>
+            <a:r>
+              <a:rPr lang="ko-KR" altLang="en-US" sz="1400" dirty="0">
+                <a:latin typeface="D2Coding" panose="020B0609020101020101" pitchFamily="49" charset="-127"/>
+                <a:ea typeface="D2Coding" panose="020B0609020101020101" pitchFamily="49" charset="-127"/>
+              </a:rPr>
+              <a:t>재현성을 원하시면 주석을 해제하거나 변경하세요</a:t>
+            </a:r>
+          </a:p>
+          <a:p>
+            <a:r>
+              <a:rPr lang="en-US" altLang="ko-KR" sz="1400" dirty="0" err="1">
+                <a:latin typeface="D2Coding" panose="020B0609020101020101" pitchFamily="49" charset="-127"/>
+                <a:ea typeface="D2Coding" panose="020B0609020101020101" pitchFamily="49" charset="-127"/>
+              </a:rPr>
+              <a:t>selected_categories</a:t>
+            </a:r>
+            <a:r>
+              <a:rPr lang="en-US" altLang="ko-KR" sz="1400" dirty="0">
+                <a:latin typeface="D2Coding" panose="020B0609020101020101" pitchFamily="49" charset="-127"/>
+                <a:ea typeface="D2Coding" panose="020B0609020101020101" pitchFamily="49" charset="-127"/>
+              </a:rPr>
+              <a:t> = </a:t>
+            </a:r>
+            <a:r>
+              <a:rPr lang="en-US" altLang="ko-KR" sz="1400" dirty="0" err="1">
+                <a:latin typeface="D2Coding" panose="020B0609020101020101" pitchFamily="49" charset="-127"/>
+                <a:ea typeface="D2Coding" panose="020B0609020101020101" pitchFamily="49" charset="-127"/>
+              </a:rPr>
+              <a:t>random.sample</a:t>
+            </a:r>
+            <a:r>
+              <a:rPr lang="en-US" altLang="ko-KR" sz="1400" dirty="0">
+                <a:latin typeface="D2Coding" panose="020B0609020101020101" pitchFamily="49" charset="-127"/>
+                <a:ea typeface="D2Coding" panose="020B0609020101020101" pitchFamily="49" charset="-127"/>
+              </a:rPr>
+              <a:t>(</a:t>
+            </a:r>
+            <a:r>
+              <a:rPr lang="en-US" altLang="ko-KR" sz="1400" dirty="0" err="1">
+                <a:latin typeface="D2Coding" panose="020B0609020101020101" pitchFamily="49" charset="-127"/>
+                <a:ea typeface="D2Coding" panose="020B0609020101020101" pitchFamily="49" charset="-127"/>
+              </a:rPr>
+              <a:t>all_categories</a:t>
+            </a:r>
+            <a:r>
+              <a:rPr lang="en-US" altLang="ko-KR" sz="1400" dirty="0">
+                <a:latin typeface="D2Coding" panose="020B0609020101020101" pitchFamily="49" charset="-127"/>
+                <a:ea typeface="D2Coding" panose="020B0609020101020101" pitchFamily="49" charset="-127"/>
+              </a:rPr>
+              <a:t>, 5)</a:t>
+            </a:r>
+          </a:p>
+          <a:p>
+            <a:endParaRPr lang="en-US" altLang="ko-KR" sz="1400" dirty="0">
+              <a:latin typeface="D2Coding" panose="020B0609020101020101" pitchFamily="49" charset="-127"/>
+              <a:ea typeface="D2Coding" panose="020B0609020101020101" pitchFamily="49" charset="-127"/>
+            </a:endParaRPr>
+          </a:p>
+          <a:p>
+            <a:r>
+              <a:rPr lang="en-US" altLang="ko-KR" sz="1400" dirty="0">
+                <a:latin typeface="D2Coding" panose="020B0609020101020101" pitchFamily="49" charset="-127"/>
+                <a:ea typeface="D2Coding" panose="020B0609020101020101" pitchFamily="49" charset="-127"/>
+              </a:rPr>
+              <a:t>print(f"★ </a:t>
+            </a:r>
+            <a:r>
+              <a:rPr lang="ko-KR" altLang="en-US" sz="1400" dirty="0">
+                <a:latin typeface="D2Coding" panose="020B0609020101020101" pitchFamily="49" charset="-127"/>
+                <a:ea typeface="D2Coding" panose="020B0609020101020101" pitchFamily="49" charset="-127"/>
+              </a:rPr>
+              <a:t>정답 </a:t>
+            </a:r>
+            <a:r>
+              <a:rPr lang="en-US" altLang="ko-KR" sz="1400" dirty="0">
+                <a:latin typeface="D2Coding" panose="020B0609020101020101" pitchFamily="49" charset="-127"/>
+                <a:ea typeface="D2Coding" panose="020B0609020101020101" pitchFamily="49" charset="-127"/>
+              </a:rPr>
+              <a:t>(</a:t>
+            </a:r>
+            <a:r>
+              <a:rPr lang="ko-KR" altLang="en-US" sz="1400" dirty="0">
+                <a:latin typeface="D2Coding" panose="020B0609020101020101" pitchFamily="49" charset="-127"/>
+                <a:ea typeface="D2Coding" panose="020B0609020101020101" pitchFamily="49" charset="-127"/>
+              </a:rPr>
+              <a:t>무작위 선택된 </a:t>
+            </a:r>
+            <a:r>
+              <a:rPr lang="en-US" altLang="ko-KR" sz="1400" dirty="0">
+                <a:latin typeface="D2Coding" panose="020B0609020101020101" pitchFamily="49" charset="-127"/>
+                <a:ea typeface="D2Coding" panose="020B0609020101020101" pitchFamily="49" charset="-127"/>
+              </a:rPr>
+              <a:t>5</a:t>
+            </a:r>
+            <a:r>
+              <a:rPr lang="ko-KR" altLang="en-US" sz="1400" dirty="0">
+                <a:latin typeface="D2Coding" panose="020B0609020101020101" pitchFamily="49" charset="-127"/>
+                <a:ea typeface="D2Coding" panose="020B0609020101020101" pitchFamily="49" charset="-127"/>
+              </a:rPr>
+              <a:t>개 주제</a:t>
+            </a:r>
+            <a:r>
+              <a:rPr lang="en-US" altLang="ko-KR" sz="1400" dirty="0">
+                <a:latin typeface="D2Coding" panose="020B0609020101020101" pitchFamily="49" charset="-127"/>
+                <a:ea typeface="D2Coding" panose="020B0609020101020101" pitchFamily="49" charset="-127"/>
+              </a:rPr>
+              <a:t>): {</a:t>
+            </a:r>
+            <a:r>
+              <a:rPr lang="en-US" altLang="ko-KR" sz="1400" dirty="0" err="1">
+                <a:latin typeface="D2Coding" panose="020B0609020101020101" pitchFamily="49" charset="-127"/>
+                <a:ea typeface="D2Coding" panose="020B0609020101020101" pitchFamily="49" charset="-127"/>
+              </a:rPr>
+              <a:t>selected_categories</a:t>
+            </a:r>
+            <a:r>
+              <a:rPr lang="en-US" altLang="ko-KR" sz="1400" dirty="0">
+                <a:latin typeface="D2Coding" panose="020B0609020101020101" pitchFamily="49" charset="-127"/>
+                <a:ea typeface="D2Coding" panose="020B0609020101020101" pitchFamily="49" charset="-127"/>
+              </a:rPr>
+              <a:t>}")</a:t>
+            </a:r>
+          </a:p>
+          <a:p>
+            <a:endParaRPr lang="ko-KR" altLang="en-US" sz="1400" dirty="0">
+              <a:latin typeface="D2Coding" panose="020B0609020101020101" pitchFamily="49" charset="-127"/>
+              <a:ea typeface="D2Coding" panose="020B0609020101020101" pitchFamily="49" charset="-127"/>
+            </a:endParaRPr>
+          </a:p>
+          <a:p>
+            <a:r>
+              <a:rPr lang="en-US" altLang="ko-KR" sz="1400" dirty="0">
+                <a:latin typeface="D2Coding" panose="020B0609020101020101" pitchFamily="49" charset="-127"/>
+                <a:ea typeface="D2Coding" panose="020B0609020101020101" pitchFamily="49" charset="-127"/>
+              </a:rPr>
+              <a:t># </a:t>
+            </a:r>
+            <a:r>
+              <a:rPr lang="ko-KR" altLang="en-US" sz="1400" dirty="0">
+                <a:latin typeface="D2Coding" panose="020B0609020101020101" pitchFamily="49" charset="-127"/>
+                <a:ea typeface="D2Coding" panose="020B0609020101020101" pitchFamily="49" charset="-127"/>
+              </a:rPr>
+              <a:t>정답 데이터 로드 </a:t>
+            </a:r>
+            <a:r>
+              <a:rPr lang="en-US" altLang="ko-KR" sz="1400" dirty="0">
+                <a:latin typeface="D2Coding" panose="020B0609020101020101" pitchFamily="49" charset="-127"/>
+                <a:ea typeface="D2Coding" panose="020B0609020101020101" pitchFamily="49" charset="-127"/>
+              </a:rPr>
+              <a:t>(</a:t>
+            </a:r>
+            <a:r>
+              <a:rPr lang="ko-KR" altLang="en-US" sz="1400" dirty="0">
+                <a:latin typeface="D2Coding" panose="020B0609020101020101" pitchFamily="49" charset="-127"/>
+                <a:ea typeface="D2Coding" panose="020B0609020101020101" pitchFamily="49" charset="-127"/>
+              </a:rPr>
+              <a:t>시각화 분석 후 맞추기 위해 텍스트만 활용</a:t>
+            </a:r>
+            <a:r>
+              <a:rPr lang="en-US" altLang="ko-KR" sz="1400" dirty="0">
+                <a:latin typeface="D2Coding" panose="020B0609020101020101" pitchFamily="49" charset="-127"/>
+                <a:ea typeface="D2Coding" panose="020B0609020101020101" pitchFamily="49" charset="-127"/>
+              </a:rPr>
+              <a:t>)</a:t>
+            </a:r>
+            <a:endParaRPr lang="ko-KR" altLang="en-US" sz="1400" dirty="0">
+              <a:latin typeface="D2Coding" panose="020B0609020101020101" pitchFamily="49" charset="-127"/>
+              <a:ea typeface="D2Coding" panose="020B0609020101020101" pitchFamily="49" charset="-127"/>
+            </a:endParaRPr>
+          </a:p>
+          <a:p>
+            <a:r>
+              <a:rPr lang="en-US" altLang="ko-KR" sz="1400" dirty="0">
+                <a:latin typeface="D2Coding" panose="020B0609020101020101" pitchFamily="49" charset="-127"/>
+                <a:ea typeface="D2Coding" panose="020B0609020101020101" pitchFamily="49" charset="-127"/>
+              </a:rPr>
+              <a:t>newsgroups = fetch_20newsgroups(subset='train', categories=</a:t>
+            </a:r>
+            <a:r>
+              <a:rPr lang="en-US" altLang="ko-KR" sz="1400" dirty="0" err="1">
+                <a:latin typeface="D2Coding" panose="020B0609020101020101" pitchFamily="49" charset="-127"/>
+                <a:ea typeface="D2Coding" panose="020B0609020101020101" pitchFamily="49" charset="-127"/>
+              </a:rPr>
+              <a:t>selected_categories</a:t>
+            </a:r>
+            <a:r>
+              <a:rPr lang="en-US" altLang="ko-KR" sz="1400" dirty="0">
+                <a:latin typeface="D2Coding" panose="020B0609020101020101" pitchFamily="49" charset="-127"/>
+                <a:ea typeface="D2Coding" panose="020B0609020101020101" pitchFamily="49" charset="-127"/>
+              </a:rPr>
+              <a:t>,</a:t>
+            </a:r>
+          </a:p>
+          <a:p>
+            <a:r>
+              <a:rPr lang="en-US" altLang="ko-KR" sz="1400" dirty="0">
+                <a:latin typeface="D2Coding" panose="020B0609020101020101" pitchFamily="49" charset="-127"/>
+                <a:ea typeface="D2Coding" panose="020B0609020101020101" pitchFamily="49" charset="-127"/>
+              </a:rPr>
+              <a:t>                                remove=('headers', 'footers', 'quotes'))</a:t>
+            </a:r>
+          </a:p>
+          <a:p>
+            <a:r>
+              <a:rPr lang="en-US" altLang="ko-KR" sz="1400" dirty="0">
+                <a:latin typeface="D2Coding" panose="020B0609020101020101" pitchFamily="49" charset="-127"/>
+                <a:ea typeface="D2Coding" panose="020B0609020101020101" pitchFamily="49" charset="-127"/>
+              </a:rPr>
+              <a:t>documents = </a:t>
+            </a:r>
+            <a:r>
+              <a:rPr lang="en-US" altLang="ko-KR" sz="1400" dirty="0" err="1">
+                <a:latin typeface="D2Coding" panose="020B0609020101020101" pitchFamily="49" charset="-127"/>
+                <a:ea typeface="D2Coding" panose="020B0609020101020101" pitchFamily="49" charset="-127"/>
+              </a:rPr>
+              <a:t>newsgroups.data</a:t>
+            </a:r>
+            <a:endParaRPr lang="en-US" altLang="ko-KR" sz="1400" dirty="0">
+              <a:latin typeface="D2Coding" panose="020B0609020101020101" pitchFamily="49" charset="-127"/>
+              <a:ea typeface="D2Coding" panose="020B0609020101020101" pitchFamily="49" charset="-127"/>
+            </a:endParaRPr>
+          </a:p>
+        </p:txBody>
+      </p:sp>
+    </p:spTree>
+    <p:extLst>
+      <p:ext uri="{BB962C8B-B14F-4D97-AF65-F5344CB8AC3E}">
+        <p14:creationId xmlns:p14="http://schemas.microsoft.com/office/powerpoint/2010/main" val="3522762280"/>
+      </p:ext>
+    </p:extLst>
+  </p:cSld>
+  <p:clrMapOvr>
+    <a:masterClrMapping/>
+  </p:clrMapOvr>
+  <mc:AlternateContent xmlns:mc="http://schemas.openxmlformats.org/markup-compatibility/2006" xmlns:p14="http://schemas.microsoft.com/office/powerpoint/2010/main">
+    <mc:Choice Requires="p14">
+      <p:transition p14:dur="10"/>
+    </mc:Choice>
+    <mc:Fallback xmlns="">
+      <p:transition/>
+    </mc:Fallback>
+  </mc:AlternateContent>
+</p:sld>
+</file>
+
+<file path=ppt/slides/slide18.xml><?xml version="1.0" encoding="utf-8"?>
+<p:sld xmlns:a="http://schemas.openxmlformats.org/drawingml/2006/main" xmlns:r="http://schemas.openxmlformats.org/officeDocument/2006/relationships" xmlns:p="http://schemas.openxmlformats.org/presentationml/2006/main">
+  <p:cSld>
+    <p:spTree>
+      <p:nvGrpSpPr>
+        <p:cNvPr id="1" name="">
+          <a:extLst>
+            <a:ext uri="{FF2B5EF4-FFF2-40B4-BE49-F238E27FC236}">
+              <a16:creationId xmlns:a16="http://schemas.microsoft.com/office/drawing/2014/main" id="{B5178947-611A-FCBC-3FD5-505E7F81B86E}"/>
+            </a:ext>
+          </a:extLst>
+        </p:cNvPr>
+        <p:cNvGrpSpPr/>
+        <p:nvPr/>
+      </p:nvGrpSpPr>
+      <p:grpSpPr>
+        <a:xfrm>
+          <a:off x="0" y="0"/>
+          <a:ext cx="0" cy="0"/>
+          <a:chOff x="0" y="0"/>
+          <a:chExt cx="0" cy="0"/>
+        </a:xfrm>
+      </p:grpSpPr>
+      <p:sp>
+        <p:nvSpPr>
+          <p:cNvPr id="8" name="제목 7">
+            <a:extLst>
+              <a:ext uri="{FF2B5EF4-FFF2-40B4-BE49-F238E27FC236}">
+                <a16:creationId xmlns:a16="http://schemas.microsoft.com/office/drawing/2014/main" id="{1D20693B-3CB9-CE10-4A73-A92153FB78AE}"/>
+              </a:ext>
+            </a:extLst>
+          </p:cNvPr>
+          <p:cNvSpPr>
+            <a:spLocks noGrp="1"/>
+          </p:cNvSpPr>
+          <p:nvPr>
+            <p:ph type="title"/>
+          </p:nvPr>
+        </p:nvSpPr>
+        <p:spPr>
+          <a:xfrm>
+            <a:off x="521207" y="448056"/>
+            <a:ext cx="9727693" cy="640080"/>
+          </a:xfrm>
+        </p:spPr>
+        <p:txBody>
+          <a:bodyPr rtlCol="0">
+            <a:noAutofit/>
+          </a:bodyPr>
+          <a:lstStyle/>
+          <a:p>
+            <a:r>
+              <a:rPr lang="ko-KR" altLang="en-US" dirty="0">
+                <a:cs typeface="Segoe UI Light" panose="020B0502040204020203" pitchFamily="34" charset="0"/>
+              </a:rPr>
+              <a:t>토픽 모델링</a:t>
+            </a:r>
+            <a:r>
+              <a:rPr lang="en-US" altLang="ko-KR" dirty="0">
+                <a:cs typeface="Segoe UI Light" panose="020B0502040204020203" pitchFamily="34" charset="0"/>
+              </a:rPr>
+              <a:t>(Topic Modeling)</a:t>
+            </a:r>
+            <a:r>
+              <a:rPr lang="ko-KR" altLang="en-US" dirty="0">
+                <a:cs typeface="Segoe UI Light" panose="020B0502040204020203" pitchFamily="34" charset="0"/>
+              </a:rPr>
+              <a:t> 응용</a:t>
+            </a:r>
+          </a:p>
+        </p:txBody>
+      </p:sp>
+      <p:sp>
+        <p:nvSpPr>
+          <p:cNvPr id="12" name="슬라이드 번호 개체 틀 11">
+            <a:extLst>
+              <a:ext uri="{FF2B5EF4-FFF2-40B4-BE49-F238E27FC236}">
+                <a16:creationId xmlns:a16="http://schemas.microsoft.com/office/drawing/2014/main" id="{EFD67CA9-D62A-0C04-1FE4-79B3AC9BB732}"/>
+              </a:ext>
+            </a:extLst>
+          </p:cNvPr>
+          <p:cNvSpPr>
+            <a:spLocks noGrp="1"/>
+          </p:cNvSpPr>
+          <p:nvPr>
+            <p:ph type="sldNum" sz="quarter" idx="4"/>
+          </p:nvPr>
+        </p:nvSpPr>
+        <p:spPr/>
+        <p:txBody>
+          <a:bodyPr/>
+          <a:lstStyle/>
+          <a:p>
+            <a:fld id="{9860EDB8-5305-433F-BE41-D7A86D811DB3}" type="slidenum">
+              <a:rPr lang="en-US" altLang="ko-KR" noProof="0" smtClean="0"/>
+              <a:pPr/>
+              <a:t>18</a:t>
+            </a:fld>
+            <a:endParaRPr lang="ko-KR" altLang="en-US" noProof="0"/>
+          </a:p>
+        </p:txBody>
+      </p:sp>
+      <p:pic>
+        <p:nvPicPr>
+          <p:cNvPr id="2" name="그림 1" descr="문자 메시지">
+            <a:extLst>
+              <a:ext uri="{FF2B5EF4-FFF2-40B4-BE49-F238E27FC236}">
+                <a16:creationId xmlns:a16="http://schemas.microsoft.com/office/drawing/2014/main" id="{FC5C10BC-015A-2711-338E-904EF84FF458}"/>
+              </a:ext>
+            </a:extLst>
+          </p:cNvPr>
+          <p:cNvPicPr>
+            <a:picLocks noChangeAspect="1"/>
+          </p:cNvPicPr>
+          <p:nvPr/>
+        </p:nvPicPr>
+        <p:blipFill>
+          <a:blip r:embed="rId3"/>
+          <a:stretch>
+            <a:fillRect/>
+          </a:stretch>
+        </p:blipFill>
+        <p:spPr>
+          <a:xfrm>
+            <a:off x="10668000" y="109220"/>
+            <a:ext cx="1397000" cy="1047750"/>
+          </a:xfrm>
+          <a:prstGeom prst="rect">
+            <a:avLst/>
+          </a:prstGeom>
+        </p:spPr>
+      </p:pic>
+      <p:sp>
+        <p:nvSpPr>
+          <p:cNvPr id="5" name="TextBox 4">
+            <a:extLst>
+              <a:ext uri="{FF2B5EF4-FFF2-40B4-BE49-F238E27FC236}">
+                <a16:creationId xmlns:a16="http://schemas.microsoft.com/office/drawing/2014/main" id="{56805A69-288B-1CB8-2E52-5D6E94B7BDFC}"/>
+              </a:ext>
+            </a:extLst>
+          </p:cNvPr>
+          <p:cNvSpPr txBox="1"/>
+          <p:nvPr/>
+        </p:nvSpPr>
+        <p:spPr>
+          <a:xfrm>
+            <a:off x="590391" y="1768607"/>
+            <a:ext cx="11011218" cy="4678204"/>
+          </a:xfrm>
+          <a:prstGeom prst="rect">
+            <a:avLst/>
+          </a:prstGeom>
+          <a:solidFill>
+            <a:srgbClr val="00B0F0"/>
+          </a:solidFill>
+        </p:spPr>
+        <p:txBody>
+          <a:bodyPr wrap="square">
+            <a:spAutoFit/>
+          </a:bodyPr>
+          <a:lstStyle/>
+          <a:p>
+            <a:r>
+              <a:rPr lang="en-US" altLang="ko-KR" dirty="0"/>
+              <a:t>#</a:t>
+            </a:r>
+            <a:r>
+              <a:rPr lang="ko-KR" altLang="en-US" dirty="0"/>
+              <a:t> </a:t>
+            </a:r>
+            <a:r>
+              <a:rPr lang="en-US" altLang="ko-KR" sz="1400" dirty="0">
+                <a:latin typeface="D2Coding" panose="020B0609020101020101" pitchFamily="49" charset="-127"/>
+                <a:ea typeface="D2Coding" panose="020B0609020101020101" pitchFamily="49" charset="-127"/>
+              </a:rPr>
+              <a:t>2. </a:t>
+            </a:r>
+            <a:r>
+              <a:rPr lang="ko-KR" altLang="en-US" sz="1400" dirty="0">
+                <a:latin typeface="D2Coding" panose="020B0609020101020101" pitchFamily="49" charset="-127"/>
+                <a:ea typeface="D2Coding" panose="020B0609020101020101" pitchFamily="49" charset="-127"/>
+              </a:rPr>
+              <a:t>텍스트 </a:t>
+            </a:r>
+            <a:r>
+              <a:rPr lang="ko-KR" altLang="en-US" sz="1400" dirty="0" err="1">
+                <a:latin typeface="D2Coding" panose="020B0609020101020101" pitchFamily="49" charset="-127"/>
+                <a:ea typeface="D2Coding" panose="020B0609020101020101" pitchFamily="49" charset="-127"/>
+              </a:rPr>
+              <a:t>전처리</a:t>
+            </a:r>
+            <a:endParaRPr lang="ko-KR" altLang="en-US" sz="1400" dirty="0">
+              <a:latin typeface="D2Coding" panose="020B0609020101020101" pitchFamily="49" charset="-127"/>
+              <a:ea typeface="D2Coding" panose="020B0609020101020101" pitchFamily="49" charset="-127"/>
+            </a:endParaRPr>
+          </a:p>
+          <a:p>
+            <a:r>
+              <a:rPr lang="en-US" altLang="ko-KR" sz="1400" dirty="0">
+                <a:latin typeface="D2Coding" panose="020B0609020101020101" pitchFamily="49" charset="-127"/>
+                <a:ea typeface="D2Coding" panose="020B0609020101020101" pitchFamily="49" charset="-127"/>
+              </a:rPr>
+              <a:t>tokenizer = </a:t>
+            </a:r>
+            <a:r>
+              <a:rPr lang="en-US" altLang="ko-KR" sz="1400" dirty="0" err="1">
+                <a:latin typeface="D2Coding" panose="020B0609020101020101" pitchFamily="49" charset="-127"/>
+                <a:ea typeface="D2Coding" panose="020B0609020101020101" pitchFamily="49" charset="-127"/>
+              </a:rPr>
+              <a:t>RegexpTokenizer</a:t>
+            </a:r>
+            <a:r>
+              <a:rPr lang="en-US" altLang="ko-KR" sz="1400" dirty="0">
+                <a:latin typeface="D2Coding" panose="020B0609020101020101" pitchFamily="49" charset="-127"/>
+                <a:ea typeface="D2Coding" panose="020B0609020101020101" pitchFamily="49" charset="-127"/>
+              </a:rPr>
+              <a:t>(r'\w+')</a:t>
+            </a:r>
+          </a:p>
+          <a:p>
+            <a:r>
+              <a:rPr lang="en-US" altLang="ko-KR" sz="1400" dirty="0" err="1">
+                <a:latin typeface="D2Coding" panose="020B0609020101020101" pitchFamily="49" charset="-127"/>
+                <a:ea typeface="D2Coding" panose="020B0609020101020101" pitchFamily="49" charset="-127"/>
+              </a:rPr>
+              <a:t>en_stopwords</a:t>
+            </a:r>
+            <a:r>
+              <a:rPr lang="en-US" altLang="ko-KR" sz="1400" dirty="0">
+                <a:latin typeface="D2Coding" panose="020B0609020101020101" pitchFamily="49" charset="-127"/>
+                <a:ea typeface="D2Coding" panose="020B0609020101020101" pitchFamily="49" charset="-127"/>
+              </a:rPr>
+              <a:t> = set(</a:t>
+            </a:r>
+            <a:r>
+              <a:rPr lang="en-US" altLang="ko-KR" sz="1400" dirty="0" err="1">
+                <a:latin typeface="D2Coding" panose="020B0609020101020101" pitchFamily="49" charset="-127"/>
+                <a:ea typeface="D2Coding" panose="020B0609020101020101" pitchFamily="49" charset="-127"/>
+              </a:rPr>
+              <a:t>stopwords.words</a:t>
+            </a:r>
+            <a:r>
+              <a:rPr lang="en-US" altLang="ko-KR" sz="1400" dirty="0">
+                <a:latin typeface="D2Coding" panose="020B0609020101020101" pitchFamily="49" charset="-127"/>
+                <a:ea typeface="D2Coding" panose="020B0609020101020101" pitchFamily="49" charset="-127"/>
+              </a:rPr>
+              <a:t>('</a:t>
+            </a:r>
+            <a:r>
+              <a:rPr lang="en-US" altLang="ko-KR" sz="1400" dirty="0" err="1">
+                <a:latin typeface="D2Coding" panose="020B0609020101020101" pitchFamily="49" charset="-127"/>
+                <a:ea typeface="D2Coding" panose="020B0609020101020101" pitchFamily="49" charset="-127"/>
+              </a:rPr>
+              <a:t>english</a:t>
+            </a:r>
+            <a:r>
+              <a:rPr lang="en-US" altLang="ko-KR" sz="1400" dirty="0">
+                <a:latin typeface="D2Coding" panose="020B0609020101020101" pitchFamily="49" charset="-127"/>
+                <a:ea typeface="D2Coding" panose="020B0609020101020101" pitchFamily="49" charset="-127"/>
+              </a:rPr>
+              <a:t>'))</a:t>
+            </a:r>
+          </a:p>
+          <a:p>
+            <a:endParaRPr lang="en-US" altLang="ko-KR" sz="1400" dirty="0">
+              <a:latin typeface="D2Coding" panose="020B0609020101020101" pitchFamily="49" charset="-127"/>
+              <a:ea typeface="D2Coding" panose="020B0609020101020101" pitchFamily="49" charset="-127"/>
+            </a:endParaRPr>
+          </a:p>
+          <a:p>
+            <a:r>
+              <a:rPr lang="en-US" altLang="ko-KR" sz="1400" dirty="0">
+                <a:latin typeface="D2Coding" panose="020B0609020101020101" pitchFamily="49" charset="-127"/>
+                <a:ea typeface="D2Coding" panose="020B0609020101020101" pitchFamily="49" charset="-127"/>
+              </a:rPr>
+              <a:t># </a:t>
+            </a:r>
+            <a:r>
+              <a:rPr lang="ko-KR" altLang="en-US" sz="1400" dirty="0">
+                <a:latin typeface="D2Coding" panose="020B0609020101020101" pitchFamily="49" charset="-127"/>
+                <a:ea typeface="D2Coding" panose="020B0609020101020101" pitchFamily="49" charset="-127"/>
+              </a:rPr>
+              <a:t>추가적인 무의미한 단어 필터링</a:t>
+            </a:r>
+          </a:p>
+          <a:p>
+            <a:r>
+              <a:rPr lang="en-US" altLang="ko-KR" sz="1400" dirty="0" err="1">
+                <a:latin typeface="D2Coding" panose="020B0609020101020101" pitchFamily="49" charset="-127"/>
+                <a:ea typeface="D2Coding" panose="020B0609020101020101" pitchFamily="49" charset="-127"/>
+              </a:rPr>
+              <a:t>add_stopwords</a:t>
+            </a:r>
+            <a:r>
+              <a:rPr lang="en-US" altLang="ko-KR" sz="1400" dirty="0">
+                <a:latin typeface="D2Coding" panose="020B0609020101020101" pitchFamily="49" charset="-127"/>
+                <a:ea typeface="D2Coding" panose="020B0609020101020101" pitchFamily="49" charset="-127"/>
+              </a:rPr>
+              <a:t> = {'ax', 'max', 'g9v', 'b8f', 'a86', 'pl', '145', '1d9', '0t', '34u'}</a:t>
+            </a:r>
+          </a:p>
+          <a:p>
+            <a:r>
+              <a:rPr lang="en-US" altLang="ko-KR" sz="1400" dirty="0" err="1">
+                <a:latin typeface="D2Coding" panose="020B0609020101020101" pitchFamily="49" charset="-127"/>
+                <a:ea typeface="D2Coding" panose="020B0609020101020101" pitchFamily="49" charset="-127"/>
+              </a:rPr>
+              <a:t>en_stopwords</a:t>
+            </a:r>
+            <a:r>
+              <a:rPr lang="en-US" altLang="ko-KR" sz="1400" dirty="0">
+                <a:latin typeface="D2Coding" panose="020B0609020101020101" pitchFamily="49" charset="-127"/>
+                <a:ea typeface="D2Coding" panose="020B0609020101020101" pitchFamily="49" charset="-127"/>
+              </a:rPr>
+              <a:t> = </a:t>
+            </a:r>
+            <a:r>
+              <a:rPr lang="en-US" altLang="ko-KR" sz="1400" dirty="0" err="1">
+                <a:latin typeface="D2Coding" panose="020B0609020101020101" pitchFamily="49" charset="-127"/>
+                <a:ea typeface="D2Coding" panose="020B0609020101020101" pitchFamily="49" charset="-127"/>
+              </a:rPr>
+              <a:t>en_stopwords.union</a:t>
+            </a:r>
+            <a:r>
+              <a:rPr lang="en-US" altLang="ko-KR" sz="1400" dirty="0">
+                <a:latin typeface="D2Coding" panose="020B0609020101020101" pitchFamily="49" charset="-127"/>
+                <a:ea typeface="D2Coding" panose="020B0609020101020101" pitchFamily="49" charset="-127"/>
+              </a:rPr>
+              <a:t>(</a:t>
+            </a:r>
+            <a:r>
+              <a:rPr lang="en-US" altLang="ko-KR" sz="1400" dirty="0" err="1">
+                <a:latin typeface="D2Coding" panose="020B0609020101020101" pitchFamily="49" charset="-127"/>
+                <a:ea typeface="D2Coding" panose="020B0609020101020101" pitchFamily="49" charset="-127"/>
+              </a:rPr>
+              <a:t>add_stopwords</a:t>
+            </a:r>
+            <a:r>
+              <a:rPr lang="en-US" altLang="ko-KR" sz="1400" dirty="0">
+                <a:latin typeface="D2Coding" panose="020B0609020101020101" pitchFamily="49" charset="-127"/>
+                <a:ea typeface="D2Coding" panose="020B0609020101020101" pitchFamily="49" charset="-127"/>
+              </a:rPr>
+              <a:t>)</a:t>
+            </a:r>
+          </a:p>
+          <a:p>
+            <a:endParaRPr lang="en-US" altLang="ko-KR" sz="1400" dirty="0">
+              <a:latin typeface="D2Coding" panose="020B0609020101020101" pitchFamily="49" charset="-127"/>
+              <a:ea typeface="D2Coding" panose="020B0609020101020101" pitchFamily="49" charset="-127"/>
+            </a:endParaRPr>
+          </a:p>
+          <a:p>
+            <a:r>
+              <a:rPr lang="en-US" altLang="ko-KR" sz="1400" dirty="0" err="1">
+                <a:latin typeface="D2Coding" panose="020B0609020101020101" pitchFamily="49" charset="-127"/>
+                <a:ea typeface="D2Coding" panose="020B0609020101020101" pitchFamily="49" charset="-127"/>
+              </a:rPr>
+              <a:t>processed_docs</a:t>
+            </a:r>
+            <a:r>
+              <a:rPr lang="en-US" altLang="ko-KR" sz="1400" dirty="0">
+                <a:latin typeface="D2Coding" panose="020B0609020101020101" pitchFamily="49" charset="-127"/>
+                <a:ea typeface="D2Coding" panose="020B0609020101020101" pitchFamily="49" charset="-127"/>
+              </a:rPr>
+              <a:t> = []</a:t>
+            </a:r>
+          </a:p>
+          <a:p>
+            <a:r>
+              <a:rPr lang="en-US" altLang="ko-KR" sz="1400" dirty="0">
+                <a:latin typeface="D2Coding" panose="020B0609020101020101" pitchFamily="49" charset="-127"/>
+                <a:ea typeface="D2Coding" panose="020B0609020101020101" pitchFamily="49" charset="-127"/>
+              </a:rPr>
+              <a:t>for doc in documents:</a:t>
+            </a:r>
+          </a:p>
+          <a:p>
+            <a:r>
+              <a:rPr lang="en-US" altLang="ko-KR" sz="1400" dirty="0">
+                <a:latin typeface="D2Coding" panose="020B0609020101020101" pitchFamily="49" charset="-127"/>
+                <a:ea typeface="D2Coding" panose="020B0609020101020101" pitchFamily="49" charset="-127"/>
+              </a:rPr>
+              <a:t>    # </a:t>
+            </a:r>
+            <a:r>
+              <a:rPr lang="ko-KR" altLang="en-US" sz="1400" dirty="0">
+                <a:latin typeface="D2Coding" panose="020B0609020101020101" pitchFamily="49" charset="-127"/>
+                <a:ea typeface="D2Coding" panose="020B0609020101020101" pitchFamily="49" charset="-127"/>
+              </a:rPr>
+              <a:t>소문자 변환 및 토큰화</a:t>
+            </a:r>
+          </a:p>
+          <a:p>
+            <a:r>
+              <a:rPr lang="ko-KR" altLang="en-US" sz="1400" dirty="0">
+                <a:latin typeface="D2Coding" panose="020B0609020101020101" pitchFamily="49" charset="-127"/>
+                <a:ea typeface="D2Coding" panose="020B0609020101020101" pitchFamily="49" charset="-127"/>
+              </a:rPr>
+              <a:t>    </a:t>
+            </a:r>
+            <a:r>
+              <a:rPr lang="en-US" altLang="ko-KR" sz="1400" dirty="0">
+                <a:latin typeface="D2Coding" panose="020B0609020101020101" pitchFamily="49" charset="-127"/>
+                <a:ea typeface="D2Coding" panose="020B0609020101020101" pitchFamily="49" charset="-127"/>
+              </a:rPr>
+              <a:t>tokens = </a:t>
+            </a:r>
+            <a:r>
+              <a:rPr lang="en-US" altLang="ko-KR" sz="1400" dirty="0" err="1">
+                <a:latin typeface="D2Coding" panose="020B0609020101020101" pitchFamily="49" charset="-127"/>
+                <a:ea typeface="D2Coding" panose="020B0609020101020101" pitchFamily="49" charset="-127"/>
+              </a:rPr>
+              <a:t>tokenizer.tokenize</a:t>
+            </a:r>
+            <a:r>
+              <a:rPr lang="en-US" altLang="ko-KR" sz="1400" dirty="0">
+                <a:latin typeface="D2Coding" panose="020B0609020101020101" pitchFamily="49" charset="-127"/>
+                <a:ea typeface="D2Coding" panose="020B0609020101020101" pitchFamily="49" charset="-127"/>
+              </a:rPr>
+              <a:t>(</a:t>
+            </a:r>
+            <a:r>
+              <a:rPr lang="en-US" altLang="ko-KR" sz="1400" dirty="0" err="1">
+                <a:latin typeface="D2Coding" panose="020B0609020101020101" pitchFamily="49" charset="-127"/>
+                <a:ea typeface="D2Coding" panose="020B0609020101020101" pitchFamily="49" charset="-127"/>
+              </a:rPr>
+              <a:t>doc.lower</a:t>
+            </a:r>
+            <a:r>
+              <a:rPr lang="en-US" altLang="ko-KR" sz="1400" dirty="0">
+                <a:latin typeface="D2Coding" panose="020B0609020101020101" pitchFamily="49" charset="-127"/>
+                <a:ea typeface="D2Coding" panose="020B0609020101020101" pitchFamily="49" charset="-127"/>
+              </a:rPr>
+              <a:t>())</a:t>
+            </a:r>
+          </a:p>
+          <a:p>
+            <a:r>
+              <a:rPr lang="en-US" altLang="ko-KR" sz="1400" dirty="0">
+                <a:latin typeface="D2Coding" panose="020B0609020101020101" pitchFamily="49" charset="-127"/>
+                <a:ea typeface="D2Coding" panose="020B0609020101020101" pitchFamily="49" charset="-127"/>
+              </a:rPr>
+              <a:t>    # </a:t>
+            </a:r>
+            <a:r>
+              <a:rPr lang="ko-KR" altLang="en-US" sz="1400" dirty="0" err="1">
+                <a:latin typeface="D2Coding" panose="020B0609020101020101" pitchFamily="49" charset="-127"/>
+                <a:ea typeface="D2Coding" panose="020B0609020101020101" pitchFamily="49" charset="-127"/>
+              </a:rPr>
+              <a:t>불용어</a:t>
+            </a:r>
+            <a:r>
+              <a:rPr lang="ko-KR" altLang="en-US" sz="1400" dirty="0">
+                <a:latin typeface="D2Coding" panose="020B0609020101020101" pitchFamily="49" charset="-127"/>
+                <a:ea typeface="D2Coding" panose="020B0609020101020101" pitchFamily="49" charset="-127"/>
+              </a:rPr>
+              <a:t> 제거 및 </a:t>
+            </a:r>
+            <a:r>
+              <a:rPr lang="en-US" altLang="ko-KR" sz="1400" dirty="0">
+                <a:latin typeface="D2Coding" panose="020B0609020101020101" pitchFamily="49" charset="-127"/>
+                <a:ea typeface="D2Coding" panose="020B0609020101020101" pitchFamily="49" charset="-127"/>
+              </a:rPr>
+              <a:t>3</a:t>
+            </a:r>
+            <a:r>
+              <a:rPr lang="ko-KR" altLang="en-US" sz="1400" dirty="0">
+                <a:latin typeface="D2Coding" panose="020B0609020101020101" pitchFamily="49" charset="-127"/>
+                <a:ea typeface="D2Coding" panose="020B0609020101020101" pitchFamily="49" charset="-127"/>
+              </a:rPr>
+              <a:t>글자 이상 단어만 유지 </a:t>
+            </a:r>
+            <a:r>
+              <a:rPr lang="en-US" altLang="ko-KR" sz="1400" dirty="0">
+                <a:latin typeface="D2Coding" panose="020B0609020101020101" pitchFamily="49" charset="-127"/>
+                <a:ea typeface="D2Coding" panose="020B0609020101020101" pitchFamily="49" charset="-127"/>
+              </a:rPr>
+              <a:t>(</a:t>
+            </a:r>
+            <a:r>
+              <a:rPr lang="ko-KR" altLang="en-US" sz="1400" dirty="0">
+                <a:latin typeface="D2Coding" panose="020B0609020101020101" pitchFamily="49" charset="-127"/>
+                <a:ea typeface="D2Coding" panose="020B0609020101020101" pitchFamily="49" charset="-127"/>
+              </a:rPr>
+              <a:t>숫자 제외</a:t>
+            </a:r>
+            <a:r>
+              <a:rPr lang="en-US" altLang="ko-KR" sz="1400" dirty="0">
+                <a:latin typeface="D2Coding" panose="020B0609020101020101" pitchFamily="49" charset="-127"/>
+                <a:ea typeface="D2Coding" panose="020B0609020101020101" pitchFamily="49" charset="-127"/>
+              </a:rPr>
+              <a:t>)</a:t>
+            </a:r>
+            <a:endParaRPr lang="ko-KR" altLang="en-US" sz="1400" dirty="0">
+              <a:latin typeface="D2Coding" panose="020B0609020101020101" pitchFamily="49" charset="-127"/>
+              <a:ea typeface="D2Coding" panose="020B0609020101020101" pitchFamily="49" charset="-127"/>
+            </a:endParaRPr>
+          </a:p>
+          <a:p>
+            <a:r>
+              <a:rPr lang="ko-KR" altLang="en-US" sz="1400" dirty="0">
+                <a:latin typeface="D2Coding" panose="020B0609020101020101" pitchFamily="49" charset="-127"/>
+                <a:ea typeface="D2Coding" panose="020B0609020101020101" pitchFamily="49" charset="-127"/>
+              </a:rPr>
+              <a:t>    </a:t>
+            </a:r>
+            <a:r>
+              <a:rPr lang="en-US" altLang="ko-KR" sz="1400" dirty="0" err="1">
+                <a:latin typeface="D2Coding" panose="020B0609020101020101" pitchFamily="49" charset="-127"/>
+                <a:ea typeface="D2Coding" panose="020B0609020101020101" pitchFamily="49" charset="-127"/>
+              </a:rPr>
+              <a:t>stopped_tokens</a:t>
+            </a:r>
+            <a:r>
+              <a:rPr lang="en-US" altLang="ko-KR" sz="1400" dirty="0">
+                <a:latin typeface="D2Coding" panose="020B0609020101020101" pitchFamily="49" charset="-127"/>
+                <a:ea typeface="D2Coding" panose="020B0609020101020101" pitchFamily="49" charset="-127"/>
+              </a:rPr>
+              <a:t> = [t for t in tokens if t not in </a:t>
+            </a:r>
+            <a:r>
+              <a:rPr lang="en-US" altLang="ko-KR" sz="1400" dirty="0" err="1">
+                <a:latin typeface="D2Coding" panose="020B0609020101020101" pitchFamily="49" charset="-127"/>
+                <a:ea typeface="D2Coding" panose="020B0609020101020101" pitchFamily="49" charset="-127"/>
+              </a:rPr>
+              <a:t>en_stopwords</a:t>
+            </a:r>
+            <a:r>
+              <a:rPr lang="en-US" altLang="ko-KR" sz="1400" dirty="0">
+                <a:latin typeface="D2Coding" panose="020B0609020101020101" pitchFamily="49" charset="-127"/>
+                <a:ea typeface="D2Coding" panose="020B0609020101020101" pitchFamily="49" charset="-127"/>
+              </a:rPr>
+              <a:t> and not </a:t>
+            </a:r>
+            <a:r>
+              <a:rPr lang="en-US" altLang="ko-KR" sz="1400" dirty="0" err="1">
+                <a:latin typeface="D2Coding" panose="020B0609020101020101" pitchFamily="49" charset="-127"/>
+                <a:ea typeface="D2Coding" panose="020B0609020101020101" pitchFamily="49" charset="-127"/>
+              </a:rPr>
+              <a:t>t.isdigit</a:t>
+            </a:r>
+            <a:r>
+              <a:rPr lang="en-US" altLang="ko-KR" sz="1400" dirty="0">
+                <a:latin typeface="D2Coding" panose="020B0609020101020101" pitchFamily="49" charset="-127"/>
+                <a:ea typeface="D2Coding" panose="020B0609020101020101" pitchFamily="49" charset="-127"/>
+              </a:rPr>
+              <a:t>() and </a:t>
+            </a:r>
+            <a:r>
+              <a:rPr lang="en-US" altLang="ko-KR" sz="1400" dirty="0" err="1">
+                <a:latin typeface="D2Coding" panose="020B0609020101020101" pitchFamily="49" charset="-127"/>
+                <a:ea typeface="D2Coding" panose="020B0609020101020101" pitchFamily="49" charset="-127"/>
+              </a:rPr>
+              <a:t>len</a:t>
+            </a:r>
+            <a:r>
+              <a:rPr lang="en-US" altLang="ko-KR" sz="1400" dirty="0">
+                <a:latin typeface="D2Coding" panose="020B0609020101020101" pitchFamily="49" charset="-127"/>
+                <a:ea typeface="D2Coding" panose="020B0609020101020101" pitchFamily="49" charset="-127"/>
+              </a:rPr>
+              <a:t>(t) &gt; 2]</a:t>
+            </a:r>
+          </a:p>
+          <a:p>
+            <a:r>
+              <a:rPr lang="en-US" altLang="ko-KR" sz="1400" dirty="0">
+                <a:latin typeface="D2Coding" panose="020B0609020101020101" pitchFamily="49" charset="-127"/>
+                <a:ea typeface="D2Coding" panose="020B0609020101020101" pitchFamily="49" charset="-127"/>
+              </a:rPr>
+              <a:t>    </a:t>
+            </a:r>
+            <a:r>
+              <a:rPr lang="en-US" altLang="ko-KR" sz="1400" dirty="0" err="1">
+                <a:latin typeface="D2Coding" panose="020B0609020101020101" pitchFamily="49" charset="-127"/>
+                <a:ea typeface="D2Coding" panose="020B0609020101020101" pitchFamily="49" charset="-127"/>
+              </a:rPr>
+              <a:t>processed_docs.append</a:t>
+            </a:r>
+            <a:r>
+              <a:rPr lang="en-US" altLang="ko-KR" sz="1400" dirty="0">
+                <a:latin typeface="D2Coding" panose="020B0609020101020101" pitchFamily="49" charset="-127"/>
+                <a:ea typeface="D2Coding" panose="020B0609020101020101" pitchFamily="49" charset="-127"/>
+              </a:rPr>
+              <a:t>(</a:t>
+            </a:r>
+            <a:r>
+              <a:rPr lang="en-US" altLang="ko-KR" sz="1400" dirty="0" err="1">
+                <a:latin typeface="D2Coding" panose="020B0609020101020101" pitchFamily="49" charset="-127"/>
+                <a:ea typeface="D2Coding" panose="020B0609020101020101" pitchFamily="49" charset="-127"/>
+              </a:rPr>
+              <a:t>stopped_tokens</a:t>
+            </a:r>
+            <a:r>
+              <a:rPr lang="en-US" altLang="ko-KR" sz="1400" dirty="0">
+                <a:latin typeface="D2Coding" panose="020B0609020101020101" pitchFamily="49" charset="-127"/>
+                <a:ea typeface="D2Coding" panose="020B0609020101020101" pitchFamily="49" charset="-127"/>
+              </a:rPr>
+              <a:t>)</a:t>
+            </a:r>
+          </a:p>
+          <a:p>
+            <a:endParaRPr lang="en-US" altLang="ko-KR" sz="1400" dirty="0">
+              <a:latin typeface="D2Coding" panose="020B0609020101020101" pitchFamily="49" charset="-127"/>
+              <a:ea typeface="D2Coding" panose="020B0609020101020101" pitchFamily="49" charset="-127"/>
+            </a:endParaRPr>
+          </a:p>
+          <a:p>
+            <a:r>
+              <a:rPr lang="en-US" altLang="ko-KR" sz="1400" dirty="0">
+                <a:latin typeface="D2Coding" panose="020B0609020101020101" pitchFamily="49" charset="-127"/>
+                <a:ea typeface="D2Coding" panose="020B0609020101020101" pitchFamily="49" charset="-127"/>
+              </a:rPr>
+              <a:t># Dictionary </a:t>
+            </a:r>
+            <a:r>
+              <a:rPr lang="ko-KR" altLang="en-US" sz="1400" dirty="0">
+                <a:latin typeface="D2Coding" panose="020B0609020101020101" pitchFamily="49" charset="-127"/>
+                <a:ea typeface="D2Coding" panose="020B0609020101020101" pitchFamily="49" charset="-127"/>
+              </a:rPr>
+              <a:t>및 </a:t>
+            </a:r>
+            <a:r>
+              <a:rPr lang="en-US" altLang="ko-KR" sz="1400" dirty="0">
+                <a:latin typeface="D2Coding" panose="020B0609020101020101" pitchFamily="49" charset="-127"/>
+                <a:ea typeface="D2Coding" panose="020B0609020101020101" pitchFamily="49" charset="-127"/>
+              </a:rPr>
+              <a:t>Corpus </a:t>
+            </a:r>
+            <a:r>
+              <a:rPr lang="ko-KR" altLang="en-US" sz="1400" dirty="0">
+                <a:latin typeface="D2Coding" panose="020B0609020101020101" pitchFamily="49" charset="-127"/>
+                <a:ea typeface="D2Coding" panose="020B0609020101020101" pitchFamily="49" charset="-127"/>
+              </a:rPr>
+              <a:t>생성</a:t>
+            </a:r>
+          </a:p>
+          <a:p>
+            <a:r>
+              <a:rPr lang="en-US" altLang="ko-KR" sz="1400" dirty="0">
+                <a:latin typeface="D2Coding" panose="020B0609020101020101" pitchFamily="49" charset="-127"/>
+                <a:ea typeface="D2Coding" panose="020B0609020101020101" pitchFamily="49" charset="-127"/>
+              </a:rPr>
+              <a:t>dictionary = </a:t>
+            </a:r>
+            <a:r>
+              <a:rPr lang="en-US" altLang="ko-KR" sz="1400" dirty="0" err="1">
+                <a:latin typeface="D2Coding" panose="020B0609020101020101" pitchFamily="49" charset="-127"/>
+                <a:ea typeface="D2Coding" panose="020B0609020101020101" pitchFamily="49" charset="-127"/>
+              </a:rPr>
+              <a:t>corpora.Dictionary</a:t>
+            </a:r>
+            <a:r>
+              <a:rPr lang="en-US" altLang="ko-KR" sz="1400" dirty="0">
+                <a:latin typeface="D2Coding" panose="020B0609020101020101" pitchFamily="49" charset="-127"/>
+                <a:ea typeface="D2Coding" panose="020B0609020101020101" pitchFamily="49" charset="-127"/>
+              </a:rPr>
+              <a:t>(</a:t>
+            </a:r>
+            <a:r>
+              <a:rPr lang="en-US" altLang="ko-KR" sz="1400" dirty="0" err="1">
+                <a:latin typeface="D2Coding" panose="020B0609020101020101" pitchFamily="49" charset="-127"/>
+                <a:ea typeface="D2Coding" panose="020B0609020101020101" pitchFamily="49" charset="-127"/>
+              </a:rPr>
+              <a:t>processed_docs</a:t>
+            </a:r>
+            <a:r>
+              <a:rPr lang="en-US" altLang="ko-KR" sz="1400" dirty="0">
+                <a:latin typeface="D2Coding" panose="020B0609020101020101" pitchFamily="49" charset="-127"/>
+                <a:ea typeface="D2Coding" panose="020B0609020101020101" pitchFamily="49" charset="-127"/>
+              </a:rPr>
+              <a:t>)</a:t>
+            </a:r>
+          </a:p>
+          <a:p>
+            <a:r>
+              <a:rPr lang="en-US" altLang="ko-KR" sz="1400" dirty="0">
+                <a:latin typeface="D2Coding" panose="020B0609020101020101" pitchFamily="49" charset="-127"/>
+                <a:ea typeface="D2Coding" panose="020B0609020101020101" pitchFamily="49" charset="-127"/>
+              </a:rPr>
+              <a:t># </a:t>
+            </a:r>
+            <a:r>
+              <a:rPr lang="ko-KR" altLang="en-US" sz="1400" dirty="0">
+                <a:latin typeface="D2Coding" panose="020B0609020101020101" pitchFamily="49" charset="-127"/>
+                <a:ea typeface="D2Coding" panose="020B0609020101020101" pitchFamily="49" charset="-127"/>
+              </a:rPr>
+              <a:t>지나치게 빈도가 낮거나 높은 단어 필터링 </a:t>
+            </a:r>
+            <a:r>
+              <a:rPr lang="en-US" altLang="ko-KR" sz="1400" dirty="0">
+                <a:latin typeface="D2Coding" panose="020B0609020101020101" pitchFamily="49" charset="-127"/>
+                <a:ea typeface="D2Coding" panose="020B0609020101020101" pitchFamily="49" charset="-127"/>
+              </a:rPr>
+              <a:t>(</a:t>
+            </a:r>
+            <a:r>
+              <a:rPr lang="ko-KR" altLang="en-US" sz="1400" dirty="0">
+                <a:latin typeface="D2Coding" panose="020B0609020101020101" pitchFamily="49" charset="-127"/>
+                <a:ea typeface="D2Coding" panose="020B0609020101020101" pitchFamily="49" charset="-127"/>
+              </a:rPr>
+              <a:t>품질 향상</a:t>
+            </a:r>
+            <a:r>
+              <a:rPr lang="en-US" altLang="ko-KR" sz="1400" dirty="0">
+                <a:latin typeface="D2Coding" panose="020B0609020101020101" pitchFamily="49" charset="-127"/>
+                <a:ea typeface="D2Coding" panose="020B0609020101020101" pitchFamily="49" charset="-127"/>
+              </a:rPr>
+              <a:t>)</a:t>
+            </a:r>
+            <a:endParaRPr lang="ko-KR" altLang="en-US" sz="1400" dirty="0">
+              <a:latin typeface="D2Coding" panose="020B0609020101020101" pitchFamily="49" charset="-127"/>
+              <a:ea typeface="D2Coding" panose="020B0609020101020101" pitchFamily="49" charset="-127"/>
+            </a:endParaRPr>
+          </a:p>
+          <a:p>
+            <a:r>
+              <a:rPr lang="en-US" altLang="ko-KR" sz="1400" dirty="0" err="1">
+                <a:latin typeface="D2Coding" panose="020B0609020101020101" pitchFamily="49" charset="-127"/>
+                <a:ea typeface="D2Coding" panose="020B0609020101020101" pitchFamily="49" charset="-127"/>
+              </a:rPr>
+              <a:t>dictionary.filter_extremes</a:t>
+            </a:r>
+            <a:r>
+              <a:rPr lang="en-US" altLang="ko-KR" sz="1400" dirty="0">
+                <a:latin typeface="D2Coding" panose="020B0609020101020101" pitchFamily="49" charset="-127"/>
+                <a:ea typeface="D2Coding" panose="020B0609020101020101" pitchFamily="49" charset="-127"/>
+              </a:rPr>
+              <a:t>(</a:t>
+            </a:r>
+            <a:r>
+              <a:rPr lang="en-US" altLang="ko-KR" sz="1400" dirty="0" err="1">
+                <a:latin typeface="D2Coding" panose="020B0609020101020101" pitchFamily="49" charset="-127"/>
+                <a:ea typeface="D2Coding" panose="020B0609020101020101" pitchFamily="49" charset="-127"/>
+              </a:rPr>
+              <a:t>no_below</a:t>
+            </a:r>
+            <a:r>
+              <a:rPr lang="en-US" altLang="ko-KR" sz="1400" dirty="0">
+                <a:latin typeface="D2Coding" panose="020B0609020101020101" pitchFamily="49" charset="-127"/>
+                <a:ea typeface="D2Coding" panose="020B0609020101020101" pitchFamily="49" charset="-127"/>
+              </a:rPr>
+              <a:t>=3, </a:t>
+            </a:r>
+            <a:r>
+              <a:rPr lang="en-US" altLang="ko-KR" sz="1400" dirty="0" err="1">
+                <a:latin typeface="D2Coding" panose="020B0609020101020101" pitchFamily="49" charset="-127"/>
+                <a:ea typeface="D2Coding" panose="020B0609020101020101" pitchFamily="49" charset="-127"/>
+              </a:rPr>
+              <a:t>no_above</a:t>
+            </a:r>
+            <a:r>
+              <a:rPr lang="en-US" altLang="ko-KR" sz="1400" dirty="0">
+                <a:latin typeface="D2Coding" panose="020B0609020101020101" pitchFamily="49" charset="-127"/>
+                <a:ea typeface="D2Coding" panose="020B0609020101020101" pitchFamily="49" charset="-127"/>
+              </a:rPr>
+              <a:t>=0.5)</a:t>
+            </a:r>
+          </a:p>
+          <a:p>
+            <a:r>
+              <a:rPr lang="en-US" altLang="ko-KR" sz="1400" dirty="0">
+                <a:latin typeface="D2Coding" panose="020B0609020101020101" pitchFamily="49" charset="-127"/>
+                <a:ea typeface="D2Coding" panose="020B0609020101020101" pitchFamily="49" charset="-127"/>
+              </a:rPr>
+              <a:t>corpus = [dictionary.doc2bow(text) for text in </a:t>
+            </a:r>
+            <a:r>
+              <a:rPr lang="en-US" altLang="ko-KR" sz="1400" dirty="0" err="1">
+                <a:latin typeface="D2Coding" panose="020B0609020101020101" pitchFamily="49" charset="-127"/>
+                <a:ea typeface="D2Coding" panose="020B0609020101020101" pitchFamily="49" charset="-127"/>
+              </a:rPr>
+              <a:t>processed_docs</a:t>
+            </a:r>
+            <a:r>
+              <a:rPr lang="en-US" altLang="ko-KR" sz="1400" dirty="0">
+                <a:latin typeface="D2Coding" panose="020B0609020101020101" pitchFamily="49" charset="-127"/>
+                <a:ea typeface="D2Coding" panose="020B0609020101020101" pitchFamily="49" charset="-127"/>
+              </a:rPr>
+              <a:t>]</a:t>
+            </a:r>
+          </a:p>
+        </p:txBody>
+      </p:sp>
+    </p:spTree>
+    <p:extLst>
+      <p:ext uri="{BB962C8B-B14F-4D97-AF65-F5344CB8AC3E}">
+        <p14:creationId xmlns:p14="http://schemas.microsoft.com/office/powerpoint/2010/main" val="3174470777"/>
+      </p:ext>
+    </p:extLst>
+  </p:cSld>
+  <p:clrMapOvr>
+    <a:masterClrMapping/>
+  </p:clrMapOvr>
+  <mc:AlternateContent xmlns:mc="http://schemas.openxmlformats.org/markup-compatibility/2006" xmlns:p14="http://schemas.microsoft.com/office/powerpoint/2010/main">
+    <mc:Choice Requires="p14">
+      <p:transition p14:dur="10"/>
+    </mc:Choice>
+    <mc:Fallback xmlns="">
+      <p:transition/>
+    </mc:Fallback>
+  </mc:AlternateContent>
+</p:sld>
+</file>
+
+<file path=ppt/slides/slide19.xml><?xml version="1.0" encoding="utf-8"?>
+<p:sld xmlns:a="http://schemas.openxmlformats.org/drawingml/2006/main" xmlns:r="http://schemas.openxmlformats.org/officeDocument/2006/relationships" xmlns:p="http://schemas.openxmlformats.org/presentationml/2006/main">
+  <p:cSld>
+    <p:spTree>
+      <p:nvGrpSpPr>
+        <p:cNvPr id="1" name="">
+          <a:extLst>
+            <a:ext uri="{FF2B5EF4-FFF2-40B4-BE49-F238E27FC236}">
+              <a16:creationId xmlns:a16="http://schemas.microsoft.com/office/drawing/2014/main" id="{BB48C933-4FF5-9C79-04B1-42F8AE8B81A1}"/>
+            </a:ext>
+          </a:extLst>
+        </p:cNvPr>
+        <p:cNvGrpSpPr/>
+        <p:nvPr/>
+      </p:nvGrpSpPr>
+      <p:grpSpPr>
+        <a:xfrm>
+          <a:off x="0" y="0"/>
+          <a:ext cx="0" cy="0"/>
+          <a:chOff x="0" y="0"/>
+          <a:chExt cx="0" cy="0"/>
+        </a:xfrm>
+      </p:grpSpPr>
+      <p:sp>
+        <p:nvSpPr>
+          <p:cNvPr id="8" name="제목 7">
+            <a:extLst>
+              <a:ext uri="{FF2B5EF4-FFF2-40B4-BE49-F238E27FC236}">
+                <a16:creationId xmlns:a16="http://schemas.microsoft.com/office/drawing/2014/main" id="{E59B65F1-9A7C-6CB2-D0D8-1F3BCE178443}"/>
+              </a:ext>
+            </a:extLst>
+          </p:cNvPr>
+          <p:cNvSpPr>
+            <a:spLocks noGrp="1"/>
+          </p:cNvSpPr>
+          <p:nvPr>
+            <p:ph type="title"/>
+          </p:nvPr>
+        </p:nvSpPr>
+        <p:spPr>
+          <a:xfrm>
+            <a:off x="521207" y="448056"/>
+            <a:ext cx="9727693" cy="640080"/>
+          </a:xfrm>
+        </p:spPr>
+        <p:txBody>
+          <a:bodyPr rtlCol="0">
+            <a:noAutofit/>
+          </a:bodyPr>
+          <a:lstStyle/>
+          <a:p>
+            <a:r>
+              <a:rPr lang="ko-KR" altLang="en-US" dirty="0">
+                <a:cs typeface="Segoe UI Light" panose="020B0502040204020203" pitchFamily="34" charset="0"/>
+              </a:rPr>
+              <a:t>토픽 모델링</a:t>
+            </a:r>
+            <a:r>
+              <a:rPr lang="en-US" altLang="ko-KR" dirty="0">
+                <a:cs typeface="Segoe UI Light" panose="020B0502040204020203" pitchFamily="34" charset="0"/>
+              </a:rPr>
+              <a:t>(Topic Modeling)</a:t>
+            </a:r>
+            <a:r>
+              <a:rPr lang="ko-KR" altLang="en-US" dirty="0">
+                <a:cs typeface="Segoe UI Light" panose="020B0502040204020203" pitchFamily="34" charset="0"/>
+              </a:rPr>
+              <a:t> 응용</a:t>
+            </a:r>
+          </a:p>
+        </p:txBody>
+      </p:sp>
+      <p:sp>
+        <p:nvSpPr>
+          <p:cNvPr id="12" name="슬라이드 번호 개체 틀 11">
+            <a:extLst>
+              <a:ext uri="{FF2B5EF4-FFF2-40B4-BE49-F238E27FC236}">
+                <a16:creationId xmlns:a16="http://schemas.microsoft.com/office/drawing/2014/main" id="{B83F56F4-DECE-9371-7DB4-1CDD9B4EDDA7}"/>
+              </a:ext>
+            </a:extLst>
+          </p:cNvPr>
+          <p:cNvSpPr>
+            <a:spLocks noGrp="1"/>
+          </p:cNvSpPr>
+          <p:nvPr>
+            <p:ph type="sldNum" sz="quarter" idx="4"/>
+          </p:nvPr>
+        </p:nvSpPr>
+        <p:spPr/>
+        <p:txBody>
+          <a:bodyPr/>
+          <a:lstStyle/>
+          <a:p>
+            <a:fld id="{9860EDB8-5305-433F-BE41-D7A86D811DB3}" type="slidenum">
+              <a:rPr lang="en-US" altLang="ko-KR" noProof="0" smtClean="0"/>
+              <a:pPr/>
+              <a:t>19</a:t>
+            </a:fld>
+            <a:endParaRPr lang="ko-KR" altLang="en-US" noProof="0"/>
+          </a:p>
+        </p:txBody>
+      </p:sp>
+      <p:pic>
+        <p:nvPicPr>
+          <p:cNvPr id="2" name="그림 1" descr="문자 메시지">
+            <a:extLst>
+              <a:ext uri="{FF2B5EF4-FFF2-40B4-BE49-F238E27FC236}">
+                <a16:creationId xmlns:a16="http://schemas.microsoft.com/office/drawing/2014/main" id="{8C2D0EAC-1453-6698-5957-86B4EFECD5C5}"/>
+              </a:ext>
+            </a:extLst>
+          </p:cNvPr>
+          <p:cNvPicPr>
+            <a:picLocks noChangeAspect="1"/>
+          </p:cNvPicPr>
+          <p:nvPr/>
+        </p:nvPicPr>
+        <p:blipFill>
+          <a:blip r:embed="rId3"/>
+          <a:stretch>
+            <a:fillRect/>
+          </a:stretch>
+        </p:blipFill>
+        <p:spPr>
+          <a:xfrm>
+            <a:off x="10668000" y="109220"/>
+            <a:ext cx="1397000" cy="1047750"/>
+          </a:xfrm>
+          <a:prstGeom prst="rect">
+            <a:avLst/>
+          </a:prstGeom>
+        </p:spPr>
+      </p:pic>
+      <p:sp>
+        <p:nvSpPr>
+          <p:cNvPr id="5" name="TextBox 4">
+            <a:extLst>
+              <a:ext uri="{FF2B5EF4-FFF2-40B4-BE49-F238E27FC236}">
+                <a16:creationId xmlns:a16="http://schemas.microsoft.com/office/drawing/2014/main" id="{C4AC099B-765A-584A-CA06-DE2989FA198F}"/>
+              </a:ext>
+            </a:extLst>
+          </p:cNvPr>
+          <p:cNvSpPr txBox="1"/>
+          <p:nvPr/>
+        </p:nvSpPr>
+        <p:spPr>
+          <a:xfrm>
+            <a:off x="590391" y="1768607"/>
+            <a:ext cx="11011218" cy="4832092"/>
+          </a:xfrm>
+          <a:prstGeom prst="rect">
+            <a:avLst/>
+          </a:prstGeom>
+          <a:solidFill>
+            <a:srgbClr val="00B0F0"/>
+          </a:solidFill>
+        </p:spPr>
+        <p:txBody>
+          <a:bodyPr wrap="square">
+            <a:spAutoFit/>
+          </a:bodyPr>
+          <a:lstStyle/>
+          <a:p>
+            <a:r>
+              <a:rPr lang="en-US" altLang="ko-KR" sz="1400" dirty="0">
+                <a:latin typeface="D2Coding" panose="020B0609020101020101" pitchFamily="49" charset="-127"/>
+                <a:ea typeface="D2Coding" panose="020B0609020101020101" pitchFamily="49" charset="-127"/>
+              </a:rPr>
+              <a:t># 3. </a:t>
+            </a:r>
+            <a:r>
+              <a:rPr lang="ko-KR" altLang="en-US" sz="1400" dirty="0">
+                <a:latin typeface="D2Coding" panose="020B0609020101020101" pitchFamily="49" charset="-127"/>
+                <a:ea typeface="D2Coding" panose="020B0609020101020101" pitchFamily="49" charset="-127"/>
+              </a:rPr>
+              <a:t>토픽 개수별</a:t>
+            </a:r>
+            <a:r>
+              <a:rPr lang="en-US" altLang="ko-KR" sz="1400" dirty="0">
+                <a:latin typeface="D2Coding" panose="020B0609020101020101" pitchFamily="49" charset="-127"/>
+                <a:ea typeface="D2Coding" panose="020B0609020101020101" pitchFamily="49" charset="-127"/>
+              </a:rPr>
+              <a:t>(3</a:t>
+            </a:r>
+            <a:r>
+              <a:rPr lang="ko-KR" altLang="en-US" sz="1400" dirty="0">
+                <a:latin typeface="D2Coding" panose="020B0609020101020101" pitchFamily="49" charset="-127"/>
+                <a:ea typeface="D2Coding" panose="020B0609020101020101" pitchFamily="49" charset="-127"/>
+              </a:rPr>
+              <a:t>개 </a:t>
+            </a:r>
+            <a:r>
+              <a:rPr lang="en-US" altLang="ko-KR" sz="1400" dirty="0">
+                <a:latin typeface="D2Coding" panose="020B0609020101020101" pitchFamily="49" charset="-127"/>
+                <a:ea typeface="D2Coding" panose="020B0609020101020101" pitchFamily="49" charset="-127"/>
+              </a:rPr>
+              <a:t>~ 7</a:t>
+            </a:r>
+            <a:r>
+              <a:rPr lang="ko-KR" altLang="en-US" sz="1400" dirty="0">
+                <a:latin typeface="D2Coding" panose="020B0609020101020101" pitchFamily="49" charset="-127"/>
+                <a:ea typeface="D2Coding" panose="020B0609020101020101" pitchFamily="49" charset="-127"/>
+              </a:rPr>
+              <a:t>개</a:t>
+            </a:r>
+            <a:r>
+              <a:rPr lang="en-US" altLang="ko-KR" sz="1400" dirty="0">
+                <a:latin typeface="D2Coding" panose="020B0609020101020101" pitchFamily="49" charset="-127"/>
+                <a:ea typeface="D2Coding" panose="020B0609020101020101" pitchFamily="49" charset="-127"/>
+              </a:rPr>
+              <a:t>) LDA </a:t>
+            </a:r>
+            <a:r>
+              <a:rPr lang="ko-KR" altLang="en-US" sz="1400" dirty="0">
+                <a:latin typeface="D2Coding" panose="020B0609020101020101" pitchFamily="49" charset="-127"/>
+                <a:ea typeface="D2Coding" panose="020B0609020101020101" pitchFamily="49" charset="-127"/>
+              </a:rPr>
+              <a:t>모델 학습 및 시각화 저장</a:t>
+            </a:r>
+            <a:endParaRPr lang="en-US" altLang="ko-KR" sz="1400" dirty="0">
+              <a:latin typeface="D2Coding" panose="020B0609020101020101" pitchFamily="49" charset="-127"/>
+              <a:ea typeface="D2Coding" panose="020B0609020101020101" pitchFamily="49" charset="-127"/>
+            </a:endParaRPr>
+          </a:p>
+          <a:p>
+            <a:endParaRPr lang="ko-KR" altLang="en-US" sz="1400" dirty="0">
+              <a:latin typeface="D2Coding" panose="020B0609020101020101" pitchFamily="49" charset="-127"/>
+              <a:ea typeface="D2Coding" panose="020B0609020101020101" pitchFamily="49" charset="-127"/>
+            </a:endParaRPr>
+          </a:p>
+          <a:p>
+            <a:r>
+              <a:rPr lang="en-US" altLang="ko-KR" sz="1400" dirty="0">
+                <a:latin typeface="D2Coding" panose="020B0609020101020101" pitchFamily="49" charset="-127"/>
+                <a:ea typeface="D2Coding" panose="020B0609020101020101" pitchFamily="49" charset="-127"/>
+              </a:rPr>
+              <a:t>for </a:t>
+            </a:r>
+            <a:r>
+              <a:rPr lang="en-US" altLang="ko-KR" sz="1400" dirty="0" err="1">
+                <a:latin typeface="D2Coding" panose="020B0609020101020101" pitchFamily="49" charset="-127"/>
+                <a:ea typeface="D2Coding" panose="020B0609020101020101" pitchFamily="49" charset="-127"/>
+              </a:rPr>
+              <a:t>num_topics</a:t>
+            </a:r>
+            <a:r>
+              <a:rPr lang="en-US" altLang="ko-KR" sz="1400" dirty="0">
+                <a:latin typeface="D2Coding" panose="020B0609020101020101" pitchFamily="49" charset="-127"/>
+                <a:ea typeface="D2Coding" panose="020B0609020101020101" pitchFamily="49" charset="-127"/>
+              </a:rPr>
+              <a:t> in range(3, 8):</a:t>
+            </a:r>
+          </a:p>
+          <a:p>
+            <a:r>
+              <a:rPr lang="en-US" altLang="ko-KR" sz="1400" dirty="0">
+                <a:latin typeface="D2Coding" panose="020B0609020101020101" pitchFamily="49" charset="-127"/>
+                <a:ea typeface="D2Coding" panose="020B0609020101020101" pitchFamily="49" charset="-127"/>
+              </a:rPr>
+              <a:t>    print(f"\n▶ </a:t>
+            </a:r>
+            <a:r>
+              <a:rPr lang="ko-KR" altLang="en-US" sz="1400" dirty="0">
+                <a:latin typeface="D2Coding" panose="020B0609020101020101" pitchFamily="49" charset="-127"/>
+                <a:ea typeface="D2Coding" panose="020B0609020101020101" pitchFamily="49" charset="-127"/>
+              </a:rPr>
+              <a:t>토픽 개수 </a:t>
+            </a:r>
+            <a:r>
+              <a:rPr lang="en-US" altLang="ko-KR" sz="1400" dirty="0">
+                <a:latin typeface="D2Coding" panose="020B0609020101020101" pitchFamily="49" charset="-127"/>
+                <a:ea typeface="D2Coding" panose="020B0609020101020101" pitchFamily="49" charset="-127"/>
+              </a:rPr>
+              <a:t>[{</a:t>
+            </a:r>
+            <a:r>
+              <a:rPr lang="en-US" altLang="ko-KR" sz="1400" dirty="0" err="1">
+                <a:latin typeface="D2Coding" panose="020B0609020101020101" pitchFamily="49" charset="-127"/>
+                <a:ea typeface="D2Coding" panose="020B0609020101020101" pitchFamily="49" charset="-127"/>
+              </a:rPr>
+              <a:t>num_topics</a:t>
+            </a:r>
+            <a:r>
+              <a:rPr lang="en-US" altLang="ko-KR" sz="1400" dirty="0">
+                <a:latin typeface="D2Coding" panose="020B0609020101020101" pitchFamily="49" charset="-127"/>
+                <a:ea typeface="D2Coding" panose="020B0609020101020101" pitchFamily="49" charset="-127"/>
+              </a:rPr>
+              <a:t>}</a:t>
+            </a:r>
+            <a:r>
+              <a:rPr lang="ko-KR" altLang="en-US" sz="1400" dirty="0">
+                <a:latin typeface="D2Coding" panose="020B0609020101020101" pitchFamily="49" charset="-127"/>
+                <a:ea typeface="D2Coding" panose="020B0609020101020101" pitchFamily="49" charset="-127"/>
+              </a:rPr>
+              <a:t>개</a:t>
+            </a:r>
+            <a:r>
+              <a:rPr lang="en-US" altLang="ko-KR" sz="1400" dirty="0">
+                <a:latin typeface="D2Coding" panose="020B0609020101020101" pitchFamily="49" charset="-127"/>
+                <a:ea typeface="D2Coding" panose="020B0609020101020101" pitchFamily="49" charset="-127"/>
+              </a:rPr>
+              <a:t>] </a:t>
+            </a:r>
+            <a:r>
+              <a:rPr lang="ko-KR" altLang="en-US" sz="1400" dirty="0">
+                <a:latin typeface="D2Coding" panose="020B0609020101020101" pitchFamily="49" charset="-127"/>
+                <a:ea typeface="D2Coding" panose="020B0609020101020101" pitchFamily="49" charset="-127"/>
+              </a:rPr>
+              <a:t>모델 학습 및 시각화 생성 중</a:t>
+            </a:r>
+            <a:r>
+              <a:rPr lang="en-US" altLang="ko-KR" sz="1400" dirty="0">
+                <a:latin typeface="D2Coding" panose="020B0609020101020101" pitchFamily="49" charset="-127"/>
+                <a:ea typeface="D2Coding" panose="020B0609020101020101" pitchFamily="49" charset="-127"/>
+              </a:rPr>
+              <a:t>...")</a:t>
+            </a:r>
+            <a:endParaRPr lang="ko-KR" altLang="en-US" sz="1400" dirty="0">
+              <a:latin typeface="D2Coding" panose="020B0609020101020101" pitchFamily="49" charset="-127"/>
+              <a:ea typeface="D2Coding" panose="020B0609020101020101" pitchFamily="49" charset="-127"/>
+            </a:endParaRPr>
+          </a:p>
+          <a:p>
+            <a:r>
+              <a:rPr lang="ko-KR" altLang="en-US" sz="1400" dirty="0">
+                <a:latin typeface="D2Coding" panose="020B0609020101020101" pitchFamily="49" charset="-127"/>
+                <a:ea typeface="D2Coding" panose="020B0609020101020101" pitchFamily="49" charset="-127"/>
+              </a:rPr>
+              <a:t>    </a:t>
+            </a:r>
+            <a:r>
+              <a:rPr lang="en-US" altLang="ko-KR" sz="1400" dirty="0">
+                <a:latin typeface="D2Coding" panose="020B0609020101020101" pitchFamily="49" charset="-127"/>
+                <a:ea typeface="D2Coding" panose="020B0609020101020101" pitchFamily="49" charset="-127"/>
+              </a:rPr>
+              <a:t># LDA </a:t>
+            </a:r>
+            <a:r>
+              <a:rPr lang="ko-KR" altLang="en-US" sz="1400" dirty="0">
+                <a:latin typeface="D2Coding" panose="020B0609020101020101" pitchFamily="49" charset="-127"/>
+                <a:ea typeface="D2Coding" panose="020B0609020101020101" pitchFamily="49" charset="-127"/>
+              </a:rPr>
+              <a:t>모델 학습</a:t>
+            </a:r>
+          </a:p>
+          <a:p>
+            <a:r>
+              <a:rPr lang="ko-KR" altLang="en-US" sz="1400" dirty="0">
+                <a:latin typeface="D2Coding" panose="020B0609020101020101" pitchFamily="49" charset="-127"/>
+                <a:ea typeface="D2Coding" panose="020B0609020101020101" pitchFamily="49" charset="-127"/>
+              </a:rPr>
+              <a:t>    </a:t>
+            </a:r>
+            <a:r>
+              <a:rPr lang="en-US" altLang="ko-KR" sz="1400" dirty="0" err="1">
+                <a:latin typeface="D2Coding" panose="020B0609020101020101" pitchFamily="49" charset="-127"/>
+                <a:ea typeface="D2Coding" panose="020B0609020101020101" pitchFamily="49" charset="-127"/>
+              </a:rPr>
+              <a:t>lda_model</a:t>
+            </a:r>
+            <a:r>
+              <a:rPr lang="en-US" altLang="ko-KR" sz="1400" dirty="0">
+                <a:latin typeface="D2Coding" panose="020B0609020101020101" pitchFamily="49" charset="-127"/>
+                <a:ea typeface="D2Coding" panose="020B0609020101020101" pitchFamily="49" charset="-127"/>
+              </a:rPr>
+              <a:t> = </a:t>
+            </a:r>
+            <a:r>
+              <a:rPr lang="en-US" altLang="ko-KR" sz="1400" dirty="0" err="1">
+                <a:latin typeface="D2Coding" panose="020B0609020101020101" pitchFamily="49" charset="-127"/>
+                <a:ea typeface="D2Coding" panose="020B0609020101020101" pitchFamily="49" charset="-127"/>
+              </a:rPr>
+              <a:t>LdaModel</a:t>
+            </a:r>
+            <a:r>
+              <a:rPr lang="en-US" altLang="ko-KR" sz="1400" dirty="0">
+                <a:latin typeface="D2Coding" panose="020B0609020101020101" pitchFamily="49" charset="-127"/>
+                <a:ea typeface="D2Coding" panose="020B0609020101020101" pitchFamily="49" charset="-127"/>
+              </a:rPr>
+              <a:t>(</a:t>
+            </a:r>
+          </a:p>
+          <a:p>
+            <a:r>
+              <a:rPr lang="en-US" altLang="ko-KR" sz="1400" dirty="0">
+                <a:latin typeface="D2Coding" panose="020B0609020101020101" pitchFamily="49" charset="-127"/>
+                <a:ea typeface="D2Coding" panose="020B0609020101020101" pitchFamily="49" charset="-127"/>
+              </a:rPr>
+              <a:t>        corpus=corpus,</a:t>
+            </a:r>
+          </a:p>
+          <a:p>
+            <a:r>
+              <a:rPr lang="en-US" altLang="ko-KR" sz="1400" dirty="0">
+                <a:latin typeface="D2Coding" panose="020B0609020101020101" pitchFamily="49" charset="-127"/>
+                <a:ea typeface="D2Coding" panose="020B0609020101020101" pitchFamily="49" charset="-127"/>
+              </a:rPr>
+              <a:t>        id2word=dictionary,</a:t>
+            </a:r>
+          </a:p>
+          <a:p>
+            <a:r>
+              <a:rPr lang="en-US" altLang="ko-KR" sz="1400" dirty="0">
+                <a:latin typeface="D2Coding" panose="020B0609020101020101" pitchFamily="49" charset="-127"/>
+                <a:ea typeface="D2Coding" panose="020B0609020101020101" pitchFamily="49" charset="-127"/>
+              </a:rPr>
+              <a:t>        </a:t>
+            </a:r>
+            <a:r>
+              <a:rPr lang="en-US" altLang="ko-KR" sz="1400" dirty="0" err="1">
+                <a:latin typeface="D2Coding" panose="020B0609020101020101" pitchFamily="49" charset="-127"/>
+                <a:ea typeface="D2Coding" panose="020B0609020101020101" pitchFamily="49" charset="-127"/>
+              </a:rPr>
+              <a:t>num_topics</a:t>
+            </a:r>
+            <a:r>
+              <a:rPr lang="en-US" altLang="ko-KR" sz="1400" dirty="0">
+                <a:latin typeface="D2Coding" panose="020B0609020101020101" pitchFamily="49" charset="-127"/>
+                <a:ea typeface="D2Coding" panose="020B0609020101020101" pitchFamily="49" charset="-127"/>
+              </a:rPr>
+              <a:t>=</a:t>
+            </a:r>
+            <a:r>
+              <a:rPr lang="en-US" altLang="ko-KR" sz="1400" dirty="0" err="1">
+                <a:latin typeface="D2Coding" panose="020B0609020101020101" pitchFamily="49" charset="-127"/>
+                <a:ea typeface="D2Coding" panose="020B0609020101020101" pitchFamily="49" charset="-127"/>
+              </a:rPr>
+              <a:t>num_topics</a:t>
+            </a:r>
+            <a:r>
+              <a:rPr lang="en-US" altLang="ko-KR" sz="1400" dirty="0">
+                <a:latin typeface="D2Coding" panose="020B0609020101020101" pitchFamily="49" charset="-127"/>
+                <a:ea typeface="D2Coding" panose="020B0609020101020101" pitchFamily="49" charset="-127"/>
+              </a:rPr>
+              <a:t>,</a:t>
+            </a:r>
+          </a:p>
+          <a:p>
+            <a:r>
+              <a:rPr lang="en-US" altLang="ko-KR" sz="1400" dirty="0">
+                <a:latin typeface="D2Coding" panose="020B0609020101020101" pitchFamily="49" charset="-127"/>
+                <a:ea typeface="D2Coding" panose="020B0609020101020101" pitchFamily="49" charset="-127"/>
+              </a:rPr>
+              <a:t>        </a:t>
+            </a:r>
+            <a:r>
+              <a:rPr lang="en-US" altLang="ko-KR" sz="1400" dirty="0" err="1">
+                <a:latin typeface="D2Coding" panose="020B0609020101020101" pitchFamily="49" charset="-127"/>
+                <a:ea typeface="D2Coding" panose="020B0609020101020101" pitchFamily="49" charset="-127"/>
+              </a:rPr>
+              <a:t>random_state</a:t>
+            </a:r>
+            <a:r>
+              <a:rPr lang="en-US" altLang="ko-KR" sz="1400" dirty="0">
+                <a:latin typeface="D2Coding" panose="020B0609020101020101" pitchFamily="49" charset="-127"/>
+                <a:ea typeface="D2Coding" panose="020B0609020101020101" pitchFamily="49" charset="-127"/>
+              </a:rPr>
+              <a:t>=100,</a:t>
+            </a:r>
+          </a:p>
+          <a:p>
+            <a:r>
+              <a:rPr lang="en-US" altLang="ko-KR" sz="1400" dirty="0">
+                <a:latin typeface="D2Coding" panose="020B0609020101020101" pitchFamily="49" charset="-127"/>
+                <a:ea typeface="D2Coding" panose="020B0609020101020101" pitchFamily="49" charset="-127"/>
+              </a:rPr>
+              <a:t>        </a:t>
+            </a:r>
+            <a:r>
+              <a:rPr lang="en-US" altLang="ko-KR" sz="1400" dirty="0" err="1">
+                <a:latin typeface="D2Coding" panose="020B0609020101020101" pitchFamily="49" charset="-127"/>
+                <a:ea typeface="D2Coding" panose="020B0609020101020101" pitchFamily="49" charset="-127"/>
+              </a:rPr>
+              <a:t>update_every</a:t>
+            </a:r>
+            <a:r>
+              <a:rPr lang="en-US" altLang="ko-KR" sz="1400" dirty="0">
+                <a:latin typeface="D2Coding" panose="020B0609020101020101" pitchFamily="49" charset="-127"/>
+                <a:ea typeface="D2Coding" panose="020B0609020101020101" pitchFamily="49" charset="-127"/>
+              </a:rPr>
+              <a:t>=1,</a:t>
+            </a:r>
+          </a:p>
+          <a:p>
+            <a:r>
+              <a:rPr lang="en-US" altLang="ko-KR" sz="1400" dirty="0">
+                <a:latin typeface="D2Coding" panose="020B0609020101020101" pitchFamily="49" charset="-127"/>
+                <a:ea typeface="D2Coding" panose="020B0609020101020101" pitchFamily="49" charset="-127"/>
+              </a:rPr>
+              <a:t>        </a:t>
+            </a:r>
+            <a:r>
+              <a:rPr lang="en-US" altLang="ko-KR" sz="1400" dirty="0" err="1">
+                <a:latin typeface="D2Coding" panose="020B0609020101020101" pitchFamily="49" charset="-127"/>
+                <a:ea typeface="D2Coding" panose="020B0609020101020101" pitchFamily="49" charset="-127"/>
+              </a:rPr>
+              <a:t>chunksize</a:t>
+            </a:r>
+            <a:r>
+              <a:rPr lang="en-US" altLang="ko-KR" sz="1400" dirty="0">
+                <a:latin typeface="D2Coding" panose="020B0609020101020101" pitchFamily="49" charset="-127"/>
+                <a:ea typeface="D2Coding" panose="020B0609020101020101" pitchFamily="49" charset="-127"/>
+              </a:rPr>
+              <a:t>=100,</a:t>
+            </a:r>
+          </a:p>
+          <a:p>
+            <a:r>
+              <a:rPr lang="en-US" altLang="ko-KR" sz="1400" dirty="0">
+                <a:latin typeface="D2Coding" panose="020B0609020101020101" pitchFamily="49" charset="-127"/>
+                <a:ea typeface="D2Coding" panose="020B0609020101020101" pitchFamily="49" charset="-127"/>
+              </a:rPr>
+              <a:t>        passes=10,</a:t>
+            </a:r>
+          </a:p>
+          <a:p>
+            <a:r>
+              <a:rPr lang="en-US" altLang="ko-KR" sz="1400" dirty="0">
+                <a:latin typeface="D2Coding" panose="020B0609020101020101" pitchFamily="49" charset="-127"/>
+                <a:ea typeface="D2Coding" panose="020B0609020101020101" pitchFamily="49" charset="-127"/>
+              </a:rPr>
+              <a:t>        alpha='auto',</a:t>
+            </a:r>
+          </a:p>
+          <a:p>
+            <a:r>
+              <a:rPr lang="en-US" altLang="ko-KR" sz="1400" dirty="0">
+                <a:latin typeface="D2Coding" panose="020B0609020101020101" pitchFamily="49" charset="-127"/>
+                <a:ea typeface="D2Coding" panose="020B0609020101020101" pitchFamily="49" charset="-127"/>
+              </a:rPr>
+              <a:t>        </a:t>
+            </a:r>
+            <a:r>
+              <a:rPr lang="en-US" altLang="ko-KR" sz="1400" dirty="0" err="1">
+                <a:latin typeface="D2Coding" panose="020B0609020101020101" pitchFamily="49" charset="-127"/>
+                <a:ea typeface="D2Coding" panose="020B0609020101020101" pitchFamily="49" charset="-127"/>
+              </a:rPr>
+              <a:t>per_word_topics</a:t>
+            </a:r>
+            <a:r>
+              <a:rPr lang="en-US" altLang="ko-KR" sz="1400" dirty="0">
+                <a:latin typeface="D2Coding" panose="020B0609020101020101" pitchFamily="49" charset="-127"/>
+                <a:ea typeface="D2Coding" panose="020B0609020101020101" pitchFamily="49" charset="-127"/>
+              </a:rPr>
+              <a:t>=True</a:t>
+            </a:r>
+          </a:p>
+          <a:p>
+            <a:r>
+              <a:rPr lang="en-US" altLang="ko-KR" sz="1400" dirty="0">
+                <a:latin typeface="D2Coding" panose="020B0609020101020101" pitchFamily="49" charset="-127"/>
+                <a:ea typeface="D2Coding" panose="020B0609020101020101" pitchFamily="49" charset="-127"/>
+              </a:rPr>
+              <a:t>    )</a:t>
+            </a:r>
+          </a:p>
+          <a:p>
+            <a:r>
+              <a:rPr lang="en-US" altLang="ko-KR" sz="1400" dirty="0">
+                <a:latin typeface="D2Coding" panose="020B0609020101020101" pitchFamily="49" charset="-127"/>
+                <a:ea typeface="D2Coding" panose="020B0609020101020101" pitchFamily="49" charset="-127"/>
+              </a:rPr>
+              <a:t>    # </a:t>
+            </a:r>
+            <a:r>
+              <a:rPr lang="en-US" altLang="ko-KR" sz="1400" dirty="0" err="1">
+                <a:latin typeface="D2Coding" panose="020B0609020101020101" pitchFamily="49" charset="-127"/>
+                <a:ea typeface="D2Coding" panose="020B0609020101020101" pitchFamily="49" charset="-127"/>
+              </a:rPr>
+              <a:t>pyLDAvis</a:t>
+            </a:r>
+            <a:r>
+              <a:rPr lang="en-US" altLang="ko-KR" sz="1400" dirty="0">
+                <a:latin typeface="D2Coding" panose="020B0609020101020101" pitchFamily="49" charset="-127"/>
+                <a:ea typeface="D2Coding" panose="020B0609020101020101" pitchFamily="49" charset="-127"/>
+              </a:rPr>
+              <a:t> </a:t>
+            </a:r>
+            <a:r>
+              <a:rPr lang="ko-KR" altLang="en-US" sz="1400" dirty="0">
+                <a:latin typeface="D2Coding" panose="020B0609020101020101" pitchFamily="49" charset="-127"/>
+                <a:ea typeface="D2Coding" panose="020B0609020101020101" pitchFamily="49" charset="-127"/>
+              </a:rPr>
+              <a:t>준비</a:t>
+            </a:r>
+          </a:p>
+          <a:p>
+            <a:r>
+              <a:rPr lang="ko-KR" altLang="en-US" sz="1400" dirty="0">
+                <a:latin typeface="D2Coding" panose="020B0609020101020101" pitchFamily="49" charset="-127"/>
+                <a:ea typeface="D2Coding" panose="020B0609020101020101" pitchFamily="49" charset="-127"/>
+              </a:rPr>
+              <a:t>    </a:t>
+            </a:r>
+            <a:r>
+              <a:rPr lang="en-US" altLang="ko-KR" sz="1400" dirty="0" err="1">
+                <a:latin typeface="D2Coding" panose="020B0609020101020101" pitchFamily="49" charset="-127"/>
+                <a:ea typeface="D2Coding" panose="020B0609020101020101" pitchFamily="49" charset="-127"/>
+              </a:rPr>
+              <a:t>vis_data</a:t>
+            </a:r>
+            <a:r>
+              <a:rPr lang="en-US" altLang="ko-KR" sz="1400" dirty="0">
+                <a:latin typeface="D2Coding" panose="020B0609020101020101" pitchFamily="49" charset="-127"/>
+                <a:ea typeface="D2Coding" panose="020B0609020101020101" pitchFamily="49" charset="-127"/>
+              </a:rPr>
+              <a:t> = </a:t>
+            </a:r>
+            <a:r>
+              <a:rPr lang="en-US" altLang="ko-KR" sz="1400" dirty="0" err="1">
+                <a:latin typeface="D2Coding" panose="020B0609020101020101" pitchFamily="49" charset="-127"/>
+                <a:ea typeface="D2Coding" panose="020B0609020101020101" pitchFamily="49" charset="-127"/>
+              </a:rPr>
+              <a:t>gensimvis.prepare</a:t>
+            </a:r>
+            <a:r>
+              <a:rPr lang="en-US" altLang="ko-KR" sz="1400" dirty="0">
+                <a:latin typeface="D2Coding" panose="020B0609020101020101" pitchFamily="49" charset="-127"/>
+                <a:ea typeface="D2Coding" panose="020B0609020101020101" pitchFamily="49" charset="-127"/>
+              </a:rPr>
+              <a:t>(</a:t>
+            </a:r>
+            <a:r>
+              <a:rPr lang="en-US" altLang="ko-KR" sz="1400" dirty="0" err="1">
+                <a:latin typeface="D2Coding" panose="020B0609020101020101" pitchFamily="49" charset="-127"/>
+                <a:ea typeface="D2Coding" panose="020B0609020101020101" pitchFamily="49" charset="-127"/>
+              </a:rPr>
+              <a:t>lda_model</a:t>
+            </a:r>
+            <a:r>
+              <a:rPr lang="en-US" altLang="ko-KR" sz="1400" dirty="0">
+                <a:latin typeface="D2Coding" panose="020B0609020101020101" pitchFamily="49" charset="-127"/>
+                <a:ea typeface="D2Coding" panose="020B0609020101020101" pitchFamily="49" charset="-127"/>
+              </a:rPr>
+              <a:t>, corpus, dictionary, </a:t>
+            </a:r>
+            <a:r>
+              <a:rPr lang="en-US" altLang="ko-KR" sz="1400" dirty="0" err="1">
+                <a:latin typeface="D2Coding" panose="020B0609020101020101" pitchFamily="49" charset="-127"/>
+                <a:ea typeface="D2Coding" panose="020B0609020101020101" pitchFamily="49" charset="-127"/>
+              </a:rPr>
+              <a:t>sort_topics</a:t>
+            </a:r>
+            <a:r>
+              <a:rPr lang="en-US" altLang="ko-KR" sz="1400" dirty="0">
+                <a:latin typeface="D2Coding" panose="020B0609020101020101" pitchFamily="49" charset="-127"/>
+                <a:ea typeface="D2Coding" panose="020B0609020101020101" pitchFamily="49" charset="-127"/>
+              </a:rPr>
+              <a:t>=False)</a:t>
+            </a:r>
+          </a:p>
+          <a:p>
+            <a:endParaRPr lang="en-US" altLang="ko-KR" sz="1400" dirty="0">
+              <a:latin typeface="D2Coding" panose="020B0609020101020101" pitchFamily="49" charset="-127"/>
+              <a:ea typeface="D2Coding" panose="020B0609020101020101" pitchFamily="49" charset="-127"/>
+            </a:endParaRPr>
+          </a:p>
+          <a:p>
+            <a:r>
+              <a:rPr lang="en-US" altLang="ko-KR" sz="1400" dirty="0">
+                <a:latin typeface="D2Coding" panose="020B0609020101020101" pitchFamily="49" charset="-127"/>
+                <a:ea typeface="D2Coding" panose="020B0609020101020101" pitchFamily="49" charset="-127"/>
+              </a:rPr>
+              <a:t>    # HTML </a:t>
+            </a:r>
+            <a:r>
+              <a:rPr lang="ko-KR" altLang="en-US" sz="1400" dirty="0">
+                <a:latin typeface="D2Coding" panose="020B0609020101020101" pitchFamily="49" charset="-127"/>
+                <a:ea typeface="D2Coding" panose="020B0609020101020101" pitchFamily="49" charset="-127"/>
+              </a:rPr>
+              <a:t>파일로 저장</a:t>
+            </a:r>
+          </a:p>
+          <a:p>
+            <a:r>
+              <a:rPr lang="ko-KR" altLang="en-US" sz="1400" dirty="0">
+                <a:latin typeface="D2Coding" panose="020B0609020101020101" pitchFamily="49" charset="-127"/>
+                <a:ea typeface="D2Coding" panose="020B0609020101020101" pitchFamily="49" charset="-127"/>
+              </a:rPr>
+              <a:t>    </a:t>
+            </a:r>
+            <a:r>
+              <a:rPr lang="en-US" altLang="ko-KR" sz="1400" dirty="0" err="1">
+                <a:latin typeface="D2Coding" panose="020B0609020101020101" pitchFamily="49" charset="-127"/>
+                <a:ea typeface="D2Coding" panose="020B0609020101020101" pitchFamily="49" charset="-127"/>
+              </a:rPr>
+              <a:t>file_name</a:t>
+            </a:r>
+            <a:r>
+              <a:rPr lang="en-US" altLang="ko-KR" sz="1400" dirty="0">
+                <a:latin typeface="D2Coding" panose="020B0609020101020101" pitchFamily="49" charset="-127"/>
+                <a:ea typeface="D2Coding" panose="020B0609020101020101" pitchFamily="49" charset="-127"/>
+              </a:rPr>
+              <a:t> = </a:t>
+            </a:r>
+            <a:r>
+              <a:rPr lang="en-US" altLang="ko-KR" sz="1400" dirty="0" err="1">
+                <a:latin typeface="D2Coding" panose="020B0609020101020101" pitchFamily="49" charset="-127"/>
+                <a:ea typeface="D2Coding" panose="020B0609020101020101" pitchFamily="49" charset="-127"/>
+              </a:rPr>
+              <a:t>f'lda_vis</a:t>
+            </a:r>
+            <a:r>
+              <a:rPr lang="en-US" altLang="ko-KR" sz="1400" dirty="0">
+                <a:latin typeface="D2Coding" panose="020B0609020101020101" pitchFamily="49" charset="-127"/>
+                <a:ea typeface="D2Coding" panose="020B0609020101020101" pitchFamily="49" charset="-127"/>
+              </a:rPr>
+              <a:t>_{</a:t>
+            </a:r>
+            <a:r>
+              <a:rPr lang="en-US" altLang="ko-KR" sz="1400" dirty="0" err="1">
+                <a:latin typeface="D2Coding" panose="020B0609020101020101" pitchFamily="49" charset="-127"/>
+                <a:ea typeface="D2Coding" panose="020B0609020101020101" pitchFamily="49" charset="-127"/>
+              </a:rPr>
+              <a:t>num_topics</a:t>
+            </a:r>
+            <a:r>
+              <a:rPr lang="en-US" altLang="ko-KR" sz="1400" dirty="0">
+                <a:latin typeface="D2Coding" panose="020B0609020101020101" pitchFamily="49" charset="-127"/>
+                <a:ea typeface="D2Coding" panose="020B0609020101020101" pitchFamily="49" charset="-127"/>
+              </a:rPr>
+              <a:t>}_topics.html'</a:t>
+            </a:r>
+          </a:p>
+          <a:p>
+            <a:r>
+              <a:rPr lang="en-US" altLang="ko-KR" sz="1400" dirty="0">
+                <a:latin typeface="D2Coding" panose="020B0609020101020101" pitchFamily="49" charset="-127"/>
+                <a:ea typeface="D2Coding" panose="020B0609020101020101" pitchFamily="49" charset="-127"/>
+              </a:rPr>
+              <a:t>    </a:t>
+            </a:r>
+            <a:r>
+              <a:rPr lang="en-US" altLang="ko-KR" sz="1400" dirty="0" err="1">
+                <a:latin typeface="D2Coding" panose="020B0609020101020101" pitchFamily="49" charset="-127"/>
+                <a:ea typeface="D2Coding" panose="020B0609020101020101" pitchFamily="49" charset="-127"/>
+              </a:rPr>
+              <a:t>pyLDAvis.save_html</a:t>
+            </a:r>
+            <a:r>
+              <a:rPr lang="en-US" altLang="ko-KR" sz="1400" dirty="0">
+                <a:latin typeface="D2Coding" panose="020B0609020101020101" pitchFamily="49" charset="-127"/>
+                <a:ea typeface="D2Coding" panose="020B0609020101020101" pitchFamily="49" charset="-127"/>
+              </a:rPr>
+              <a:t>(</a:t>
+            </a:r>
+            <a:r>
+              <a:rPr lang="en-US" altLang="ko-KR" sz="1400" dirty="0" err="1">
+                <a:latin typeface="D2Coding" panose="020B0609020101020101" pitchFamily="49" charset="-127"/>
+                <a:ea typeface="D2Coding" panose="020B0609020101020101" pitchFamily="49" charset="-127"/>
+              </a:rPr>
+              <a:t>vis_data</a:t>
+            </a:r>
+            <a:r>
+              <a:rPr lang="en-US" altLang="ko-KR" sz="1400" dirty="0">
+                <a:latin typeface="D2Coding" panose="020B0609020101020101" pitchFamily="49" charset="-127"/>
+                <a:ea typeface="D2Coding" panose="020B0609020101020101" pitchFamily="49" charset="-127"/>
+              </a:rPr>
+              <a:t>, </a:t>
+            </a:r>
+            <a:r>
+              <a:rPr lang="en-US" altLang="ko-KR" sz="1400" dirty="0" err="1">
+                <a:latin typeface="D2Coding" panose="020B0609020101020101" pitchFamily="49" charset="-127"/>
+                <a:ea typeface="D2Coding" panose="020B0609020101020101" pitchFamily="49" charset="-127"/>
+              </a:rPr>
+              <a:t>file_name</a:t>
+            </a:r>
+            <a:r>
+              <a:rPr lang="en-US" altLang="ko-KR" sz="1400" dirty="0">
+                <a:latin typeface="D2Coding" panose="020B0609020101020101" pitchFamily="49" charset="-127"/>
+                <a:ea typeface="D2Coding" panose="020B0609020101020101" pitchFamily="49" charset="-127"/>
+              </a:rPr>
+              <a:t>)</a:t>
+            </a:r>
+          </a:p>
+        </p:txBody>
+      </p:sp>
+    </p:spTree>
+    <p:extLst>
+      <p:ext uri="{BB962C8B-B14F-4D97-AF65-F5344CB8AC3E}">
+        <p14:creationId xmlns:p14="http://schemas.microsoft.com/office/powerpoint/2010/main" val="2047276898"/>
       </p:ext>
     </p:extLst>
   </p:cSld>
@@ -8005,6 +11463,189 @@
 </p:sld>
 </file>
 
+<file path=ppt/slides/slide20.xml><?xml version="1.0" encoding="utf-8"?>
+<p:sld xmlns:a="http://schemas.openxmlformats.org/drawingml/2006/main" xmlns:r="http://schemas.openxmlformats.org/officeDocument/2006/relationships" xmlns:p="http://schemas.openxmlformats.org/presentationml/2006/main">
+  <p:cSld>
+    <p:spTree>
+      <p:nvGrpSpPr>
+        <p:cNvPr id="1" name="">
+          <a:extLst>
+            <a:ext uri="{FF2B5EF4-FFF2-40B4-BE49-F238E27FC236}">
+              <a16:creationId xmlns:a16="http://schemas.microsoft.com/office/drawing/2014/main" id="{215CFB96-9F46-AB1F-E35E-384C2E997395}"/>
+            </a:ext>
+          </a:extLst>
+        </p:cNvPr>
+        <p:cNvGrpSpPr/>
+        <p:nvPr/>
+      </p:nvGrpSpPr>
+      <p:grpSpPr>
+        <a:xfrm>
+          <a:off x="0" y="0"/>
+          <a:ext cx="0" cy="0"/>
+          <a:chOff x="0" y="0"/>
+          <a:chExt cx="0" cy="0"/>
+        </a:xfrm>
+      </p:grpSpPr>
+      <p:sp>
+        <p:nvSpPr>
+          <p:cNvPr id="8" name="제목 7">
+            <a:extLst>
+              <a:ext uri="{FF2B5EF4-FFF2-40B4-BE49-F238E27FC236}">
+                <a16:creationId xmlns:a16="http://schemas.microsoft.com/office/drawing/2014/main" id="{9DBEB387-2169-C9CA-2685-EE8996B19BCF}"/>
+              </a:ext>
+            </a:extLst>
+          </p:cNvPr>
+          <p:cNvSpPr>
+            <a:spLocks noGrp="1"/>
+          </p:cNvSpPr>
+          <p:nvPr>
+            <p:ph type="title"/>
+          </p:nvPr>
+        </p:nvSpPr>
+        <p:spPr>
+          <a:xfrm>
+            <a:off x="521207" y="448056"/>
+            <a:ext cx="9727693" cy="640080"/>
+          </a:xfrm>
+        </p:spPr>
+        <p:txBody>
+          <a:bodyPr rtlCol="0">
+            <a:noAutofit/>
+          </a:bodyPr>
+          <a:lstStyle/>
+          <a:p>
+            <a:r>
+              <a:rPr lang="ko-KR" altLang="en-US" dirty="0">
+                <a:cs typeface="Segoe UI Light" panose="020B0502040204020203" pitchFamily="34" charset="0"/>
+              </a:rPr>
+              <a:t>토픽 모델링</a:t>
+            </a:r>
+            <a:r>
+              <a:rPr lang="en-US" altLang="ko-KR" dirty="0">
+                <a:cs typeface="Segoe UI Light" panose="020B0502040204020203" pitchFamily="34" charset="0"/>
+              </a:rPr>
+              <a:t>(Topic Modeling)</a:t>
+            </a:r>
+            <a:r>
+              <a:rPr lang="ko-KR" altLang="en-US" dirty="0">
+                <a:cs typeface="Segoe UI Light" panose="020B0502040204020203" pitchFamily="34" charset="0"/>
+              </a:rPr>
+              <a:t> 응용</a:t>
+            </a:r>
+          </a:p>
+        </p:txBody>
+      </p:sp>
+      <p:sp>
+        <p:nvSpPr>
+          <p:cNvPr id="12" name="슬라이드 번호 개체 틀 11">
+            <a:extLst>
+              <a:ext uri="{FF2B5EF4-FFF2-40B4-BE49-F238E27FC236}">
+                <a16:creationId xmlns:a16="http://schemas.microsoft.com/office/drawing/2014/main" id="{854784CB-9C62-CC53-3DED-FD45BAE5997F}"/>
+              </a:ext>
+            </a:extLst>
+          </p:cNvPr>
+          <p:cNvSpPr>
+            <a:spLocks noGrp="1"/>
+          </p:cNvSpPr>
+          <p:nvPr>
+            <p:ph type="sldNum" sz="quarter" idx="4"/>
+          </p:nvPr>
+        </p:nvSpPr>
+        <p:spPr/>
+        <p:txBody>
+          <a:bodyPr/>
+          <a:lstStyle/>
+          <a:p>
+            <a:fld id="{9860EDB8-5305-433F-BE41-D7A86D811DB3}" type="slidenum">
+              <a:rPr lang="en-US" altLang="ko-KR" noProof="0" smtClean="0"/>
+              <a:pPr/>
+              <a:t>20</a:t>
+            </a:fld>
+            <a:endParaRPr lang="ko-KR" altLang="en-US" noProof="0"/>
+          </a:p>
+        </p:txBody>
+      </p:sp>
+      <p:pic>
+        <p:nvPicPr>
+          <p:cNvPr id="2" name="그림 1" descr="문자 메시지">
+            <a:extLst>
+              <a:ext uri="{FF2B5EF4-FFF2-40B4-BE49-F238E27FC236}">
+                <a16:creationId xmlns:a16="http://schemas.microsoft.com/office/drawing/2014/main" id="{54F39C0C-8F2D-4149-D16A-E69A9B195FCA}"/>
+              </a:ext>
+            </a:extLst>
+          </p:cNvPr>
+          <p:cNvPicPr>
+            <a:picLocks noChangeAspect="1"/>
+          </p:cNvPicPr>
+          <p:nvPr/>
+        </p:nvPicPr>
+        <p:blipFill>
+          <a:blip r:embed="rId3"/>
+          <a:stretch>
+            <a:fillRect/>
+          </a:stretch>
+        </p:blipFill>
+        <p:spPr>
+          <a:xfrm>
+            <a:off x="10668000" y="109220"/>
+            <a:ext cx="1397000" cy="1047750"/>
+          </a:xfrm>
+          <a:prstGeom prst="rect">
+            <a:avLst/>
+          </a:prstGeom>
+        </p:spPr>
+      </p:pic>
+      <p:pic>
+        <p:nvPicPr>
+          <p:cNvPr id="4" name="그림 3">
+            <a:extLst>
+              <a:ext uri="{FF2B5EF4-FFF2-40B4-BE49-F238E27FC236}">
+                <a16:creationId xmlns:a16="http://schemas.microsoft.com/office/drawing/2014/main" id="{27B75699-6D83-65F7-110D-7FAD839C792B}"/>
+              </a:ext>
+            </a:extLst>
+          </p:cNvPr>
+          <p:cNvPicPr>
+            <a:picLocks noChangeAspect="1"/>
+          </p:cNvPicPr>
+          <p:nvPr/>
+        </p:nvPicPr>
+        <p:blipFill>
+          <a:blip r:embed="rId4"/>
+          <a:stretch>
+            <a:fillRect/>
+          </a:stretch>
+        </p:blipFill>
+        <p:spPr>
+          <a:xfrm>
+            <a:off x="1373270" y="1495565"/>
+            <a:ext cx="8023565" cy="4983743"/>
+          </a:xfrm>
+          <a:prstGeom prst="rect">
+            <a:avLst/>
+          </a:prstGeom>
+        </p:spPr>
+      </p:pic>
+    </p:spTree>
+    <p:extLst>
+      <p:ext uri="{BB962C8B-B14F-4D97-AF65-F5344CB8AC3E}">
+        <p14:creationId xmlns:p14="http://schemas.microsoft.com/office/powerpoint/2010/main" val="579738356"/>
+      </p:ext>
+    </p:extLst>
+  </p:cSld>
+  <p:clrMapOvr>
+    <a:masterClrMapping/>
+  </p:clrMapOvr>
+  <mc:AlternateContent xmlns:mc="http://schemas.openxmlformats.org/markup-compatibility/2006" xmlns:p14="http://schemas.microsoft.com/office/powerpoint/2010/main">
+    <mc:Choice Requires="p14">
+      <p:transition p14:dur="10"/>
+    </mc:Choice>
+    <mc:Fallback xmlns="">
+      <p:transition/>
+    </mc:Fallback>
+  </mc:AlternateContent>
+</p:sld>
+</file>
+
 <file path=ppt/slides/slide3.xml><?xml version="1.0" encoding="utf-8"?>
 <p:sld xmlns:a="http://schemas.openxmlformats.org/drawingml/2006/main" xmlns:r="http://schemas.openxmlformats.org/officeDocument/2006/relationships" xmlns:p="http://schemas.openxmlformats.org/presentationml/2006/main">
   <p:cSld>
@@ -8674,8 +12315,8 @@
           </a:p>
         </p:txBody>
       </p:sp>
-      <mc:AlternateContent xmlns:mc="http://schemas.openxmlformats.org/markup-compatibility/2006">
-        <mc:Choice xmlns:a14="http://schemas.microsoft.com/office/drawing/2010/main" Requires="a14">
+      <mc:AlternateContent xmlns:mc="http://schemas.openxmlformats.org/markup-compatibility/2006" xmlns:a14="http://schemas.microsoft.com/office/drawing/2010/main">
+        <mc:Choice Requires="a14">
           <p:sp>
             <p:nvSpPr>
               <p:cNvPr id="22" name="TextBox 21">
@@ -8704,6 +12345,7 @@
               </a:bodyPr>
               <a:lstStyle/>
               <a:p>
+                <a:pPr/>
                 <a14:m>
                   <m:oMathPara xmlns:m="http://schemas.openxmlformats.org/officeDocument/2006/math">
                     <m:oMathParaPr>
@@ -8724,7 +12366,7 @@
             </p:txBody>
           </p:sp>
         </mc:Choice>
-        <mc:Fallback>
+        <mc:Fallback xmlns="">
           <p:sp>
             <p:nvSpPr>
               <p:cNvPr id="22" name="TextBox 21">
@@ -8769,8 +12411,8 @@
           </p:sp>
         </mc:Fallback>
       </mc:AlternateContent>
-      <mc:AlternateContent xmlns:mc="http://schemas.openxmlformats.org/markup-compatibility/2006">
-        <mc:Choice xmlns:a14="http://schemas.microsoft.com/office/drawing/2010/main" Requires="a14">
+      <mc:AlternateContent xmlns:mc="http://schemas.openxmlformats.org/markup-compatibility/2006" xmlns:a14="http://schemas.microsoft.com/office/drawing/2010/main">
+        <mc:Choice Requires="a14">
           <p:sp>
             <p:nvSpPr>
               <p:cNvPr id="23" name="TextBox 22">
@@ -8799,6 +12441,7 @@
               </a:bodyPr>
               <a:lstStyle/>
               <a:p>
+                <a:pPr/>
                 <a14:m>
                   <m:oMathPara xmlns:m="http://schemas.openxmlformats.org/officeDocument/2006/math">
                     <m:oMathParaPr>
@@ -8819,7 +12462,7 @@
             </p:txBody>
           </p:sp>
         </mc:Choice>
-        <mc:Fallback>
+        <mc:Fallback xmlns="">
           <p:sp>
             <p:nvSpPr>
               <p:cNvPr id="23" name="TextBox 22">
@@ -8864,8 +12507,8 @@
           </p:sp>
         </mc:Fallback>
       </mc:AlternateContent>
-      <mc:AlternateContent xmlns:mc="http://schemas.openxmlformats.org/markup-compatibility/2006">
-        <mc:Choice xmlns:a14="http://schemas.microsoft.com/office/drawing/2010/main" Requires="a14">
+      <mc:AlternateContent xmlns:mc="http://schemas.openxmlformats.org/markup-compatibility/2006" xmlns:a14="http://schemas.microsoft.com/office/drawing/2010/main">
+        <mc:Choice Requires="a14">
           <p:sp>
             <p:nvSpPr>
               <p:cNvPr id="24" name="TextBox 23">
@@ -8894,6 +12537,7 @@
               </a:bodyPr>
               <a:lstStyle/>
               <a:p>
+                <a:pPr/>
                 <a14:m>
                   <m:oMathPara xmlns:m="http://schemas.openxmlformats.org/officeDocument/2006/math">
                     <m:oMathParaPr>
@@ -8914,7 +12558,7 @@
             </p:txBody>
           </p:sp>
         </mc:Choice>
-        <mc:Fallback>
+        <mc:Fallback xmlns="">
           <p:sp>
             <p:nvSpPr>
               <p:cNvPr id="24" name="TextBox 23">
@@ -8959,8 +12603,8 @@
           </p:sp>
         </mc:Fallback>
       </mc:AlternateContent>
-      <mc:AlternateContent xmlns:mc="http://schemas.openxmlformats.org/markup-compatibility/2006">
-        <mc:Choice xmlns:a14="http://schemas.microsoft.com/office/drawing/2010/main" Requires="a14">
+      <mc:AlternateContent xmlns:mc="http://schemas.openxmlformats.org/markup-compatibility/2006" xmlns:a14="http://schemas.microsoft.com/office/drawing/2010/main">
+        <mc:Choice Requires="a14">
           <p:sp>
             <p:nvSpPr>
               <p:cNvPr id="25" name="TextBox 24">
@@ -8989,6 +12633,7 @@
               </a:bodyPr>
               <a:lstStyle/>
               <a:p>
+                <a:pPr/>
                 <a14:m>
                   <m:oMathPara xmlns:m="http://schemas.openxmlformats.org/officeDocument/2006/math">
                     <m:oMathParaPr>
@@ -9028,7 +12673,7 @@
             </p:txBody>
           </p:sp>
         </mc:Choice>
-        <mc:Fallback>
+        <mc:Fallback xmlns="">
           <p:sp>
             <p:nvSpPr>
               <p:cNvPr id="25" name="TextBox 24">
@@ -9073,8 +12718,8 @@
           </p:sp>
         </mc:Fallback>
       </mc:AlternateContent>
-      <mc:AlternateContent xmlns:mc="http://schemas.openxmlformats.org/markup-compatibility/2006">
-        <mc:Choice xmlns:a14="http://schemas.microsoft.com/office/drawing/2010/main" Requires="a14">
+      <mc:AlternateContent xmlns:mc="http://schemas.openxmlformats.org/markup-compatibility/2006" xmlns:a14="http://schemas.microsoft.com/office/drawing/2010/main">
+        <mc:Choice Requires="a14">
           <p:sp>
             <p:nvSpPr>
               <p:cNvPr id="26" name="TextBox 25">
@@ -9103,6 +12748,7 @@
               </a:bodyPr>
               <a:lstStyle/>
               <a:p>
+                <a:pPr/>
                 <a14:m>
                   <m:oMathPara xmlns:m="http://schemas.openxmlformats.org/officeDocument/2006/math">
                     <m:oMathParaPr>
@@ -9166,7 +12812,7 @@
             </p:txBody>
           </p:sp>
         </mc:Choice>
-        <mc:Fallback>
+        <mc:Fallback xmlns="">
           <p:sp>
             <p:nvSpPr>
               <p:cNvPr id="26" name="TextBox 25">
@@ -9211,8 +12857,8 @@
           </p:sp>
         </mc:Fallback>
       </mc:AlternateContent>
-      <mc:AlternateContent xmlns:mc="http://schemas.openxmlformats.org/markup-compatibility/2006">
-        <mc:Choice xmlns:a14="http://schemas.microsoft.com/office/drawing/2010/main" Requires="a14">
+      <mc:AlternateContent xmlns:mc="http://schemas.openxmlformats.org/markup-compatibility/2006" xmlns:a14="http://schemas.microsoft.com/office/drawing/2010/main">
+        <mc:Choice Requires="a14">
           <p:sp>
             <p:nvSpPr>
               <p:cNvPr id="28" name="TextBox 27">
@@ -9262,7 +12908,7 @@
             </p:txBody>
           </p:sp>
         </mc:Choice>
-        <mc:Fallback>
+        <mc:Fallback xmlns="">
           <p:sp>
             <p:nvSpPr>
               <p:cNvPr id="28" name="TextBox 27">

--- a/Linear_Algebra/w9_Topic Modeling.pptx
+++ b/Linear_Algebra/w9_Topic Modeling.pptx
@@ -16464,8 +16464,8 @@
           </a:p>
         </p:txBody>
       </p:sp>
-      <mc:AlternateContent xmlns:mc="http://schemas.openxmlformats.org/markup-compatibility/2006">
-        <mc:Choice xmlns:a14="http://schemas.microsoft.com/office/drawing/2010/main" Requires="a14">
+      <mc:AlternateContent xmlns:mc="http://schemas.openxmlformats.org/markup-compatibility/2006" xmlns:a14="http://schemas.microsoft.com/office/drawing/2010/main">
+        <mc:Choice Requires="a14">
           <p:sp>
             <p:nvSpPr>
               <p:cNvPr id="11" name="TextBox 10">
@@ -16664,7 +16664,7 @@
                     <m:sSub>
                       <m:sSubPr>
                         <m:ctrlPr>
-                          <a:rPr lang="en-US" altLang="ko-KR" smtClean="0">
+                          <a:rPr lang="en-US" altLang="ko-KR" i="1" smtClean="0">
                             <a:latin typeface="Cambria Math" panose="02040503050406030204" pitchFamily="18" charset="0"/>
                           </a:rPr>
                         </m:ctrlPr>
@@ -16812,7 +16812,7 @@
             </p:txBody>
           </p:sp>
         </mc:Choice>
-        <mc:Fallback>
+        <mc:Fallback xmlns="">
           <p:sp>
             <p:nvSpPr>
               <p:cNvPr id="11" name="TextBox 10">
@@ -17056,8 +17056,8 @@
           </a:p>
         </p:txBody>
       </p:sp>
-      <mc:AlternateContent xmlns:mc="http://schemas.openxmlformats.org/markup-compatibility/2006">
-        <mc:Choice xmlns:a14="http://schemas.microsoft.com/office/drawing/2010/main" Requires="a14">
+      <mc:AlternateContent xmlns:mc="http://schemas.openxmlformats.org/markup-compatibility/2006" xmlns:a14="http://schemas.microsoft.com/office/drawing/2010/main">
+        <mc:Choice Requires="a14">
           <p:sp>
             <p:nvSpPr>
               <p:cNvPr id="10" name="TextBox 9">
@@ -17243,7 +17243,7 @@
             </p:txBody>
           </p:sp>
         </mc:Choice>
-        <mc:Fallback>
+        <mc:Fallback xmlns="">
           <p:sp>
             <p:nvSpPr>
               <p:cNvPr id="10" name="TextBox 9">
@@ -17364,8 +17364,8 @@
           </a:prstGeom>
         </p:spPr>
       </p:pic>
-      <mc:AlternateContent xmlns:mc="http://schemas.openxmlformats.org/markup-compatibility/2006">
-        <mc:Choice xmlns:a14="http://schemas.microsoft.com/office/drawing/2010/main" Requires="a14">
+      <mc:AlternateContent xmlns:mc="http://schemas.openxmlformats.org/markup-compatibility/2006" xmlns:a14="http://schemas.microsoft.com/office/drawing/2010/main">
+        <mc:Choice Requires="a14">
           <p:sp>
             <p:nvSpPr>
               <p:cNvPr id="14" name="TextBox 13">
@@ -17404,8 +17404,8 @@
                     <m:sSub>
                       <m:sSubPr>
                         <m:ctrlPr>
-                          <a:rPr lang="ko-KR" altLang="en-US">
-                            <a:latin typeface="D2Coding" panose="020B0609020101020101" pitchFamily="49" charset="-127"/>
+                          <a:rPr lang="ko-KR" altLang="en-US" i="1">
+                            <a:latin typeface="Cambria Math" panose="02040503050406030204" pitchFamily="18" charset="0"/>
                             <a:ea typeface="D2Coding" panose="020B0609020101020101" pitchFamily="49" charset="-127"/>
                             <a:cs typeface="맑은 고딕 Semilight" panose="020B0502040204020203" pitchFamily="50" charset="-127"/>
                           </a:rPr>
@@ -17414,7 +17414,7 @@
                       <m:e>
                         <m:r>
                           <a:rPr lang="ko-KR" altLang="en-US">
-                            <a:latin typeface="D2Coding" panose="020B0609020101020101" pitchFamily="49" charset="-127"/>
+                            <a:latin typeface="Cambria Math" panose="02040503050406030204" pitchFamily="18" charset="0"/>
                             <a:ea typeface="D2Coding" panose="020B0609020101020101" pitchFamily="49" charset="-127"/>
                             <a:cs typeface="맑은 고딕 Semilight" panose="020B0502040204020203" pitchFamily="50" charset="-127"/>
                           </a:rPr>
@@ -17424,7 +17424,7 @@
                       <m:sub>
                         <m:r>
                           <a:rPr lang="ko-KR" altLang="en-US">
-                            <a:latin typeface="D2Coding" panose="020B0609020101020101" pitchFamily="49" charset="-127"/>
+                            <a:latin typeface="Cambria Math" panose="02040503050406030204" pitchFamily="18" charset="0"/>
                             <a:ea typeface="D2Coding" panose="020B0609020101020101" pitchFamily="49" charset="-127"/>
                             <a:cs typeface="맑은 고딕 Semilight" panose="020B0502040204020203" pitchFamily="50" charset="-127"/>
                           </a:rPr>
@@ -17494,7 +17494,7 @@
                   <m:oMath xmlns:m="http://schemas.openxmlformats.org/officeDocument/2006/math">
                     <m:r>
                       <a:rPr lang="en-US" altLang="ko-KR" dirty="0">
-                        <a:latin typeface="D2Coding" panose="020B0609020101020101" pitchFamily="49" charset="-127"/>
+                        <a:latin typeface="Cambria Math" panose="02040503050406030204" pitchFamily="18" charset="0"/>
                         <a:ea typeface="D2Coding" panose="020B0609020101020101" pitchFamily="49" charset="-127"/>
                         <a:cs typeface="맑은 고딕 Semilight" panose="020B0502040204020203" pitchFamily="50" charset="-127"/>
                       </a:rPr>
@@ -17502,7 +17502,7 @@
                     </m:r>
                     <m:r>
                       <a:rPr lang="en-US" altLang="ko-KR" dirty="0">
-                        <a:latin typeface="D2Coding" panose="020B0609020101020101" pitchFamily="49" charset="-127"/>
+                        <a:latin typeface="Cambria Math" panose="02040503050406030204" pitchFamily="18" charset="0"/>
                         <a:ea typeface="D2Coding" panose="020B0609020101020101" pitchFamily="49" charset="-127"/>
                         <a:cs typeface="맑은 고딕 Semilight" panose="020B0502040204020203" pitchFamily="50" charset="-127"/>
                       </a:rPr>
@@ -17510,7 +17510,7 @@
                     </m:r>
                     <m:r>
                       <a:rPr lang="en-US" altLang="ko-KR" dirty="0">
-                        <a:latin typeface="D2Coding" panose="020B0609020101020101" pitchFamily="49" charset="-127"/>
+                        <a:latin typeface="Cambria Math" panose="02040503050406030204" pitchFamily="18" charset="0"/>
                         <a:ea typeface="D2Coding" panose="020B0609020101020101" pitchFamily="49" charset="-127"/>
                         <a:cs typeface="맑은 고딕 Semilight" panose="020B0502040204020203" pitchFamily="50" charset="-127"/>
                       </a:rPr>
@@ -17538,8 +17538,8 @@
                     <m:sSub>
                       <m:sSubPr>
                         <m:ctrlPr>
-                          <a:rPr lang="en-US" altLang="ko-KR">
-                            <a:latin typeface="D2Coding" panose="020B0609020101020101" pitchFamily="49" charset="-127"/>
+                          <a:rPr lang="en-US" altLang="ko-KR" i="1">
+                            <a:latin typeface="Cambria Math" panose="02040503050406030204" pitchFamily="18" charset="0"/>
                             <a:ea typeface="D2Coding" panose="020B0609020101020101" pitchFamily="49" charset="-127"/>
                             <a:cs typeface="맑은 고딕 Semilight" panose="020B0502040204020203" pitchFamily="50" charset="-127"/>
                           </a:rPr>
@@ -17548,7 +17548,7 @@
                       <m:e>
                         <m:r>
                           <a:rPr lang="en-US" altLang="ko-KR">
-                            <a:latin typeface="D2Coding" panose="020B0609020101020101" pitchFamily="49" charset="-127"/>
+                            <a:latin typeface="Cambria Math" panose="02040503050406030204" pitchFamily="18" charset="0"/>
                             <a:ea typeface="D2Coding" panose="020B0609020101020101" pitchFamily="49" charset="-127"/>
                             <a:cs typeface="맑은 고딕 Semilight" panose="020B0502040204020203" pitchFamily="50" charset="-127"/>
                           </a:rPr>
@@ -17558,7 +17558,7 @@
                       <m:sub>
                         <m:r>
                           <a:rPr lang="en-US" altLang="ko-KR">
-                            <a:latin typeface="D2Coding" panose="020B0609020101020101" pitchFamily="49" charset="-127"/>
+                            <a:latin typeface="Cambria Math" panose="02040503050406030204" pitchFamily="18" charset="0"/>
                             <a:ea typeface="D2Coding" panose="020B0609020101020101" pitchFamily="49" charset="-127"/>
                             <a:cs typeface="맑은 고딕 Semilight" panose="020B0502040204020203" pitchFamily="50" charset="-127"/>
                           </a:rPr>
@@ -17620,7 +17620,7 @@
                   <m:oMath xmlns:m="http://schemas.openxmlformats.org/officeDocument/2006/math">
                     <m:r>
                       <a:rPr lang="en-US" altLang="ko-KR" dirty="0">
-                        <a:latin typeface="D2Coding" panose="020B0609020101020101" pitchFamily="49" charset="-127"/>
+                        <a:latin typeface="Cambria Math" panose="02040503050406030204" pitchFamily="18" charset="0"/>
                         <a:ea typeface="D2Coding" panose="020B0609020101020101" pitchFamily="49" charset="-127"/>
                         <a:cs typeface="맑은 고딕 Semilight" panose="020B0502040204020203" pitchFamily="50" charset="-127"/>
                       </a:rPr>
@@ -17628,7 +17628,7 @@
                     </m:r>
                     <m:r>
                       <a:rPr lang="en-US" altLang="ko-KR" dirty="0">
-                        <a:latin typeface="D2Coding" panose="020B0609020101020101" pitchFamily="49" charset="-127"/>
+                        <a:latin typeface="Cambria Math" panose="02040503050406030204" pitchFamily="18" charset="0"/>
                         <a:ea typeface="D2Coding" panose="020B0609020101020101" pitchFamily="49" charset="-127"/>
                         <a:cs typeface="맑은 고딕 Semilight" panose="020B0502040204020203" pitchFamily="50" charset="-127"/>
                       </a:rPr>
@@ -17656,8 +17656,8 @@
                     <m:sSubSup>
                       <m:sSubSupPr>
                         <m:ctrlPr>
-                          <a:rPr lang="ko-KR" altLang="en-US" dirty="0">
-                            <a:latin typeface="D2Coding" panose="020B0609020101020101" pitchFamily="49" charset="-127"/>
+                          <a:rPr lang="ko-KR" altLang="en-US" i="1" dirty="0">
+                            <a:latin typeface="Cambria Math" panose="02040503050406030204" pitchFamily="18" charset="0"/>
                             <a:ea typeface="D2Coding" panose="020B0609020101020101" pitchFamily="49" charset="-127"/>
                             <a:cs typeface="맑은 고딕 Semilight" panose="020B0502040204020203" pitchFamily="50" charset="-127"/>
                           </a:rPr>
@@ -17666,7 +17666,7 @@
                       <m:e>
                         <m:r>
                           <a:rPr lang="ko-KR" altLang="en-US" dirty="0">
-                            <a:latin typeface="D2Coding" panose="020B0609020101020101" pitchFamily="49" charset="-127"/>
+                            <a:latin typeface="Cambria Math" panose="02040503050406030204" pitchFamily="18" charset="0"/>
                             <a:ea typeface="D2Coding" panose="020B0609020101020101" pitchFamily="49" charset="-127"/>
                             <a:cs typeface="맑은 고딕 Semilight" panose="020B0502040204020203" pitchFamily="50" charset="-127"/>
                           </a:rPr>
@@ -17676,7 +17676,7 @@
                       <m:sub>
                         <m:r>
                           <a:rPr lang="ko-KR" altLang="en-US" dirty="0">
-                            <a:latin typeface="D2Coding" panose="020B0609020101020101" pitchFamily="49" charset="-127"/>
+                            <a:latin typeface="Cambria Math" panose="02040503050406030204" pitchFamily="18" charset="0"/>
                             <a:ea typeface="D2Coding" panose="020B0609020101020101" pitchFamily="49" charset="-127"/>
                             <a:cs typeface="맑은 고딕 Semilight" panose="020B0502040204020203" pitchFamily="50" charset="-127"/>
                           </a:rPr>
@@ -17686,7 +17686,7 @@
                       <m:sup>
                         <m:r>
                           <a:rPr lang="ko-KR" altLang="en-US" dirty="0">
-                            <a:latin typeface="D2Coding" panose="020B0609020101020101" pitchFamily="49" charset="-127"/>
+                            <a:latin typeface="Cambria Math" panose="02040503050406030204" pitchFamily="18" charset="0"/>
                             <a:ea typeface="D2Coding" panose="020B0609020101020101" pitchFamily="49" charset="-127"/>
                             <a:cs typeface="맑은 고딕 Semilight" panose="020B0502040204020203" pitchFamily="50" charset="-127"/>
                           </a:rPr>
@@ -17740,23 +17740,15 @@
                   <m:oMath xmlns:m="http://schemas.openxmlformats.org/officeDocument/2006/math">
                     <m:r>
                       <a:rPr lang="en-US" altLang="ko-KR" dirty="0">
-                        <a:latin typeface="D2Coding" panose="020B0609020101020101" pitchFamily="49" charset="-127"/>
+                        <a:latin typeface="Cambria Math" panose="02040503050406030204" pitchFamily="18" charset="0"/>
                         <a:ea typeface="D2Coding" panose="020B0609020101020101" pitchFamily="49" charset="-127"/>
                         <a:cs typeface="맑은 고딕 Semilight" panose="020B0502040204020203" pitchFamily="50" charset="-127"/>
                       </a:rPr>
-                      <m:t>1</m:t>
+                      <m:t>1×</m:t>
                     </m:r>
                     <m:r>
                       <a:rPr lang="en-US" altLang="ko-KR" dirty="0">
-                        <a:latin typeface="D2Coding" panose="020B0609020101020101" pitchFamily="49" charset="-127"/>
-                        <a:ea typeface="D2Coding" panose="020B0609020101020101" pitchFamily="49" charset="-127"/>
-                        <a:cs typeface="맑은 고딕 Semilight" panose="020B0502040204020203" pitchFamily="50" charset="-127"/>
-                      </a:rPr>
-                      <m:t>×</m:t>
-                    </m:r>
-                    <m:r>
-                      <a:rPr lang="en-US" altLang="ko-KR" dirty="0">
-                        <a:latin typeface="D2Coding" panose="020B0609020101020101" pitchFamily="49" charset="-127"/>
+                        <a:latin typeface="Cambria Math" panose="02040503050406030204" pitchFamily="18" charset="0"/>
                         <a:ea typeface="D2Coding" panose="020B0609020101020101" pitchFamily="49" charset="-127"/>
                         <a:cs typeface="맑은 고딕 Semilight" panose="020B0502040204020203" pitchFamily="50" charset="-127"/>
                       </a:rPr>
@@ -17776,7 +17768,7 @@
             </p:txBody>
           </p:sp>
         </mc:Choice>
-        <mc:Fallback>
+        <mc:Fallback xmlns="">
           <p:sp>
             <p:nvSpPr>
               <p:cNvPr id="14" name="TextBox 13">
@@ -17965,8 +17957,8 @@
           </a:p>
         </p:txBody>
       </p:sp>
-      <mc:AlternateContent xmlns:mc="http://schemas.openxmlformats.org/markup-compatibility/2006">
-        <mc:Choice xmlns:a14="http://schemas.microsoft.com/office/drawing/2010/main" Requires="a14">
+      <mc:AlternateContent xmlns:mc="http://schemas.openxmlformats.org/markup-compatibility/2006" xmlns:a14="http://schemas.microsoft.com/office/drawing/2010/main">
+        <mc:Choice Requires="a14">
           <p:sp>
             <p:nvSpPr>
               <p:cNvPr id="10" name="TextBox 9">
@@ -17981,7 +17973,7 @@
             </p:nvSpPr>
             <p:spPr>
               <a:xfrm>
-                <a:off x="634904" y="1358808"/>
+                <a:off x="634904" y="1277528"/>
                 <a:ext cx="11214196" cy="879984"/>
               </a:xfrm>
               <a:prstGeom prst="rect">
@@ -18181,7 +18173,7 @@
                     <a:ea typeface="D2Coding" panose="020B0609020101020101" pitchFamily="49" charset="-127"/>
                     <a:cs typeface="맑은 고딕 Semilight" panose="020B0502040204020203" pitchFamily="50" charset="-127"/>
                   </a:rPr>
-                  <a:t>되는 이미지를 이해하자</a:t>
+                  <a:t>되는 이미지를 이해하자 </a:t>
                 </a:r>
                 <a:endParaRPr lang="en-US" altLang="ko-KR" dirty="0">
                   <a:latin typeface="D2Coding" panose="020B0609020101020101" pitchFamily="49" charset="-127"/>
@@ -18192,7 +18184,7 @@
             </p:txBody>
           </p:sp>
         </mc:Choice>
-        <mc:Fallback>
+        <mc:Fallback xmlns="">
           <p:sp>
             <p:nvSpPr>
               <p:cNvPr id="10" name="TextBox 9">
@@ -18209,7 +18201,7 @@
             </p:nvSpPr>
             <p:spPr>
               <a:xfrm>
-                <a:off x="634904" y="1358808"/>
+                <a:off x="634904" y="1277528"/>
                 <a:ext cx="11214196" cy="879984"/>
               </a:xfrm>
               <a:prstGeom prst="rect">
@@ -18344,8 +18336,8 @@
           </a:prstGeom>
         </p:spPr>
       </p:pic>
-      <mc:AlternateContent xmlns:mc="http://schemas.openxmlformats.org/markup-compatibility/2006">
-        <mc:Choice xmlns:a14="http://schemas.microsoft.com/office/drawing/2010/main" Requires="a14">
+      <mc:AlternateContent xmlns:mc="http://schemas.openxmlformats.org/markup-compatibility/2006" xmlns:a14="http://schemas.microsoft.com/office/drawing/2010/main">
+        <mc:Choice Requires="a14">
           <p:sp>
             <p:nvSpPr>
               <p:cNvPr id="14" name="TextBox 13">
@@ -18583,7 +18575,7 @@
             </p:txBody>
           </p:sp>
         </mc:Choice>
-        <mc:Fallback>
+        <mc:Fallback xmlns="">
           <p:sp>
             <p:nvSpPr>
               <p:cNvPr id="14" name="TextBox 13">
@@ -18628,6 +18620,56 @@
           </p:sp>
         </mc:Fallback>
       </mc:AlternateContent>
+      <p:sp>
+        <p:nvSpPr>
+          <p:cNvPr id="16" name="TextBox 15">
+            <a:extLst>
+              <a:ext uri="{FF2B5EF4-FFF2-40B4-BE49-F238E27FC236}">
+                <a16:creationId xmlns:a16="http://schemas.microsoft.com/office/drawing/2014/main" id="{E279E256-DE18-D41D-7B30-85F33C10E13C}"/>
+              </a:ext>
+            </a:extLst>
+          </p:cNvPr>
+          <p:cNvSpPr txBox="1"/>
+          <p:nvPr/>
+        </p:nvSpPr>
+        <p:spPr>
+          <a:xfrm>
+            <a:off x="7445484" y="2242069"/>
+            <a:ext cx="3826199" cy="338554"/>
+          </a:xfrm>
+          <a:prstGeom prst="rect">
+            <a:avLst/>
+          </a:prstGeom>
+          <a:noFill/>
+        </p:spPr>
+        <p:txBody>
+          <a:bodyPr wrap="square">
+            <a:spAutoFit/>
+          </a:bodyPr>
+          <a:lstStyle/>
+          <a:p>
+            <a:r>
+              <a:rPr lang="en-US" altLang="ko-KR" sz="1600" dirty="0">
+                <a:latin typeface="D2Coding" panose="020B0609020101020101" pitchFamily="49" charset="-127"/>
+                <a:ea typeface="D2Coding" panose="020B0609020101020101" pitchFamily="49" charset="-127"/>
+                <a:cs typeface="맑은 고딕 Semilight" panose="020B0502040204020203" pitchFamily="50" charset="-127"/>
+                <a:hlinkClick r:id="rId8"/>
+              </a:rPr>
+              <a:t>wiki/</a:t>
+            </a:r>
+            <a:r>
+              <a:rPr lang="en-US" altLang="ko-KR" sz="1600" dirty="0" err="1">
+                <a:latin typeface="D2Coding" panose="020B0609020101020101" pitchFamily="49" charset="-127"/>
+                <a:ea typeface="D2Coding" panose="020B0609020101020101" pitchFamily="49" charset="-127"/>
+                <a:cs typeface="맑은 고딕 Semilight" panose="020B0502040204020203" pitchFamily="50" charset="-127"/>
+                <a:hlinkClick r:id="rId8"/>
+              </a:rPr>
+              <a:t>Eigenvalues_and_eigenvectors</a:t>
+            </a:r>
+            <a:endParaRPr lang="ko-KR" altLang="en-US" sz="1600" dirty="0"/>
+          </a:p>
+        </p:txBody>
+      </p:sp>
     </p:spTree>
     <p:extLst>
       <p:ext uri="{BB962C8B-B14F-4D97-AF65-F5344CB8AC3E}">
